--- a/documentation/Presentation.pptx
+++ b/documentation/Presentation.pptx
@@ -1905,7 +1905,7 @@
               <a:buNone/>
             </a:pPr>
             <a:r>
-              <a:rPr lang="en-US" sz="1000" b="1" kern="0" spc="250" dirty="0">
+              <a:rPr lang="en-US" sz="1200" b="1" kern="0" spc="250" dirty="0">
                 <a:solidFill>
                   <a:srgbClr val="00B4A6"/>
                 </a:solidFill>
@@ -1915,7 +1915,7 @@
               </a:rPr>
               <a:t>DATA MINING &amp; MACHINE LEARNING</a:t>
             </a:r>
-            <a:endParaRPr lang="en-US" sz="1000" dirty="0"/>
+            <a:endParaRPr lang="en-US" sz="1200" dirty="0"/>
           </a:p>
         </p:txBody>
       </p:sp>
@@ -1994,7 +1994,7 @@
               <a:buNone/>
             </a:pPr>
             <a:r>
-              <a:rPr lang="en-US" sz="1300" dirty="0">
+              <a:rPr lang="en-US" dirty="0">
                 <a:solidFill>
                   <a:srgbClr val="7A8FA6"/>
                 </a:solidFill>
@@ -2005,7 +2005,7 @@
               <a:t>Data Mining &amp; Machine Learning Project </a:t>
             </a:r>
             <a:br>
-              <a:rPr lang="en-US" sz="1300" dirty="0">
+              <a:rPr lang="en-US" dirty="0">
                 <a:solidFill>
                   <a:srgbClr val="7A8FA6"/>
                 </a:solidFill>
@@ -2015,7 +2015,7 @@
               </a:rPr>
             </a:br>
             <a:r>
-              <a:rPr lang="en-US" sz="1300" dirty="0">
+              <a:rPr lang="en-US" dirty="0">
                 <a:solidFill>
                   <a:srgbClr val="7A8FA6"/>
                 </a:solidFill>
@@ -2025,7 +2025,7 @@
               </a:rPr>
               <a:t>M.Sc. in Artificial Intelligence and Data Engineering — Academic Year 2025–2026</a:t>
             </a:r>
-            <a:endParaRPr lang="en-US" sz="1300" dirty="0"/>
+            <a:endParaRPr lang="en-US" dirty="0"/>
           </a:p>
         </p:txBody>
       </p:sp>
@@ -2086,7 +2086,7 @@
               <a:buNone/>
             </a:pPr>
             <a:r>
-              <a:rPr lang="en-US" sz="1150" dirty="0">
+              <a:rPr lang="en-US" sz="1600" dirty="0">
                 <a:solidFill>
                   <a:srgbClr val="7A8FA6"/>
                 </a:solidFill>
@@ -2094,9 +2094,9 @@
                 <a:ea typeface="Calibri" pitchFamily="34" charset="-122"/>
                 <a:cs typeface="Calibri" pitchFamily="34" charset="-120"/>
               </a:rPr>
-              <a:t>[Pedro Carneiro — ID: 724961]   |   [Andrea Zanin— ID: 635350]</a:t>
-            </a:r>
-            <a:endParaRPr lang="en-US" sz="1150" dirty="0"/>
+              <a:t>[Pedro Carneiro Junior — ID: 724961]   |   [Andrea Zanin— ID: 635350]</a:t>
+            </a:r>
+            <a:endParaRPr lang="en-US" sz="1600" dirty="0"/>
           </a:p>
         </p:txBody>
       </p:sp>
@@ -2125,7 +2125,7 @@
               <a:buNone/>
             </a:pPr>
             <a:r>
-              <a:rPr lang="en-US" sz="1050" dirty="0">
+              <a:rPr lang="en-US" sz="1400" dirty="0">
                 <a:solidFill>
                   <a:srgbClr val="4A6587"/>
                 </a:solidFill>
@@ -2135,7 +2135,7 @@
               </a:rPr>
               <a:t>[28/07/2026]</a:t>
             </a:r>
-            <a:endParaRPr lang="en-US" sz="1050" dirty="0"/>
+            <a:endParaRPr lang="en-US" sz="1400" dirty="0"/>
           </a:p>
         </p:txBody>
       </p:sp>
@@ -2447,14 +2447,14 @@
               <a:buNone/>
             </a:pPr>
             <a:r>
-              <a:rPr lang="en-US" sz="750" b="1" kern="0" spc="150" dirty="0">
+              <a:rPr lang="en-US" sz="1200" b="1" kern="0" spc="150" dirty="0">
                 <a:solidFill>
                   <a:srgbClr val="FFFFFF"/>
                 </a:solidFill>
               </a:rPr>
               <a:t>EXPLAINABILITY</a:t>
             </a:r>
-            <a:endParaRPr lang="en-US" sz="750" dirty="0"/>
+            <a:endParaRPr lang="en-US" sz="1200" dirty="0"/>
           </a:p>
         </p:txBody>
       </p:sp>
@@ -2505,8 +2505,8 @@
         </p:nvSpPr>
         <p:spPr>
           <a:xfrm>
-            <a:off x="4663440" y="1170432"/>
-            <a:ext cx="4069080" cy="274320"/>
+            <a:off x="4234373" y="1097280"/>
+            <a:ext cx="4498146" cy="274320"/>
           </a:xfrm>
           <a:prstGeom prst="rect">
             <a:avLst/>
@@ -2522,7 +2522,7 @@
               <a:buNone/>
             </a:pPr>
             <a:r>
-              <a:rPr lang="en-US" sz="1200" b="1" dirty="0">
+              <a:rPr lang="en-US" sz="1600" b="1" dirty="0">
                 <a:solidFill>
                   <a:srgbClr val="1C2B4A"/>
                 </a:solidFill>
@@ -2544,8 +2544,8 @@
         </p:nvSpPr>
         <p:spPr>
           <a:xfrm>
-            <a:off x="4663440" y="1508760"/>
-            <a:ext cx="4069080" cy="2331720"/>
+            <a:off x="4234374" y="1371600"/>
+            <a:ext cx="4498145" cy="3570006"/>
           </a:xfrm>
           <a:prstGeom prst="rect">
             <a:avLst/>
@@ -2557,15 +2557,14 @@
           <a:bodyPr wrap="square" lIns="0" tIns="0" rIns="0" bIns="0" rtlCol="0" anchor="t"/>
           <a:lstStyle/>
           <a:p>
-            <a:pPr marL="342900" indent="-342900">
+            <a:pPr>
               <a:spcAft>
                 <a:spcPts val="500"/>
               </a:spcAft>
               <a:buSzPct val="100000"/>
-              <a:buChar char="•"/>
-            </a:pPr>
-            <a:r>
-              <a:rPr lang="en-US" sz="1100" dirty="0">
+            </a:pPr>
+            <a:r>
+              <a:rPr lang="en-US" sz="1400" dirty="0">
                 <a:solidFill>
                   <a:srgbClr val="1E293B"/>
                 </a:solidFill>
@@ -2576,7 +2575,7 @@
               <a:t>SHAP (</a:t>
             </a:r>
             <a:r>
-              <a:rPr lang="en-US" sz="1100" dirty="0" err="1">
+              <a:rPr lang="en-US" sz="1400" dirty="0" err="1">
                 <a:solidFill>
                   <a:srgbClr val="1E293B"/>
                 </a:solidFill>
@@ -2587,7 +2586,7 @@
               <a:t>TreeExplainer</a:t>
             </a:r>
             <a:r>
-              <a:rPr lang="en-US" sz="1100" dirty="0">
+              <a:rPr lang="en-US" sz="1400" dirty="0">
                 <a:solidFill>
                   <a:srgbClr val="1E293B"/>
                 </a:solidFill>
@@ -2598,7 +2597,7 @@
               <a:t>) was used because </a:t>
             </a:r>
             <a:r>
-              <a:rPr lang="en-US" sz="1100" dirty="0" err="1">
+              <a:rPr lang="en-US" sz="1400" dirty="0" err="1">
                 <a:solidFill>
                   <a:srgbClr val="1E293B"/>
                 </a:solidFill>
@@ -2609,7 +2608,7 @@
               <a:t>XGBoost</a:t>
             </a:r>
             <a:r>
-              <a:rPr lang="en-US" sz="1100" dirty="0">
+              <a:rPr lang="en-US" sz="1400" dirty="0">
                 <a:solidFill>
                   <a:srgbClr val="1E293B"/>
                 </a:solidFill>
@@ -2621,15 +2620,14 @@
             </a:r>
           </a:p>
           <a:p>
-            <a:pPr marL="342900" indent="-342900">
+            <a:pPr>
               <a:spcAft>
                 <a:spcPts val="500"/>
               </a:spcAft>
               <a:buSzPct val="100000"/>
-              <a:buChar char="•"/>
-            </a:pPr>
-            <a:r>
-              <a:rPr lang="en-US" sz="1100" dirty="0">
+            </a:pPr>
+            <a:r>
+              <a:rPr lang="en-US" sz="1400" dirty="0">
                 <a:solidFill>
                   <a:srgbClr val="1E293B"/>
                 </a:solidFill>
@@ -2641,15 +2639,14 @@
             </a:r>
           </a:p>
           <a:p>
-            <a:pPr marL="342900" indent="-342900">
+            <a:pPr>
               <a:spcAft>
                 <a:spcPts val="500"/>
               </a:spcAft>
               <a:buSzPct val="100000"/>
-              <a:buChar char="•"/>
-            </a:pPr>
-            <a:r>
-              <a:rPr lang="en-US" sz="1100" dirty="0">
+            </a:pPr>
+            <a:r>
+              <a:rPr lang="en-US" sz="1400" dirty="0">
                 <a:solidFill>
                   <a:srgbClr val="1E293B"/>
                 </a:solidFill>
@@ -2661,15 +2658,14 @@
             </a:r>
           </a:p>
           <a:p>
-            <a:pPr marL="342900" indent="-342900">
+            <a:pPr>
               <a:spcAft>
                 <a:spcPts val="500"/>
               </a:spcAft>
               <a:buSzPct val="100000"/>
-              <a:buChar char="•"/>
-            </a:pPr>
-            <a:r>
-              <a:rPr lang="en-US" sz="1100" dirty="0">
+            </a:pPr>
+            <a:r>
+              <a:rPr lang="en-US" sz="1400" dirty="0">
                 <a:solidFill>
                   <a:srgbClr val="1E293B"/>
                 </a:solidFill>
@@ -2704,7 +2700,7 @@
         </p:blipFill>
         <p:spPr>
           <a:xfrm>
-            <a:off x="912527" y="1097280"/>
+            <a:off x="411480" y="1097280"/>
             <a:ext cx="2795874" cy="1922163"/>
           </a:xfrm>
           <a:prstGeom prst="rect">
@@ -2734,7 +2730,7 @@
         </p:blipFill>
         <p:spPr>
           <a:xfrm>
-            <a:off x="912526" y="3165745"/>
+            <a:off x="1311812" y="3019443"/>
             <a:ext cx="2795874" cy="1922163"/>
           </a:xfrm>
           <a:prstGeom prst="rect">
@@ -2834,14 +2830,14 @@
               <a:buNone/>
             </a:pPr>
             <a:r>
-              <a:rPr lang="en-US" sz="750" b="1" kern="0" spc="150" dirty="0">
+              <a:rPr lang="en-US" sz="1200" b="1" kern="0" spc="150" dirty="0">
                 <a:solidFill>
                   <a:srgbClr val="FFFFFF"/>
                 </a:solidFill>
               </a:rPr>
               <a:t>EXPLAINABILITY</a:t>
             </a:r>
-            <a:endParaRPr lang="en-US" sz="750" dirty="0"/>
+            <a:endParaRPr lang="en-US" sz="1200" dirty="0"/>
           </a:p>
         </p:txBody>
       </p:sp>
@@ -2892,8 +2888,8 @@
         </p:nvSpPr>
         <p:spPr>
           <a:xfrm>
-            <a:off x="4663440" y="1170432"/>
-            <a:ext cx="4069080" cy="274320"/>
+            <a:off x="3863692" y="1097280"/>
+            <a:ext cx="4868828" cy="274320"/>
           </a:xfrm>
           <a:prstGeom prst="rect">
             <a:avLst/>
@@ -2931,8 +2927,8 @@
         </p:nvSpPr>
         <p:spPr>
           <a:xfrm>
-            <a:off x="4663440" y="1508760"/>
-            <a:ext cx="4069080" cy="2331720"/>
+            <a:off x="3863692" y="1371600"/>
+            <a:ext cx="4868828" cy="2468880"/>
           </a:xfrm>
           <a:prstGeom prst="rect">
             <a:avLst/>
@@ -2944,15 +2940,14 @@
           <a:bodyPr wrap="square" lIns="0" tIns="0" rIns="0" bIns="0" rtlCol="0" anchor="t"/>
           <a:lstStyle/>
           <a:p>
-            <a:pPr marL="342900" indent="-342900">
+            <a:pPr>
               <a:spcAft>
                 <a:spcPts val="500"/>
               </a:spcAft>
               <a:buSzPct val="100000"/>
-              <a:buChar char="•"/>
-            </a:pPr>
-            <a:r>
-              <a:rPr lang="en-US" sz="1100" dirty="0">
+            </a:pPr>
+            <a:r>
+              <a:rPr lang="en-US" sz="1200" dirty="0">
                 <a:solidFill>
                   <a:srgbClr val="1E293B"/>
                 </a:solidFill>
@@ -2964,15 +2959,14 @@
             </a:r>
           </a:p>
           <a:p>
-            <a:pPr marL="342900" indent="-342900">
+            <a:pPr>
               <a:spcAft>
                 <a:spcPts val="500"/>
               </a:spcAft>
               <a:buSzPct val="100000"/>
-              <a:buChar char="•"/>
-            </a:pPr>
-            <a:r>
-              <a:rPr lang="en-US" sz="1100" dirty="0">
+            </a:pPr>
+            <a:r>
+              <a:rPr lang="en-US" sz="1200" dirty="0">
                 <a:solidFill>
                   <a:srgbClr val="1E293B"/>
                 </a:solidFill>
@@ -2983,7 +2977,7 @@
               <a:t>Key features driving this instance include:  Release Year: 2018 Monetization: Free (</a:t>
             </a:r>
             <a:r>
-              <a:rPr lang="en-US" sz="1100" dirty="0" err="1">
+              <a:rPr lang="en-US" sz="1200" dirty="0" err="1">
                 <a:solidFill>
                   <a:srgbClr val="1E293B"/>
                 </a:solidFill>
@@ -2994,7 +2988,7 @@
               <a:t>tag_Free_to_Play</a:t>
             </a:r>
             <a:r>
-              <a:rPr lang="en-US" sz="1100" dirty="0">
+              <a:rPr lang="en-US" sz="1200" dirty="0">
                 <a:solidFill>
                   <a:srgbClr val="1E293B"/>
                 </a:solidFill>
@@ -3002,7 +2996,7 @@
                 <a:ea typeface="Calibri" pitchFamily="34" charset="-122"/>
                 <a:cs typeface="Calibri" pitchFamily="34" charset="-120"/>
               </a:rPr>
-              <a:t> = 1 and price = 0).Game Characteristics: Indie category, no multiplayer, and no Steam Trading Cards</a:t>
+              <a:t> = 1 and price = 0). Game Characteristics: Indie category, no multiplayer, and no Steam Trading Cards</a:t>
             </a:r>
           </a:p>
         </p:txBody>
@@ -3059,7 +3053,7 @@
         </p:blipFill>
         <p:spPr>
           <a:xfrm>
-            <a:off x="411480" y="3010486"/>
+            <a:off x="1562217" y="2967228"/>
             <a:ext cx="2301475" cy="1869948"/>
           </a:xfrm>
           <a:prstGeom prst="rect">
@@ -3089,7 +3083,7 @@
         </p:blipFill>
         <p:spPr>
           <a:xfrm>
-            <a:off x="5060500" y="2612282"/>
+            <a:off x="4660509" y="2471605"/>
             <a:ext cx="3275194" cy="2456395"/>
           </a:xfrm>
           <a:prstGeom prst="rect">
@@ -3189,14 +3183,14 @@
               <a:buNone/>
             </a:pPr>
             <a:r>
-              <a:rPr lang="en-US" sz="750" b="1" kern="0" spc="150" dirty="0">
+              <a:rPr lang="en-US" sz="900" b="1" kern="0" spc="150" dirty="0">
                 <a:solidFill>
                   <a:srgbClr val="FFFFFF"/>
                 </a:solidFill>
               </a:rPr>
               <a:t>CRITICAL DISCUSSION</a:t>
             </a:r>
-            <a:endParaRPr lang="en-US" sz="750" dirty="0"/>
+            <a:endParaRPr lang="en-US" sz="900" dirty="0"/>
           </a:p>
         </p:txBody>
       </p:sp>
@@ -3347,8 +3341,8 @@
         </p:nvSpPr>
         <p:spPr>
           <a:xfrm>
-            <a:off x="4663440" y="1170432"/>
-            <a:ext cx="4069080" cy="274320"/>
+            <a:off x="4128868" y="1170432"/>
+            <a:ext cx="4603652" cy="274320"/>
           </a:xfrm>
           <a:prstGeom prst="rect">
             <a:avLst/>
@@ -3386,8 +3380,8 @@
         </p:nvSpPr>
         <p:spPr>
           <a:xfrm>
-            <a:off x="4663440" y="1508760"/>
-            <a:ext cx="4069080" cy="2331720"/>
+            <a:off x="4128868" y="1508760"/>
+            <a:ext cx="4603652" cy="3067812"/>
           </a:xfrm>
           <a:prstGeom prst="rect">
             <a:avLst/>
@@ -3399,15 +3393,14 @@
           <a:bodyPr wrap="square" lIns="0" tIns="0" rIns="0" bIns="0" rtlCol="0" anchor="t"/>
           <a:lstStyle/>
           <a:p>
-            <a:pPr marL="342900" indent="-342900">
+            <a:pPr>
               <a:spcAft>
                 <a:spcPts val="500"/>
               </a:spcAft>
               <a:buSzPct val="100000"/>
-              <a:buChar char="•"/>
-            </a:pPr>
-            <a:r>
-              <a:rPr lang="en-US" sz="1100" dirty="0">
+            </a:pPr>
+            <a:r>
+              <a:rPr lang="en-US" sz="1200" dirty="0">
                 <a:solidFill>
                   <a:srgbClr val="1E293B"/>
                 </a:solidFill>
@@ -3419,331 +3412,273 @@
             </a:r>
           </a:p>
           <a:p>
-            <a:pPr marL="342900" indent="-342900">
+            <a:pPr>
               <a:spcAft>
                 <a:spcPts val="500"/>
               </a:spcAft>
               <a:buSzPct val="100000"/>
-              <a:buChar char="•"/>
-            </a:pPr>
-            <a:r>
-              <a:rPr lang="it-IT" sz="1100" dirty="0"/>
-              <a:t>The </a:t>
-            </a:r>
-            <a:r>
-              <a:rPr lang="it-IT" sz="1100" dirty="0" err="1"/>
-              <a:t>errors</a:t>
-            </a:r>
-            <a:r>
-              <a:rPr lang="it-IT" sz="1100" dirty="0"/>
-              <a:t> stem </a:t>
-            </a:r>
-            <a:r>
-              <a:rPr lang="it-IT" sz="1100" dirty="0" err="1"/>
-              <a:t>not</a:t>
-            </a:r>
-            <a:r>
-              <a:rPr lang="it-IT" sz="1100" dirty="0"/>
-              <a:t> from </a:t>
-            </a:r>
-            <a:r>
-              <a:rPr lang="it-IT" sz="1100" dirty="0" err="1"/>
-              <a:t>unusual</a:t>
-            </a:r>
-            <a:r>
-              <a:rPr lang="it-IT" sz="1100" dirty="0"/>
-              <a:t> </a:t>
-            </a:r>
-            <a:r>
-              <a:rPr lang="it-IT" sz="1100" dirty="0" err="1"/>
-              <a:t>intrinsic</a:t>
-            </a:r>
-            <a:r>
-              <a:rPr lang="it-IT" sz="1100" dirty="0"/>
-              <a:t> features, </a:t>
-            </a:r>
-            <a:r>
-              <a:rPr lang="it-IT" sz="1100" dirty="0" err="1"/>
-              <a:t>but</a:t>
-            </a:r>
-            <a:r>
-              <a:rPr lang="it-IT" sz="1100" dirty="0"/>
-              <a:t> from the </a:t>
-            </a:r>
-            <a:r>
-              <a:rPr lang="it-IT" sz="1100" dirty="0" err="1"/>
-              <a:t>absence</a:t>
-            </a:r>
-            <a:r>
-              <a:rPr lang="it-IT" sz="1100" dirty="0"/>
-              <a:t> of </a:t>
-            </a:r>
-            <a:r>
-              <a:rPr lang="it-IT" sz="1100" dirty="0" err="1"/>
-              <a:t>extrinsic</a:t>
-            </a:r>
-            <a:r>
-              <a:rPr lang="it-IT" sz="1100" dirty="0"/>
-              <a:t> data. The model </a:t>
-            </a:r>
-            <a:r>
-              <a:rPr lang="it-IT" sz="1100" dirty="0" err="1"/>
-              <a:t>cannot</a:t>
-            </a:r>
-            <a:r>
-              <a:rPr lang="it-IT" sz="1100" dirty="0"/>
-              <a:t> </a:t>
-            </a:r>
-            <a:r>
-              <a:rPr lang="it-IT" sz="1100" dirty="0" err="1"/>
-              <a:t>see</a:t>
-            </a:r>
-            <a:r>
-              <a:rPr lang="it-IT" sz="1100" dirty="0"/>
-              <a:t> </a:t>
-            </a:r>
-            <a:r>
-              <a:rPr lang="it-IT" sz="1100" dirty="0" err="1"/>
-              <a:t>unmodeled</a:t>
-            </a:r>
-            <a:r>
-              <a:rPr lang="it-IT" sz="1100" dirty="0"/>
-              <a:t> </a:t>
-            </a:r>
-            <a:r>
-              <a:rPr lang="it-IT" sz="1100" dirty="0" err="1"/>
-              <a:t>external</a:t>
-            </a:r>
-            <a:r>
-              <a:rPr lang="it-IT" sz="1100" dirty="0"/>
-              <a:t> market </a:t>
-            </a:r>
-            <a:r>
-              <a:rPr lang="it-IT" sz="1100" dirty="0" err="1"/>
-              <a:t>forces</a:t>
-            </a:r>
-            <a:r>
-              <a:rPr lang="it-IT" sz="1100" dirty="0"/>
-              <a:t> like marketing budgets, streamer adoption, or </a:t>
-            </a:r>
-            <a:r>
-              <a:rPr lang="it-IT" sz="1100" dirty="0" err="1"/>
-              <a:t>viral</a:t>
-            </a:r>
-            <a:r>
-              <a:rPr lang="it-IT" sz="1100" dirty="0"/>
-              <a:t> </a:t>
-            </a:r>
-            <a:r>
-              <a:rPr lang="it-IT" sz="1100" dirty="0" err="1"/>
-              <a:t>momentum</a:t>
-            </a:r>
-            <a:endParaRPr lang="it-IT" sz="1100" dirty="0"/>
-          </a:p>
-          <a:p>
-            <a:pPr marL="342900" indent="-342900">
+            </a:pPr>
+            <a:endParaRPr lang="en-US" sz="1200" dirty="0">
+              <a:solidFill>
+                <a:srgbClr val="1E293B"/>
+              </a:solidFill>
+              <a:latin typeface="Calibri" pitchFamily="34" charset="0"/>
+              <a:ea typeface="Calibri" pitchFamily="34" charset="-122"/>
+              <a:cs typeface="Calibri" pitchFamily="34" charset="-120"/>
+            </a:endParaRPr>
+          </a:p>
+          <a:p>
+            <a:pPr>
               <a:spcAft>
                 <a:spcPts val="500"/>
               </a:spcAft>
               <a:buSzPct val="100000"/>
-              <a:buChar char="•"/>
-            </a:pPr>
-            <a:r>
-              <a:rPr lang="it-IT" sz="1100" dirty="0"/>
-              <a:t>SHAP and LIME plots </a:t>
-            </a:r>
-            <a:r>
-              <a:rPr lang="it-IT" sz="1100" dirty="0" err="1"/>
-              <a:t>reveal</a:t>
-            </a:r>
-            <a:r>
-              <a:rPr lang="it-IT" sz="1100" dirty="0"/>
+            </a:pPr>
+            <a:r>
+              <a:rPr lang="it-IT" sz="1200" dirty="0"/>
+              <a:t>The errors stem not from unusual intrinsic features, but from the absence of extrinsic data. The model </a:t>
+            </a:r>
+            <a:r>
+              <a:rPr lang="it-IT" sz="1200" dirty="0" err="1"/>
+              <a:t>cannot</a:t>
+            </a:r>
+            <a:r>
+              <a:rPr lang="it-IT" sz="1200" dirty="0"/>
               <a:t> </a:t>
             </a:r>
             <a:r>
-              <a:rPr lang="it-IT" sz="1100" dirty="0" err="1"/>
-              <a:t>that</a:t>
-            </a:r>
-            <a:r>
-              <a:rPr lang="it-IT" sz="1100" dirty="0"/>
+              <a:rPr lang="it-IT" sz="1200" dirty="0" err="1"/>
+              <a:t>see</a:t>
+            </a:r>
+            <a:r>
+              <a:rPr lang="it-IT" sz="1200" dirty="0"/>
               <a:t> </a:t>
             </a:r>
             <a:r>
-              <a:rPr lang="it-IT" sz="1100" dirty="0" err="1"/>
-              <a:t>fundamentally</a:t>
-            </a:r>
-            <a:r>
-              <a:rPr lang="it-IT" sz="1100" dirty="0"/>
+              <a:rPr lang="it-IT" sz="1200" dirty="0" err="1"/>
+              <a:t>unmodeled</a:t>
+            </a:r>
+            <a:r>
+              <a:rPr lang="it-IT" sz="1200" dirty="0"/>
               <a:t> </a:t>
             </a:r>
             <a:r>
-              <a:rPr lang="it-IT" sz="1100" dirty="0" err="1"/>
-              <a:t>identical</a:t>
-            </a:r>
-            <a:r>
-              <a:rPr lang="it-IT" sz="1100" dirty="0"/>
-              <a:t> games </a:t>
-            </a:r>
-            <a:r>
-              <a:rPr lang="it-IT" sz="1100" dirty="0" err="1"/>
-              <a:t>based</a:t>
-            </a:r>
-            <a:r>
-              <a:rPr lang="it-IT" sz="1100" dirty="0"/>
-              <a:t> on day-zero metadata (e.g. RAM </a:t>
-            </a:r>
-            <a:r>
-              <a:rPr lang="it-IT" sz="1100" dirty="0" err="1"/>
-              <a:t>requirements</a:t>
-            </a:r>
-            <a:r>
-              <a:rPr lang="it-IT" sz="1100" dirty="0"/>
-              <a:t>, </a:t>
-            </a:r>
-            <a:r>
-              <a:rPr lang="it-IT" sz="1100" dirty="0" err="1"/>
-              <a:t>textual</a:t>
-            </a:r>
-            <a:r>
-              <a:rPr lang="it-IT" sz="1100" dirty="0"/>
+              <a:rPr lang="it-IT" sz="1200" dirty="0" err="1"/>
+              <a:t>external</a:t>
+            </a:r>
+            <a:r>
+              <a:rPr lang="it-IT" sz="1200" dirty="0"/>
+              <a:t> market </a:t>
+            </a:r>
+            <a:r>
+              <a:rPr lang="it-IT" sz="1200" dirty="0" err="1"/>
+              <a:t>forces</a:t>
+            </a:r>
+            <a:r>
+              <a:rPr lang="it-IT" sz="1200" dirty="0"/>
+              <a:t> like marketing budgets, streamer adoption, or </a:t>
+            </a:r>
+            <a:r>
+              <a:rPr lang="it-IT" sz="1200" dirty="0" err="1"/>
+              <a:t>viral</a:t>
+            </a:r>
+            <a:r>
+              <a:rPr lang="it-IT" sz="1200" dirty="0"/>
               <a:t> </a:t>
             </a:r>
             <a:r>
-              <a:rPr lang="it-IT" sz="1100" dirty="0" err="1"/>
-              <a:t>descriptions</a:t>
-            </a:r>
-            <a:r>
-              <a:rPr lang="it-IT" sz="1100" dirty="0"/>
-              <a:t> and </a:t>
-            </a:r>
-            <a:r>
-              <a:rPr lang="it-IT" sz="1100" dirty="0" err="1"/>
-              <a:t>genres</a:t>
-            </a:r>
-            <a:r>
-              <a:rPr lang="it-IT" sz="1100" dirty="0"/>
-              <a:t>) can </a:t>
-            </a:r>
-            <a:r>
-              <a:rPr lang="it-IT" sz="1100" dirty="0" err="1"/>
-              <a:t>have</a:t>
-            </a:r>
-            <a:r>
-              <a:rPr lang="it-IT" sz="1100" dirty="0"/>
-              <a:t> </a:t>
-            </a:r>
-            <a:r>
-              <a:rPr lang="it-IT" sz="1100" dirty="0" err="1"/>
-              <a:t>drastically</a:t>
-            </a:r>
-            <a:r>
-              <a:rPr lang="it-IT" sz="1100" dirty="0"/>
-              <a:t> </a:t>
-            </a:r>
-            <a:r>
-              <a:rPr lang="it-IT" sz="1100" dirty="0" err="1"/>
-              <a:t>different</a:t>
-            </a:r>
-            <a:r>
-              <a:rPr lang="it-IT" sz="1100" dirty="0"/>
-              <a:t> </a:t>
-            </a:r>
-            <a:r>
-              <a:rPr lang="it-IT" sz="1100" dirty="0" err="1"/>
-              <a:t>real</a:t>
-            </a:r>
-            <a:r>
-              <a:rPr lang="it-IT" sz="1100" dirty="0"/>
-              <a:t>-world </a:t>
-            </a:r>
-            <a:r>
-              <a:rPr lang="it-IT" sz="1100" dirty="0" err="1"/>
-              <a:t>outcomes</a:t>
-            </a:r>
-            <a:r>
-              <a:rPr lang="it-IT" sz="1100" dirty="0"/>
-              <a:t> </a:t>
-            </a:r>
-            <a:r>
-              <a:rPr lang="it-IT" sz="1100" dirty="0" err="1"/>
-              <a:t>if</a:t>
-            </a:r>
-            <a:r>
-              <a:rPr lang="it-IT" sz="1100" dirty="0"/>
-              <a:t> one </a:t>
-            </a:r>
-            <a:r>
-              <a:rPr lang="it-IT" sz="1100" dirty="0" err="1"/>
-              <a:t>goes</a:t>
-            </a:r>
-            <a:r>
-              <a:rPr lang="it-IT" sz="1100" dirty="0"/>
-              <a:t> </a:t>
-            </a:r>
-            <a:r>
-              <a:rPr lang="it-IT" sz="1100" dirty="0" err="1"/>
-              <a:t>viral</a:t>
-            </a:r>
-            <a:r>
-              <a:rPr lang="it-IT" sz="1100" dirty="0"/>
-              <a:t>, making </a:t>
-            </a:r>
-            <a:r>
-              <a:rPr lang="it-IT" sz="1100" dirty="0" err="1"/>
-              <a:t>them</a:t>
-            </a:r>
-            <a:r>
-              <a:rPr lang="it-IT" sz="1100" dirty="0"/>
-              <a:t> </a:t>
-            </a:r>
-            <a:r>
-              <a:rPr lang="it-IT" sz="1100" dirty="0" err="1"/>
-              <a:t>mathematically</a:t>
-            </a:r>
-            <a:r>
-              <a:rPr lang="it-IT" sz="1100" dirty="0"/>
-              <a:t> </a:t>
-            </a:r>
-            <a:r>
-              <a:rPr lang="it-IT" sz="1100" dirty="0" err="1"/>
-              <a:t>indistinguishable</a:t>
-            </a:r>
-            <a:r>
-              <a:rPr lang="it-IT" sz="1100" dirty="0"/>
-              <a:t> in </a:t>
-            </a:r>
-            <a:r>
-              <a:rPr lang="it-IT" sz="1100" dirty="0" err="1"/>
-              <a:t>this</a:t>
-            </a:r>
-            <a:r>
-              <a:rPr lang="it-IT" sz="1100" dirty="0"/>
-              <a:t> </a:t>
-            </a:r>
-            <a:r>
-              <a:rPr lang="it-IT" sz="1100" dirty="0" err="1"/>
-              <a:t>latent</a:t>
-            </a:r>
-            <a:r>
-              <a:rPr lang="it-IT" sz="1100" dirty="0"/>
-              <a:t> </a:t>
-            </a:r>
-            <a:r>
-              <a:rPr lang="it-IT" sz="1100" dirty="0" err="1"/>
-              <a:t>space</a:t>
-            </a:r>
-            <a:endParaRPr lang="it-IT" sz="1100" dirty="0"/>
-          </a:p>
-          <a:p>
-            <a:pPr marL="342900" indent="-342900">
+              <a:rPr lang="it-IT" sz="1200" dirty="0" err="1"/>
+              <a:t>momentum</a:t>
+            </a:r>
+            <a:endParaRPr lang="it-IT" sz="1200" dirty="0"/>
+          </a:p>
+          <a:p>
+            <a:pPr>
               <a:spcAft>
                 <a:spcPts val="500"/>
               </a:spcAft>
               <a:buSzPct val="100000"/>
-              <a:buChar char="•"/>
-            </a:pPr>
-            <a:r>
-              <a:rPr lang="en-US" sz="1100" dirty="0">
+            </a:pPr>
+            <a:endParaRPr lang="it-IT" sz="1200" dirty="0"/>
+          </a:p>
+          <a:p>
+            <a:pPr>
+              <a:spcAft>
+                <a:spcPts val="500"/>
+              </a:spcAft>
+              <a:buSzPct val="100000"/>
+            </a:pPr>
+            <a:r>
+              <a:rPr lang="it-IT" sz="1200" dirty="0"/>
+              <a:t>SHAP and LIME plots reveal that fundamentally identical games based on day-zero metadata (e.g. RAM </a:t>
+            </a:r>
+            <a:r>
+              <a:rPr lang="it-IT" sz="1200" dirty="0" err="1"/>
+              <a:t>requirements</a:t>
+            </a:r>
+            <a:r>
+              <a:rPr lang="it-IT" sz="1200" dirty="0"/>
+              <a:t>, </a:t>
+            </a:r>
+            <a:r>
+              <a:rPr lang="it-IT" sz="1200" dirty="0" err="1"/>
+              <a:t>textual</a:t>
+            </a:r>
+            <a:r>
+              <a:rPr lang="it-IT" sz="1200" dirty="0"/>
+              <a:t> </a:t>
+            </a:r>
+            <a:r>
+              <a:rPr lang="it-IT" sz="1200" dirty="0" err="1"/>
+              <a:t>descriptions</a:t>
+            </a:r>
+            <a:r>
+              <a:rPr lang="it-IT" sz="1200" dirty="0"/>
+              <a:t> and </a:t>
+            </a:r>
+            <a:r>
+              <a:rPr lang="it-IT" sz="1200" dirty="0" err="1"/>
+              <a:t>genres</a:t>
+            </a:r>
+            <a:r>
+              <a:rPr lang="it-IT" sz="1200" dirty="0"/>
+              <a:t>) can </a:t>
+            </a:r>
+            <a:r>
+              <a:rPr lang="it-IT" sz="1200" dirty="0" err="1"/>
+              <a:t>have</a:t>
+            </a:r>
+            <a:r>
+              <a:rPr lang="it-IT" sz="1200" dirty="0"/>
+              <a:t> </a:t>
+            </a:r>
+            <a:r>
+              <a:rPr lang="it-IT" sz="1200" dirty="0" err="1"/>
+              <a:t>drastically</a:t>
+            </a:r>
+            <a:r>
+              <a:rPr lang="it-IT" sz="1200" dirty="0"/>
+              <a:t> </a:t>
+            </a:r>
+            <a:r>
+              <a:rPr lang="it-IT" sz="1200" dirty="0" err="1"/>
+              <a:t>different</a:t>
+            </a:r>
+            <a:r>
+              <a:rPr lang="it-IT" sz="1200" dirty="0"/>
+              <a:t> </a:t>
+            </a:r>
+            <a:r>
+              <a:rPr lang="it-IT" sz="1200" dirty="0" err="1"/>
+              <a:t>real</a:t>
+            </a:r>
+            <a:r>
+              <a:rPr lang="it-IT" sz="1200" dirty="0"/>
+              <a:t>-world </a:t>
+            </a:r>
+            <a:r>
+              <a:rPr lang="it-IT" sz="1200" dirty="0" err="1"/>
+              <a:t>outcomes</a:t>
+            </a:r>
+            <a:r>
+              <a:rPr lang="it-IT" sz="1200" dirty="0"/>
+              <a:t> </a:t>
+            </a:r>
+            <a:r>
+              <a:rPr lang="it-IT" sz="1200" dirty="0" err="1"/>
+              <a:t>if</a:t>
+            </a:r>
+            <a:r>
+              <a:rPr lang="it-IT" sz="1200" dirty="0"/>
+              <a:t> one </a:t>
+            </a:r>
+            <a:r>
+              <a:rPr lang="it-IT" sz="1200" dirty="0" err="1"/>
+              <a:t>goes</a:t>
+            </a:r>
+            <a:r>
+              <a:rPr lang="it-IT" sz="1200" dirty="0"/>
+              <a:t> </a:t>
+            </a:r>
+            <a:r>
+              <a:rPr lang="it-IT" sz="1200" dirty="0" err="1"/>
+              <a:t>viral</a:t>
+            </a:r>
+            <a:r>
+              <a:rPr lang="it-IT" sz="1200" dirty="0"/>
+              <a:t>, making </a:t>
+            </a:r>
+            <a:r>
+              <a:rPr lang="it-IT" sz="1200" dirty="0" err="1"/>
+              <a:t>them</a:t>
+            </a:r>
+            <a:r>
+              <a:rPr lang="it-IT" sz="1200" dirty="0"/>
+              <a:t> </a:t>
+            </a:r>
+            <a:r>
+              <a:rPr lang="it-IT" sz="1200" dirty="0" err="1"/>
+              <a:t>mathematically</a:t>
+            </a:r>
+            <a:r>
+              <a:rPr lang="it-IT" sz="1200" dirty="0"/>
+              <a:t> </a:t>
+            </a:r>
+            <a:r>
+              <a:rPr lang="it-IT" sz="1200" dirty="0" err="1"/>
+              <a:t>indistinguishable</a:t>
+            </a:r>
+            <a:r>
+              <a:rPr lang="it-IT" sz="1200" dirty="0"/>
+              <a:t> in </a:t>
+            </a:r>
+            <a:r>
+              <a:rPr lang="it-IT" sz="1200" dirty="0" err="1"/>
+              <a:t>this</a:t>
+            </a:r>
+            <a:r>
+              <a:rPr lang="it-IT" sz="1200" dirty="0"/>
+              <a:t> </a:t>
+            </a:r>
+            <a:r>
+              <a:rPr lang="it-IT" sz="1200" dirty="0" err="1"/>
+              <a:t>latent</a:t>
+            </a:r>
+            <a:r>
+              <a:rPr lang="it-IT" sz="1200" dirty="0"/>
+              <a:t> </a:t>
+            </a:r>
+            <a:r>
+              <a:rPr lang="it-IT" sz="1200" dirty="0" err="1"/>
+              <a:t>space</a:t>
+            </a:r>
+            <a:endParaRPr lang="it-IT" sz="1200" dirty="0"/>
+          </a:p>
+          <a:p>
+            <a:pPr>
+              <a:spcAft>
+                <a:spcPts val="500"/>
+              </a:spcAft>
+              <a:buSzPct val="100000"/>
+            </a:pPr>
+            <a:endParaRPr lang="en-US" sz="1200" dirty="0">
+              <a:solidFill>
+                <a:srgbClr val="1E293B"/>
+              </a:solidFill>
+              <a:latin typeface="Calibri" pitchFamily="34" charset="0"/>
+              <a:ea typeface="Calibri" pitchFamily="34" charset="-122"/>
+              <a:cs typeface="Calibri" pitchFamily="34" charset="-120"/>
+            </a:endParaRPr>
+          </a:p>
+          <a:p>
+            <a:pPr>
+              <a:spcAft>
+                <a:spcPts val="500"/>
+              </a:spcAft>
+              <a:buSzPct val="100000"/>
+            </a:pPr>
+            <a:r>
+              <a:rPr lang="en-US" sz="1200" dirty="0">
                 <a:solidFill>
                   <a:srgbClr val="1E293B"/>
                 </a:solidFill>
@@ -3753,7 +3688,7 @@
               </a:rPr>
               <a:t>The most important fail: pre-release model struggles to differentiate between mid-tier games (e.g., Tier 2 vs Tier 3)</a:t>
             </a:r>
-            <a:endParaRPr lang="en-US" sz="1100" dirty="0"/>
+            <a:endParaRPr lang="en-US" sz="1200" dirty="0"/>
           </a:p>
         </p:txBody>
       </p:sp>
@@ -3779,7 +3714,7 @@
         </p:blipFill>
         <p:spPr>
           <a:xfrm>
-            <a:off x="411480" y="1278770"/>
+            <a:off x="411480" y="1517904"/>
             <a:ext cx="3717388" cy="2788041"/>
           </a:xfrm>
           <a:prstGeom prst="rect">
@@ -3801,7 +3736,7 @@
         </p:nvSpPr>
         <p:spPr>
           <a:xfrm>
-            <a:off x="2032782" y="2866644"/>
+            <a:off x="2032782" y="3122957"/>
             <a:ext cx="858129" cy="474433"/>
           </a:xfrm>
           <a:prstGeom prst="rect">
@@ -3853,7 +3788,7 @@
         </p:nvSpPr>
         <p:spPr>
           <a:xfrm>
-            <a:off x="1097280" y="1969477"/>
+            <a:off x="1097280" y="2222625"/>
             <a:ext cx="935502" cy="450166"/>
           </a:xfrm>
           <a:prstGeom prst="rect">
@@ -3905,7 +3840,7 @@
         </p:nvSpPr>
         <p:spPr>
           <a:xfrm>
-            <a:off x="1112212" y="1248124"/>
+            <a:off x="1112212" y="1460827"/>
             <a:ext cx="2189295" cy="230832"/>
           </a:xfrm>
           <a:prstGeom prst="rect">
@@ -4086,14 +4021,14 @@
               <a:buNone/>
             </a:pPr>
             <a:r>
-              <a:rPr lang="en-US" sz="750" b="1" kern="0" spc="150" dirty="0">
+              <a:rPr lang="en-US" sz="900" b="1" kern="0" spc="150" dirty="0">
                 <a:solidFill>
                   <a:srgbClr val="FFFFFF"/>
                 </a:solidFill>
               </a:rPr>
               <a:t>CRITICAL DISCUSSION</a:t>
             </a:r>
-            <a:endParaRPr lang="en-US" sz="750" dirty="0"/>
+            <a:endParaRPr lang="en-US" sz="900" dirty="0"/>
           </a:p>
         </p:txBody>
       </p:sp>
@@ -4303,15 +4238,14 @@
           <a:bodyPr wrap="square" lIns="0" tIns="0" rIns="0" bIns="0" rtlCol="0" anchor="t"/>
           <a:lstStyle/>
           <a:p>
-            <a:pPr marL="342900" indent="-342900">
+            <a:pPr>
               <a:spcAft>
                 <a:spcPts val="500"/>
               </a:spcAft>
               <a:buSzPct val="100000"/>
-              <a:buChar char="•"/>
-            </a:pPr>
-            <a:r>
-              <a:rPr lang="en-US" sz="1050" dirty="0">
+            </a:pPr>
+            <a:r>
+              <a:rPr lang="en-US" sz="1100" dirty="0">
                 <a:solidFill>
                   <a:srgbClr val="1E293B"/>
                 </a:solidFill>
@@ -4320,18 +4254,17 @@
               </a:rPr>
               <a:t>This system can be used as a forecasting tool to equip independent developers and publishers with data-driven decision capabilities prior to capital allocation</a:t>
             </a:r>
-            <a:endParaRPr lang="en-US" sz="1050" dirty="0"/>
-          </a:p>
-          <a:p>
-            <a:pPr marL="342900" indent="-342900">
+            <a:endParaRPr lang="en-US" sz="1100" dirty="0"/>
+          </a:p>
+          <a:p>
+            <a:pPr>
               <a:spcAft>
                 <a:spcPts val="500"/>
               </a:spcAft>
               <a:buSzPct val="100000"/>
-              <a:buChar char="•"/>
-            </a:pPr>
-            <a:r>
-              <a:rPr lang="en-US" sz="1050" dirty="0">
+            </a:pPr>
+            <a:r>
+              <a:rPr lang="en-US" sz="1100" dirty="0">
                 <a:solidFill>
                   <a:srgbClr val="1E293B"/>
                 </a:solidFill>
@@ -4342,15 +4275,14 @@
             </a:r>
           </a:p>
           <a:p>
-            <a:pPr marL="342900" indent="-342900">
+            <a:pPr>
               <a:spcAft>
                 <a:spcPts val="500"/>
               </a:spcAft>
               <a:buSzPct val="100000"/>
-              <a:buChar char="•"/>
-            </a:pPr>
-            <a:r>
-              <a:rPr lang="en-US" sz="1050" dirty="0">
+            </a:pPr>
+            <a:r>
+              <a:rPr lang="en-US" sz="1100" dirty="0">
                 <a:solidFill>
                   <a:srgbClr val="1E293B"/>
                 </a:solidFill>
@@ -4360,7 +4292,7 @@
               <a:t>Human oversight is required to contextualize predictions with external macroeconomic signals (</a:t>
             </a:r>
             <a:r>
-              <a:rPr lang="en-US" sz="1050" dirty="0" err="1">
+              <a:rPr lang="en-US" sz="1100" dirty="0" err="1">
                 <a:solidFill>
                   <a:srgbClr val="1E293B"/>
                 </a:solidFill>
@@ -4370,7 +4302,7 @@
               <a:t>e.g</a:t>
             </a:r>
             <a:r>
-              <a:rPr lang="en-US" sz="1050" dirty="0">
+              <a:rPr lang="en-US" sz="1100" dirty="0">
                 <a:solidFill>
                   <a:srgbClr val="1E293B"/>
                 </a:solidFill>
@@ -4549,15 +4481,14 @@
           <a:bodyPr wrap="square" lIns="0" tIns="0" rIns="0" bIns="0" rtlCol="0" anchor="t"/>
           <a:lstStyle/>
           <a:p>
-            <a:pPr marL="342900" indent="-342900">
+            <a:pPr>
               <a:spcAft>
                 <a:spcPts val="500"/>
               </a:spcAft>
               <a:buSzPct val="100000"/>
-              <a:buChar char="•"/>
-            </a:pPr>
-            <a:r>
-              <a:rPr lang="en-US" sz="1050" dirty="0">
+            </a:pPr>
+            <a:r>
+              <a:rPr lang="en-US" sz="1100" dirty="0">
                 <a:solidFill>
                   <a:srgbClr val="1E293B"/>
                 </a:solidFill>
@@ -4568,7 +4499,7 @@
               <a:t>The dataset reflects an extreme power-law distribution where over 69% of games reside in the lowest adoption bracket, requiring aggressive dynamic </a:t>
             </a:r>
             <a:r>
-              <a:rPr lang="en-US" sz="1050" dirty="0" err="1">
+              <a:rPr lang="en-US" sz="1100" dirty="0" err="1">
                 <a:solidFill>
                   <a:srgbClr val="1E293B"/>
                 </a:solidFill>
@@ -4579,7 +4510,7 @@
               <a:t>undersampling</a:t>
             </a:r>
             <a:r>
-              <a:rPr lang="en-US" sz="1050" dirty="0">
+              <a:rPr lang="en-US" sz="1100" dirty="0">
                 <a:solidFill>
                   <a:srgbClr val="1E293B"/>
                 </a:solidFill>
@@ -4591,15 +4522,14 @@
             </a:r>
           </a:p>
           <a:p>
-            <a:pPr marL="342900" indent="-342900">
+            <a:pPr>
               <a:spcAft>
                 <a:spcPts val="500"/>
               </a:spcAft>
               <a:buSzPct val="100000"/>
-              <a:buChar char="•"/>
-            </a:pPr>
-            <a:r>
-              <a:rPr lang="en-US" sz="1050" dirty="0">
+            </a:pPr>
+            <a:r>
+              <a:rPr lang="en-US" sz="1100" dirty="0">
                 <a:solidFill>
                   <a:srgbClr val="1E293B"/>
                 </a:solidFill>
@@ -4611,15 +4541,14 @@
             </a:r>
           </a:p>
           <a:p>
-            <a:pPr marL="342900" indent="-342900">
+            <a:pPr>
               <a:spcAft>
                 <a:spcPts val="500"/>
               </a:spcAft>
               <a:buSzPct val="100000"/>
-              <a:buChar char="•"/>
-            </a:pPr>
-            <a:r>
-              <a:rPr lang="en-US" sz="1050" dirty="0">
+            </a:pPr>
+            <a:r>
+              <a:rPr lang="en-US" sz="1100" dirty="0">
                 <a:solidFill>
                   <a:srgbClr val="1E293B"/>
                 </a:solidFill>
@@ -4629,7 +4558,7 @@
               </a:rPr>
               <a:t>Evaluation limitations: The non-parametric statistical significance testing (Wilcoxon) was mathematically underpowered and constrained by the limited sample size of the outer cross-validation (N=5 folds)</a:t>
             </a:r>
-            <a:endParaRPr lang="en-US" sz="1050" dirty="0"/>
+            <a:endParaRPr lang="en-US" sz="1100" dirty="0"/>
           </a:p>
         </p:txBody>
       </p:sp>
@@ -4800,15 +4729,14 @@
           <a:bodyPr wrap="square" lIns="0" tIns="0" rIns="0" bIns="0" rtlCol="0" anchor="t"/>
           <a:lstStyle/>
           <a:p>
-            <a:pPr marL="342900" indent="-342900">
+            <a:pPr>
               <a:spcAft>
                 <a:spcPts val="500"/>
               </a:spcAft>
               <a:buSzPct val="100000"/>
-              <a:buChar char="•"/>
-            </a:pPr>
-            <a:r>
-              <a:rPr lang="en-US" sz="1050" dirty="0">
+            </a:pPr>
+            <a:r>
+              <a:rPr lang="en-US" sz="1100" dirty="0">
                 <a:solidFill>
                   <a:srgbClr val="1E293B"/>
                 </a:solidFill>
@@ -4819,7 +4747,7 @@
               <a:t>Implementing an auxiliary regression pipeline to predict community Approval Rating (</a:t>
             </a:r>
             <a:r>
-              <a:rPr lang="en-US" sz="1050" dirty="0" err="1">
+              <a:rPr lang="en-US" sz="1100" dirty="0" err="1">
                 <a:solidFill>
                   <a:srgbClr val="1E293B"/>
                 </a:solidFill>
@@ -4830,7 +4758,7 @@
               <a:t>review_ratio</a:t>
             </a:r>
             <a:r>
-              <a:rPr lang="en-US" sz="1050" dirty="0">
+              <a:rPr lang="en-US" sz="1100" dirty="0">
                 <a:solidFill>
                   <a:srgbClr val="1E293B"/>
                 </a:solidFill>
@@ -4842,15 +4770,14 @@
             </a:r>
           </a:p>
           <a:p>
-            <a:pPr marL="342900" indent="-342900">
+            <a:pPr>
               <a:spcAft>
                 <a:spcPts val="500"/>
               </a:spcAft>
               <a:buSzPct val="100000"/>
-              <a:buChar char="•"/>
-            </a:pPr>
-            <a:r>
-              <a:rPr lang="en-US" sz="1050" dirty="0">
+            </a:pPr>
+            <a:r>
+              <a:rPr lang="en-US" sz="1100" dirty="0">
                 <a:solidFill>
                   <a:srgbClr val="1E293B"/>
                 </a:solidFill>
@@ -4862,15 +4789,14 @@
             </a:r>
           </a:p>
           <a:p>
-            <a:pPr marL="342900" indent="-342900">
+            <a:pPr>
               <a:spcAft>
                 <a:spcPts val="500"/>
               </a:spcAft>
               <a:buSzPct val="100000"/>
-              <a:buChar char="•"/>
-            </a:pPr>
-            <a:r>
-              <a:rPr lang="en-US" sz="1050" dirty="0">
+            </a:pPr>
+            <a:r>
+              <a:rPr lang="en-US" sz="1100" dirty="0">
                 <a:solidFill>
                   <a:srgbClr val="1E293B"/>
                 </a:solidFill>
@@ -4880,7 +4806,7 @@
               </a:rPr>
               <a:t>Multi-Modal Expansion incorporating deep architectures like CNNs for analyzing promotional screenshots and sequence models for gameplay trailer aesthetics</a:t>
             </a:r>
-            <a:endParaRPr lang="en-US" sz="1050" dirty="0"/>
+            <a:endParaRPr lang="en-US" sz="1100" dirty="0"/>
           </a:p>
         </p:txBody>
       </p:sp>
@@ -5400,14 +5326,14 @@
               <a:buNone/>
             </a:pPr>
             <a:r>
-              <a:rPr lang="en-US" sz="750" b="1" kern="0" spc="150" dirty="0">
+              <a:rPr lang="en-US" sz="1200" b="1" kern="0" spc="150" dirty="0">
                 <a:solidFill>
                   <a:srgbClr val="FFFFFF"/>
                 </a:solidFill>
               </a:rPr>
               <a:t>OVERVIEW</a:t>
             </a:r>
-            <a:endParaRPr lang="en-US" sz="750" dirty="0"/>
+            <a:endParaRPr lang="en-US" sz="1200" dirty="0"/>
           </a:p>
         </p:txBody>
       </p:sp>
@@ -5509,14 +5435,14 @@
               <a:buNone/>
             </a:pPr>
             <a:r>
-              <a:rPr lang="en-US" sz="1100" b="1" dirty="0">
+              <a:rPr lang="en-US" sz="1600" b="1" dirty="0">
                 <a:solidFill>
                   <a:srgbClr val="FFFFFF"/>
                 </a:solidFill>
               </a:rPr>
               <a:t>01</a:t>
             </a:r>
-            <a:endParaRPr lang="en-US" sz="1100" dirty="0"/>
+            <a:endParaRPr lang="en-US" sz="1600" dirty="0"/>
           </a:p>
         </p:txBody>
       </p:sp>
@@ -5545,7 +5471,7 @@
               <a:buNone/>
             </a:pPr>
             <a:r>
-              <a:rPr lang="en-US" sz="1350" b="1" dirty="0">
+              <a:rPr lang="en-US" b="1" dirty="0">
                 <a:solidFill>
                   <a:srgbClr val="1C2B4A"/>
                 </a:solidFill>
@@ -5555,7 +5481,7 @@
               </a:rPr>
               <a:t>Problem &amp; Dataset</a:t>
             </a:r>
-            <a:endParaRPr lang="en-US" sz="1350" dirty="0"/>
+            <a:endParaRPr lang="en-US" dirty="0"/>
           </a:p>
         </p:txBody>
       </p:sp>
@@ -5584,7 +5510,7 @@
               <a:buNone/>
             </a:pPr>
             <a:r>
-              <a:rPr lang="en-US" sz="950" dirty="0">
+              <a:rPr lang="en-US" sz="1600" dirty="0">
                 <a:solidFill>
                   <a:srgbClr val="7A8FA6"/>
                 </a:solidFill>
@@ -5594,7 +5520,7 @@
               </a:rPr>
               <a:t>Task definition · features</a:t>
             </a:r>
-            <a:endParaRPr lang="en-US" sz="950" dirty="0"/>
+            <a:endParaRPr lang="en-US" sz="1600" dirty="0"/>
           </a:p>
         </p:txBody>
       </p:sp>
@@ -5660,7 +5586,7 @@
           <a:bodyPr/>
           <a:lstStyle/>
           <a:p>
-            <a:endParaRPr lang="it-IT"/>
+            <a:endParaRPr lang="it-IT" dirty="0"/>
           </a:p>
         </p:txBody>
       </p:sp>
@@ -5689,14 +5615,14 @@
               <a:buNone/>
             </a:pPr>
             <a:r>
-              <a:rPr lang="en-US" sz="1100" b="1" dirty="0">
+              <a:rPr lang="en-US" sz="1600" b="1" dirty="0">
                 <a:solidFill>
                   <a:srgbClr val="FFFFFF"/>
                 </a:solidFill>
               </a:rPr>
               <a:t>02</a:t>
             </a:r>
-            <a:endParaRPr lang="en-US" sz="1100" dirty="0"/>
+            <a:endParaRPr lang="en-US" sz="1600" dirty="0"/>
           </a:p>
         </p:txBody>
       </p:sp>
@@ -5725,7 +5651,7 @@
               <a:buNone/>
             </a:pPr>
             <a:r>
-              <a:rPr lang="en-US" sz="1350" b="1" dirty="0">
+              <a:rPr lang="en-US" b="1" dirty="0">
                 <a:solidFill>
                   <a:srgbClr val="1C2B4A"/>
                 </a:solidFill>
@@ -5735,7 +5661,7 @@
               </a:rPr>
               <a:t>Pipeline &amp; Experiments</a:t>
             </a:r>
-            <a:endParaRPr lang="en-US" sz="1350" dirty="0"/>
+            <a:endParaRPr lang="en-US" dirty="0"/>
           </a:p>
         </p:txBody>
       </p:sp>
@@ -5764,7 +5690,7 @@
               <a:buNone/>
             </a:pPr>
             <a:r>
-              <a:rPr lang="en-US" sz="950" dirty="0">
+              <a:rPr lang="en-US" sz="1600" dirty="0">
                 <a:solidFill>
                   <a:srgbClr val="7A8FA6"/>
                 </a:solidFill>
@@ -5774,7 +5700,7 @@
               </a:rPr>
               <a:t>Preprocessing · model selection · hyperparameter optimization</a:t>
             </a:r>
-            <a:endParaRPr lang="en-US" sz="950" dirty="0"/>
+            <a:endParaRPr lang="en-US" sz="1600" dirty="0"/>
           </a:p>
         </p:txBody>
       </p:sp>
@@ -5786,7 +5712,7 @@
         </p:nvSpPr>
         <p:spPr>
           <a:xfrm>
-            <a:off x="8138160" y="1993392"/>
+            <a:off x="8138160" y="1207008"/>
             <a:ext cx="640080" cy="292608"/>
           </a:xfrm>
           <a:prstGeom prst="roundRect">
@@ -5820,7 +5746,7 @@
         </p:nvSpPr>
         <p:spPr>
           <a:xfrm>
-            <a:off x="8138160" y="1993392"/>
+            <a:off x="8138160" y="1207008"/>
             <a:ext cx="640080" cy="292608"/>
           </a:xfrm>
           <a:prstGeom prst="rect">
@@ -5837,14 +5763,14 @@
               <a:buNone/>
             </a:pPr>
             <a:r>
-              <a:rPr lang="en-US" sz="700" b="1" kern="0" spc="100" dirty="0">
+              <a:rPr lang="en-US" sz="1050" b="1" kern="0" spc="100" dirty="0">
                 <a:solidFill>
                   <a:srgbClr val="1C2B4A"/>
                 </a:solidFill>
               </a:rPr>
               <a:t>PART 1</a:t>
             </a:r>
-            <a:endParaRPr lang="en-US" sz="700" dirty="0"/>
+            <a:endParaRPr lang="en-US" sz="1050" dirty="0"/>
           </a:p>
         </p:txBody>
       </p:sp>
@@ -5939,14 +5865,14 @@
               <a:buNone/>
             </a:pPr>
             <a:r>
-              <a:rPr lang="en-US" sz="1100" b="1" dirty="0">
+              <a:rPr lang="en-US" sz="1600" b="1" dirty="0">
                 <a:solidFill>
                   <a:srgbClr val="FFFFFF"/>
                 </a:solidFill>
               </a:rPr>
               <a:t>03</a:t>
             </a:r>
-            <a:endParaRPr lang="en-US" sz="1100" dirty="0"/>
+            <a:endParaRPr lang="en-US" sz="1600" dirty="0"/>
           </a:p>
         </p:txBody>
       </p:sp>
@@ -5975,7 +5901,7 @@
               <a:buNone/>
             </a:pPr>
             <a:r>
-              <a:rPr lang="en-US" sz="1350" b="1" dirty="0">
+              <a:rPr lang="en-US" b="1" dirty="0">
                 <a:solidFill>
                   <a:srgbClr val="1C2B4A"/>
                 </a:solidFill>
@@ -5985,7 +5911,7 @@
               </a:rPr>
               <a:t>Evaluation &amp; Results</a:t>
             </a:r>
-            <a:endParaRPr lang="en-US" sz="1350" dirty="0"/>
+            <a:endParaRPr lang="en-US" dirty="0"/>
           </a:p>
         </p:txBody>
       </p:sp>
@@ -6014,7 +5940,7 @@
               <a:buNone/>
             </a:pPr>
             <a:r>
-              <a:rPr lang="en-US" sz="950" dirty="0">
+              <a:rPr lang="en-US" sz="1600" dirty="0">
                 <a:solidFill>
                   <a:srgbClr val="7A8FA6"/>
                 </a:solidFill>
@@ -6024,7 +5950,7 @@
               </a:rPr>
               <a:t>Metrics · cross-validation · final model performance</a:t>
             </a:r>
-            <a:endParaRPr lang="en-US" sz="950" dirty="0"/>
+            <a:endParaRPr lang="en-US" sz="1600" dirty="0"/>
           </a:p>
         </p:txBody>
       </p:sp>
@@ -6119,14 +6045,14 @@
               <a:buNone/>
             </a:pPr>
             <a:r>
-              <a:rPr lang="en-US" sz="1100" b="1" dirty="0">
+              <a:rPr lang="en-US" sz="1600" b="1" dirty="0">
                 <a:solidFill>
                   <a:srgbClr val="FFFFFF"/>
                 </a:solidFill>
               </a:rPr>
               <a:t>04</a:t>
             </a:r>
-            <a:endParaRPr lang="en-US" sz="1100" dirty="0"/>
+            <a:endParaRPr lang="en-US" sz="1600" dirty="0"/>
           </a:p>
         </p:txBody>
       </p:sp>
@@ -6155,7 +6081,7 @@
               <a:buNone/>
             </a:pPr>
             <a:r>
-              <a:rPr lang="en-US" sz="1350" b="1" dirty="0">
+              <a:rPr lang="en-US" b="1" dirty="0">
                 <a:solidFill>
                   <a:srgbClr val="1C2B4A"/>
                 </a:solidFill>
@@ -6165,7 +6091,7 @@
               </a:rPr>
               <a:t>Explainability</a:t>
             </a:r>
-            <a:endParaRPr lang="en-US" sz="1350" dirty="0"/>
+            <a:endParaRPr lang="en-US" dirty="0"/>
           </a:p>
         </p:txBody>
       </p:sp>
@@ -6194,7 +6120,7 @@
               <a:buNone/>
             </a:pPr>
             <a:r>
-              <a:rPr lang="en-US" sz="950" dirty="0">
+              <a:rPr lang="en-US" sz="1600" dirty="0">
                 <a:solidFill>
                   <a:srgbClr val="7A8FA6"/>
                 </a:solidFill>
@@ -6204,7 +6130,7 @@
               </a:rPr>
               <a:t>Global &amp; local techniques · consistency with domain knowledge</a:t>
             </a:r>
-            <a:endParaRPr lang="en-US" sz="950" dirty="0"/>
+            <a:endParaRPr lang="en-US" sz="1600" dirty="0"/>
           </a:p>
         </p:txBody>
       </p:sp>
@@ -6216,7 +6142,7 @@
         </p:nvSpPr>
         <p:spPr>
           <a:xfrm>
-            <a:off x="8138160" y="3456432"/>
+            <a:off x="8138160" y="3401568"/>
             <a:ext cx="640080" cy="292608"/>
           </a:xfrm>
           <a:prstGeom prst="roundRect">
@@ -6250,7 +6176,7 @@
         </p:nvSpPr>
         <p:spPr>
           <a:xfrm>
-            <a:off x="8138160" y="3456432"/>
+            <a:off x="8138160" y="3401568"/>
             <a:ext cx="640080" cy="292608"/>
           </a:xfrm>
           <a:prstGeom prst="rect">
@@ -6267,14 +6193,14 @@
               <a:buNone/>
             </a:pPr>
             <a:r>
-              <a:rPr lang="en-US" sz="700" b="1" kern="0" spc="100" dirty="0">
+              <a:rPr lang="en-US" sz="1050" b="1" kern="0" spc="100" dirty="0">
                 <a:solidFill>
                   <a:srgbClr val="008F84"/>
                 </a:solidFill>
               </a:rPr>
               <a:t>PART 2</a:t>
             </a:r>
-            <a:endParaRPr lang="en-US" sz="700" dirty="0"/>
+            <a:endParaRPr lang="en-US" sz="1050" dirty="0"/>
           </a:p>
         </p:txBody>
       </p:sp>
@@ -6369,14 +6295,14 @@
               <a:buNone/>
             </a:pPr>
             <a:r>
-              <a:rPr lang="en-US" sz="1100" b="1" dirty="0">
+              <a:rPr lang="en-US" sz="1600" b="1" dirty="0">
                 <a:solidFill>
                   <a:srgbClr val="FFFFFF"/>
                 </a:solidFill>
               </a:rPr>
               <a:t>05</a:t>
             </a:r>
-            <a:endParaRPr lang="en-US" sz="1100" dirty="0"/>
+            <a:endParaRPr lang="en-US" sz="1600" dirty="0"/>
           </a:p>
         </p:txBody>
       </p:sp>
@@ -6405,7 +6331,7 @@
               <a:buNone/>
             </a:pPr>
             <a:r>
-              <a:rPr lang="en-US" sz="1350" b="1" dirty="0">
+              <a:rPr lang="en-US" b="1" dirty="0">
                 <a:solidFill>
                   <a:srgbClr val="1C2B4A"/>
                 </a:solidFill>
@@ -6415,7 +6341,7 @@
               </a:rPr>
               <a:t>Critical Discussion</a:t>
             </a:r>
-            <a:endParaRPr lang="en-US" sz="1350" dirty="0"/>
+            <a:endParaRPr lang="en-US" dirty="0"/>
           </a:p>
         </p:txBody>
       </p:sp>
@@ -6444,7 +6370,7 @@
               <a:buNone/>
             </a:pPr>
             <a:r>
-              <a:rPr lang="en-US" sz="950" dirty="0">
+              <a:rPr lang="en-US" sz="1600" dirty="0">
                 <a:solidFill>
                   <a:srgbClr val="7A8FA6"/>
                 </a:solidFill>
@@ -6454,7 +6380,7 @@
               </a:rPr>
               <a:t>Error analysis · limitations · future directions</a:t>
             </a:r>
-            <a:endParaRPr lang="en-US" sz="950" dirty="0"/>
+            <a:endParaRPr lang="en-US" sz="1600" dirty="0"/>
           </a:p>
         </p:txBody>
       </p:sp>
@@ -6749,7 +6675,7 @@
               <a:buNone/>
             </a:pPr>
             <a:r>
-              <a:rPr lang="en-US" sz="750" b="1" kern="0" spc="150" dirty="0">
+              <a:rPr lang="en-US" sz="1200" b="1" kern="0" spc="150" dirty="0">
                 <a:solidFill>
                   <a:srgbClr val="FFFFFF"/>
                 </a:solidFill>
@@ -6824,7 +6750,7 @@
               <a:buNone/>
             </a:pPr>
             <a:r>
-              <a:rPr lang="en-US" sz="1200" b="1" dirty="0">
+              <a:rPr lang="en-US" sz="1600" b="1" dirty="0">
                 <a:solidFill>
                   <a:srgbClr val="1C2B4A"/>
                 </a:solidFill>
@@ -6834,7 +6760,7 @@
               </a:rPr>
               <a:t>The Problem</a:t>
             </a:r>
-            <a:endParaRPr lang="en-US" sz="1200" dirty="0"/>
+            <a:endParaRPr lang="en-US" sz="1600" dirty="0"/>
           </a:p>
         </p:txBody>
       </p:sp>
@@ -6859,10 +6785,6 @@
           <a:bodyPr wrap="square" lIns="0" tIns="0" rIns="0" bIns="0" rtlCol="0" anchor="t"/>
           <a:lstStyle/>
           <a:p>
-            <a:pPr marL="171450" indent="-171450">
-              <a:buFont typeface="Arial" panose="020B0604020202020204" pitchFamily="34" charset="0"/>
-              <a:buChar char="•"/>
-            </a:pPr>
             <a:r>
               <a:rPr lang="it-IT" sz="1200" dirty="0"/>
               <a:t>The </a:t>
@@ -6926,17 +6848,9 @@
             <a:endParaRPr lang="it-IT" sz="1200" b="1" dirty="0"/>
           </a:p>
           <a:p>
-            <a:pPr marL="171450" indent="-171450">
-              <a:buFont typeface="Arial" panose="020B0604020202020204" pitchFamily="34" charset="0"/>
-              <a:buChar char="•"/>
-            </a:pPr>
             <a:endParaRPr lang="it-IT" sz="1200" dirty="0"/>
           </a:p>
           <a:p>
-            <a:pPr marL="171450" indent="-171450">
-              <a:buFont typeface="Arial" panose="020B0604020202020204" pitchFamily="34" charset="0"/>
-              <a:buChar char="•"/>
-            </a:pPr>
             <a:r>
               <a:rPr lang="it-IT" sz="1200" dirty="0"/>
               <a:t>A </a:t>
@@ -7007,17 +6921,9 @@
             </a:r>
           </a:p>
           <a:p>
-            <a:pPr marL="171450" indent="-171450">
-              <a:buFont typeface="Arial" panose="020B0604020202020204" pitchFamily="34" charset="0"/>
-              <a:buChar char="•"/>
-            </a:pPr>
             <a:endParaRPr lang="it-IT" sz="1200" dirty="0"/>
           </a:p>
           <a:p>
-            <a:pPr marL="171450" indent="-171450">
-              <a:buFont typeface="Arial" panose="020B0604020202020204" pitchFamily="34" charset="0"/>
-              <a:buChar char="•"/>
-            </a:pPr>
             <a:r>
               <a:rPr lang="it-IT" sz="1200" b="1" dirty="0" err="1"/>
               <a:t>HitPredictor-Steam</a:t>
@@ -7076,17 +6982,9 @@
             </a:r>
           </a:p>
           <a:p>
-            <a:pPr marL="171450" indent="-171450">
-              <a:buFont typeface="Arial" panose="020B0604020202020204" pitchFamily="34" charset="0"/>
-              <a:buChar char="•"/>
-            </a:pPr>
             <a:endParaRPr lang="it-IT" sz="1200" dirty="0"/>
           </a:p>
           <a:p>
-            <a:pPr marL="171450" indent="-171450">
-              <a:buFont typeface="Arial" panose="020B0604020202020204" pitchFamily="34" charset="0"/>
-              <a:buChar char="•"/>
-            </a:pPr>
             <a:r>
               <a:rPr lang="en-US" sz="1200" dirty="0"/>
               <a:t>Two models have been developed: one works pre-release, predicting a game's end users before its launch. The post-release model instead classifies the popularity of already-released games, allowing for market analysis.</a:t>
@@ -7094,17 +6992,9 @@
             <a:endParaRPr lang="it-IT" sz="1200" dirty="0"/>
           </a:p>
           <a:p>
-            <a:pPr marL="171450" indent="-171450">
-              <a:buFont typeface="Arial" panose="020B0604020202020204" pitchFamily="34" charset="0"/>
-              <a:buChar char="•"/>
-            </a:pPr>
             <a:endParaRPr lang="it-IT" sz="1200" dirty="0"/>
           </a:p>
           <a:p>
-            <a:pPr marL="171450" indent="-171450">
-              <a:buFont typeface="Arial" panose="020B0604020202020204" pitchFamily="34" charset="0"/>
-              <a:buChar char="•"/>
-            </a:pPr>
             <a:r>
               <a:rPr lang="it-IT" sz="1200" dirty="0" err="1"/>
               <a:t>Primary</a:t>
@@ -8213,14 +8103,14 @@
               <a:buNone/>
             </a:pPr>
             <a:r>
-              <a:rPr lang="en-US" sz="750" b="1" kern="0" spc="150" dirty="0">
+              <a:rPr lang="en-US" sz="1200" b="1" kern="0" spc="150" dirty="0">
                 <a:solidFill>
                   <a:srgbClr val="FFFFFF"/>
                 </a:solidFill>
               </a:rPr>
               <a:t>PROBLEM</a:t>
             </a:r>
-            <a:endParaRPr lang="en-US" sz="750" dirty="0"/>
+            <a:endParaRPr lang="en-US" sz="1200" dirty="0"/>
           </a:p>
         </p:txBody>
       </p:sp>
@@ -8396,7 +8286,7 @@
               <a:buNone/>
             </a:pPr>
             <a:r>
-              <a:rPr lang="en-US" sz="1000" b="1" dirty="0">
+              <a:rPr lang="en-US" sz="1200" b="1" dirty="0">
                 <a:solidFill>
                   <a:srgbClr val="1C2B4A"/>
                 </a:solidFill>
@@ -8413,7 +8303,7 @@
               <a:buChar char="•"/>
             </a:pPr>
             <a:r>
-              <a:rPr lang="en-US" sz="1000" dirty="0"/>
+              <a:rPr lang="en-US" sz="1200" dirty="0"/>
               <a:t>Severe class imbalance is present, with the Indie Long-Tail (Tier 0) dominating the dataset at over 69%</a:t>
             </a:r>
           </a:p>
@@ -8423,7 +8313,7 @@
               <a:buChar char="•"/>
             </a:pPr>
             <a:r>
-              <a:rPr lang="en-US" sz="1000" dirty="0"/>
+              <a:rPr lang="en-US" sz="1200" dirty="0"/>
               <a:t>The original 13 high-variance classes representing the owner ranges have been engineered into 5 ordinal macro-tiers to enable effective classification.</a:t>
             </a:r>
           </a:p>
@@ -8433,7 +8323,7 @@
               <a:buChar char="•"/>
             </a:pPr>
             <a:r>
-              <a:rPr lang="en-US" sz="1000" dirty="0"/>
+              <a:rPr lang="en-US" sz="1200" dirty="0"/>
               <a:t>To prevent target leakage, post-launch engagement features (like reviews and concurrent users) must be bifurcated from pre-launch metadata, creating two operational models.</a:t>
             </a:r>
           </a:p>
@@ -8491,7 +8381,7 @@
         </p:blipFill>
         <p:spPr>
           <a:xfrm>
-            <a:off x="4663440" y="714280"/>
+            <a:off x="4480560" y="566928"/>
             <a:ext cx="3403862" cy="3335462"/>
           </a:xfrm>
           <a:prstGeom prst="rect">
@@ -8591,14 +8481,14 @@
               <a:buNone/>
             </a:pPr>
             <a:r>
-              <a:rPr lang="en-US" sz="750" b="1" kern="0" spc="150" dirty="0">
+              <a:rPr lang="en-US" sz="1200" b="1" kern="0" spc="150" dirty="0">
                 <a:solidFill>
                   <a:srgbClr val="FFFFFF"/>
                 </a:solidFill>
               </a:rPr>
               <a:t>PIPELINE</a:t>
             </a:r>
-            <a:endParaRPr lang="en-US" sz="750" dirty="0"/>
+            <a:endParaRPr lang="en-US" sz="1200" dirty="0"/>
           </a:p>
         </p:txBody>
       </p:sp>
@@ -8650,7 +8540,7 @@
         <p:spPr>
           <a:xfrm>
             <a:off x="411480" y="1170432"/>
-            <a:ext cx="2651760" cy="3566160"/>
+            <a:ext cx="3960200" cy="3566160"/>
           </a:xfrm>
           <a:prstGeom prst="roundRect">
             <a:avLst>
@@ -8691,7 +8581,7 @@
         <p:spPr>
           <a:xfrm>
             <a:off x="411480" y="1170432"/>
-            <a:ext cx="2651760" cy="384048"/>
+            <a:ext cx="3960200" cy="384048"/>
           </a:xfrm>
           <a:prstGeom prst="roundRect">
             <a:avLst>
@@ -8725,7 +8615,7 @@
         <p:spPr>
           <a:xfrm>
             <a:off x="411480" y="1417320"/>
-            <a:ext cx="2651760" cy="137160"/>
+            <a:ext cx="3960200" cy="100584"/>
           </a:xfrm>
           <a:prstGeom prst="rect">
             <a:avLst/>
@@ -8796,7 +8686,7 @@
         <p:spPr>
           <a:xfrm>
             <a:off x="548640" y="1627632"/>
-            <a:ext cx="2377440" cy="2926080"/>
+            <a:ext cx="3637484" cy="2926080"/>
           </a:xfrm>
           <a:prstGeom prst="rect">
             <a:avLst/>
@@ -8808,15 +8698,14 @@
           <a:bodyPr wrap="square" lIns="0" tIns="0" rIns="0" bIns="0" rtlCol="0" anchor="t"/>
           <a:lstStyle/>
           <a:p>
-            <a:pPr marL="342900" indent="-342900">
+            <a:pPr>
               <a:spcAft>
                 <a:spcPts val="500"/>
               </a:spcAft>
               <a:buSzPct val="100000"/>
-              <a:buChar char="•"/>
-            </a:pPr>
-            <a:r>
-              <a:rPr lang="it-IT" sz="1000" dirty="0">
+            </a:pPr>
+            <a:r>
+              <a:rPr lang="it-IT" sz="1200" dirty="0">
                 <a:latin typeface="Calibri" panose="020F0502020204030204" pitchFamily="34" charset="0"/>
                 <a:ea typeface="Calibri" panose="020F0502020204030204" pitchFamily="34" charset="0"/>
                 <a:cs typeface="Calibri" panose="020F0502020204030204" pitchFamily="34" charset="0"/>
@@ -8824,7 +8713,7 @@
               <a:t>Hardware </a:t>
             </a:r>
             <a:r>
-              <a:rPr lang="it-IT" sz="1000" dirty="0" err="1">
+              <a:rPr lang="it-IT" sz="1200" dirty="0" err="1">
                 <a:latin typeface="Calibri" panose="020F0502020204030204" pitchFamily="34" charset="0"/>
                 <a:ea typeface="Calibri" panose="020F0502020204030204" pitchFamily="34" charset="0"/>
                 <a:cs typeface="Calibri" panose="020F0502020204030204" pitchFamily="34" charset="0"/>
@@ -8832,7 +8721,7 @@
               <a:t>specifications</a:t>
             </a:r>
             <a:r>
-              <a:rPr lang="it-IT" sz="1000" dirty="0">
+              <a:rPr lang="it-IT" sz="1200" dirty="0">
                 <a:latin typeface="Calibri" panose="020F0502020204030204" pitchFamily="34" charset="0"/>
                 <a:ea typeface="Calibri" panose="020F0502020204030204" pitchFamily="34" charset="0"/>
                 <a:cs typeface="Calibri" panose="020F0502020204030204" pitchFamily="34" charset="0"/>
@@ -8840,7 +8729,7 @@
               <a:t> (e.g. RAM) </a:t>
             </a:r>
             <a:r>
-              <a:rPr lang="it-IT" sz="1000" dirty="0" err="1">
+              <a:rPr lang="it-IT" sz="1200" dirty="0" err="1">
                 <a:latin typeface="Calibri" panose="020F0502020204030204" pitchFamily="34" charset="0"/>
                 <a:ea typeface="Calibri" panose="020F0502020204030204" pitchFamily="34" charset="0"/>
                 <a:cs typeface="Calibri" panose="020F0502020204030204" pitchFamily="34" charset="0"/>
@@ -8848,7 +8737,7 @@
               <a:t>were</a:t>
             </a:r>
             <a:r>
-              <a:rPr lang="it-IT" sz="1000" dirty="0">
+              <a:rPr lang="it-IT" sz="1200" dirty="0">
                 <a:latin typeface="Calibri" panose="020F0502020204030204" pitchFamily="34" charset="0"/>
                 <a:ea typeface="Calibri" panose="020F0502020204030204" pitchFamily="34" charset="0"/>
                 <a:cs typeface="Calibri" panose="020F0502020204030204" pitchFamily="34" charset="0"/>
@@ -8856,7 +8745,7 @@
               <a:t> </a:t>
             </a:r>
             <a:r>
-              <a:rPr lang="it-IT" sz="1000" dirty="0" err="1">
+              <a:rPr lang="it-IT" sz="1200" dirty="0" err="1">
                 <a:latin typeface="Calibri" panose="020F0502020204030204" pitchFamily="34" charset="0"/>
                 <a:ea typeface="Calibri" panose="020F0502020204030204" pitchFamily="34" charset="0"/>
                 <a:cs typeface="Calibri" panose="020F0502020204030204" pitchFamily="34" charset="0"/>
@@ -8864,7 +8753,7 @@
               <a:t>parsed</a:t>
             </a:r>
             <a:r>
-              <a:rPr lang="it-IT" sz="1000" dirty="0">
+              <a:rPr lang="it-IT" sz="1200" dirty="0">
                 <a:latin typeface="Calibri" panose="020F0502020204030204" pitchFamily="34" charset="0"/>
                 <a:ea typeface="Calibri" panose="020F0502020204030204" pitchFamily="34" charset="0"/>
                 <a:cs typeface="Calibri" panose="020F0502020204030204" pitchFamily="34" charset="0"/>
@@ -8872,7 +8761,7 @@
               <a:t> </a:t>
             </a:r>
             <a:r>
-              <a:rPr lang="it-IT" sz="1000" dirty="0" err="1">
+              <a:rPr lang="it-IT" sz="1200" dirty="0" err="1">
                 <a:latin typeface="Calibri" panose="020F0502020204030204" pitchFamily="34" charset="0"/>
                 <a:ea typeface="Calibri" panose="020F0502020204030204" pitchFamily="34" charset="0"/>
                 <a:cs typeface="Calibri" panose="020F0502020204030204" pitchFamily="34" charset="0"/>
@@ -8880,7 +8769,7 @@
               <a:t>textual</a:t>
             </a:r>
             <a:r>
-              <a:rPr lang="it-IT" sz="1000" dirty="0">
+              <a:rPr lang="it-IT" sz="1200" dirty="0">
                 <a:latin typeface="Calibri" panose="020F0502020204030204" pitchFamily="34" charset="0"/>
                 <a:ea typeface="Calibri" panose="020F0502020204030204" pitchFamily="34" charset="0"/>
                 <a:cs typeface="Calibri" panose="020F0502020204030204" pitchFamily="34" charset="0"/>
@@ -8888,7 +8777,7 @@
               <a:t> </a:t>
             </a:r>
             <a:r>
-              <a:rPr lang="it-IT" sz="1000" dirty="0" err="1">
+              <a:rPr lang="it-IT" sz="1200" dirty="0" err="1">
                 <a:latin typeface="Calibri" panose="020F0502020204030204" pitchFamily="34" charset="0"/>
                 <a:ea typeface="Calibri" panose="020F0502020204030204" pitchFamily="34" charset="0"/>
                 <a:cs typeface="Calibri" panose="020F0502020204030204" pitchFamily="34" charset="0"/>
@@ -8896,7 +8785,7 @@
               <a:t>requirements</a:t>
             </a:r>
             <a:r>
-              <a:rPr lang="it-IT" sz="1000" dirty="0">
+              <a:rPr lang="it-IT" sz="1200" dirty="0">
                 <a:latin typeface="Calibri" panose="020F0502020204030204" pitchFamily="34" charset="0"/>
                 <a:ea typeface="Calibri" panose="020F0502020204030204" pitchFamily="34" charset="0"/>
                 <a:cs typeface="Calibri" panose="020F0502020204030204" pitchFamily="34" charset="0"/>
@@ -8904,7 +8793,7 @@
               <a:t> </a:t>
             </a:r>
             <a:r>
-              <a:rPr lang="it-IT" sz="1000" dirty="0" err="1">
+              <a:rPr lang="it-IT" sz="1200" dirty="0" err="1">
                 <a:latin typeface="Calibri" panose="020F0502020204030204" pitchFamily="34" charset="0"/>
                 <a:ea typeface="Calibri" panose="020F0502020204030204" pitchFamily="34" charset="0"/>
                 <a:cs typeface="Calibri" panose="020F0502020204030204" pitchFamily="34" charset="0"/>
@@ -8912,7 +8801,7 @@
               <a:t>into</a:t>
             </a:r>
             <a:r>
-              <a:rPr lang="it-IT" sz="1000" dirty="0">
+              <a:rPr lang="it-IT" sz="1200" dirty="0">
                 <a:latin typeface="Calibri" panose="020F0502020204030204" pitchFamily="34" charset="0"/>
                 <a:ea typeface="Calibri" panose="020F0502020204030204" pitchFamily="34" charset="0"/>
                 <a:cs typeface="Calibri" panose="020F0502020204030204" pitchFamily="34" charset="0"/>
@@ -8920,7 +8809,7 @@
               <a:t> </a:t>
             </a:r>
             <a:r>
-              <a:rPr lang="it-IT" sz="1000" dirty="0" err="1">
+              <a:rPr lang="it-IT" sz="1200" dirty="0" err="1">
                 <a:latin typeface="Calibri" panose="020F0502020204030204" pitchFamily="34" charset="0"/>
                 <a:ea typeface="Calibri" panose="020F0502020204030204" pitchFamily="34" charset="0"/>
                 <a:cs typeface="Calibri" panose="020F0502020204030204" pitchFamily="34" charset="0"/>
@@ -8928,7 +8817,7 @@
               <a:t>standardized</a:t>
             </a:r>
             <a:r>
-              <a:rPr lang="it-IT" sz="1000" dirty="0">
+              <a:rPr lang="it-IT" sz="1200" dirty="0">
                 <a:latin typeface="Calibri" panose="020F0502020204030204" pitchFamily="34" charset="0"/>
                 <a:ea typeface="Calibri" panose="020F0502020204030204" pitchFamily="34" charset="0"/>
                 <a:cs typeface="Calibri" panose="020F0502020204030204" pitchFamily="34" charset="0"/>
@@ -8936,7 +8825,7 @@
               <a:t> gigabytes (GB) and CPU/GPU </a:t>
             </a:r>
             <a:r>
-              <a:rPr lang="it-IT" sz="1000" dirty="0" err="1">
+              <a:rPr lang="it-IT" sz="1200" dirty="0" err="1">
                 <a:latin typeface="Calibri" panose="020F0502020204030204" pitchFamily="34" charset="0"/>
                 <a:ea typeface="Calibri" panose="020F0502020204030204" pitchFamily="34" charset="0"/>
                 <a:cs typeface="Calibri" panose="020F0502020204030204" pitchFamily="34" charset="0"/>
@@ -8944,7 +8833,7 @@
               <a:t>requirements</a:t>
             </a:r>
             <a:r>
-              <a:rPr lang="it-IT" sz="1000" dirty="0">
+              <a:rPr lang="it-IT" sz="1200" dirty="0">
                 <a:latin typeface="Calibri" panose="020F0502020204030204" pitchFamily="34" charset="0"/>
                 <a:ea typeface="Calibri" panose="020F0502020204030204" pitchFamily="34" charset="0"/>
                 <a:cs typeface="Calibri" panose="020F0502020204030204" pitchFamily="34" charset="0"/>
@@ -8952,7 +8841,7 @@
               <a:t> </a:t>
             </a:r>
             <a:r>
-              <a:rPr lang="it-IT" sz="1000" dirty="0" err="1">
+              <a:rPr lang="it-IT" sz="1200" dirty="0" err="1">
                 <a:latin typeface="Calibri" panose="020F0502020204030204" pitchFamily="34" charset="0"/>
                 <a:ea typeface="Calibri" panose="020F0502020204030204" pitchFamily="34" charset="0"/>
                 <a:cs typeface="Calibri" panose="020F0502020204030204" pitchFamily="34" charset="0"/>
@@ -8960,7 +8849,7 @@
               <a:t>into</a:t>
             </a:r>
             <a:r>
-              <a:rPr lang="it-IT" sz="1000" dirty="0">
+              <a:rPr lang="it-IT" sz="1200" dirty="0">
                 <a:latin typeface="Calibri" panose="020F0502020204030204" pitchFamily="34" charset="0"/>
                 <a:ea typeface="Calibri" panose="020F0502020204030204" pitchFamily="34" charset="0"/>
                 <a:cs typeface="Calibri" panose="020F0502020204030204" pitchFamily="34" charset="0"/>
@@ -8968,7 +8857,7 @@
               <a:t> </a:t>
             </a:r>
             <a:r>
-              <a:rPr lang="it-IT" sz="1000" dirty="0" err="1">
+              <a:rPr lang="it-IT" sz="1200" dirty="0" err="1">
                 <a:latin typeface="Calibri" panose="020F0502020204030204" pitchFamily="34" charset="0"/>
                 <a:ea typeface="Calibri" panose="020F0502020204030204" pitchFamily="34" charset="0"/>
                 <a:cs typeface="Calibri" panose="020F0502020204030204" pitchFamily="34" charset="0"/>
@@ -8976,7 +8865,7 @@
               <a:t>binary</a:t>
             </a:r>
             <a:r>
-              <a:rPr lang="it-IT" sz="1000" dirty="0">
+              <a:rPr lang="it-IT" sz="1200" dirty="0">
                 <a:latin typeface="Calibri" panose="020F0502020204030204" pitchFamily="34" charset="0"/>
                 <a:ea typeface="Calibri" panose="020F0502020204030204" pitchFamily="34" charset="0"/>
                 <a:cs typeface="Calibri" panose="020F0502020204030204" pitchFamily="34" charset="0"/>
@@ -8984,7 +8873,7 @@
               <a:t> </a:t>
             </a:r>
             <a:r>
-              <a:rPr lang="it-IT" sz="1000" dirty="0" err="1">
+              <a:rPr lang="it-IT" sz="1200" dirty="0" err="1">
                 <a:latin typeface="Calibri" panose="020F0502020204030204" pitchFamily="34" charset="0"/>
                 <a:ea typeface="Calibri" panose="020F0502020204030204" pitchFamily="34" charset="0"/>
                 <a:cs typeface="Calibri" panose="020F0502020204030204" pitchFamily="34" charset="0"/>
@@ -8992,7 +8881,7 @@
               <a:t>indicators</a:t>
             </a:r>
             <a:r>
-              <a:rPr lang="it-IT" sz="1000" dirty="0">
+              <a:rPr lang="it-IT" sz="1200" dirty="0">
                 <a:latin typeface="Calibri" panose="020F0502020204030204" pitchFamily="34" charset="0"/>
                 <a:ea typeface="Calibri" panose="020F0502020204030204" pitchFamily="34" charset="0"/>
                 <a:cs typeface="Calibri" panose="020F0502020204030204" pitchFamily="34" charset="0"/>
@@ -9001,15 +8890,14 @@
             </a:r>
           </a:p>
           <a:p>
-            <a:pPr marL="342900" indent="-342900">
+            <a:pPr>
               <a:spcAft>
                 <a:spcPts val="500"/>
               </a:spcAft>
               <a:buSzPct val="100000"/>
-              <a:buChar char="•"/>
-            </a:pPr>
-            <a:r>
-              <a:rPr lang="it-IT" sz="1000" dirty="0" err="1">
+            </a:pPr>
+            <a:r>
+              <a:rPr lang="it-IT" sz="1200" dirty="0" err="1">
                 <a:latin typeface="Calibri" panose="020F0502020204030204" pitchFamily="34" charset="0"/>
                 <a:ea typeface="Calibri" panose="020F0502020204030204" pitchFamily="34" charset="0"/>
                 <a:cs typeface="Calibri" panose="020F0502020204030204" pitchFamily="34" charset="0"/>
@@ -9017,7 +8905,7 @@
               <a:t>Textual</a:t>
             </a:r>
             <a:r>
-              <a:rPr lang="it-IT" sz="1000" dirty="0">
+              <a:rPr lang="it-IT" sz="1200" dirty="0">
                 <a:latin typeface="Calibri" panose="020F0502020204030204" pitchFamily="34" charset="0"/>
                 <a:ea typeface="Calibri" panose="020F0502020204030204" pitchFamily="34" charset="0"/>
                 <a:cs typeface="Calibri" panose="020F0502020204030204" pitchFamily="34" charset="0"/>
@@ -9025,7 +8913,7 @@
               <a:t> fields </a:t>
             </a:r>
             <a:r>
-              <a:rPr lang="it-IT" sz="1000" dirty="0" err="1">
+              <a:rPr lang="it-IT" sz="1200" dirty="0" err="1">
                 <a:latin typeface="Calibri" panose="020F0502020204030204" pitchFamily="34" charset="0"/>
                 <a:ea typeface="Calibri" panose="020F0502020204030204" pitchFamily="34" charset="0"/>
                 <a:cs typeface="Calibri" panose="020F0502020204030204" pitchFamily="34" charset="0"/>
@@ -9033,7 +8921,7 @@
               <a:t>underwent</a:t>
             </a:r>
             <a:r>
-              <a:rPr lang="it-IT" sz="1000" dirty="0">
+              <a:rPr lang="it-IT" sz="1200" dirty="0">
                 <a:latin typeface="Calibri" panose="020F0502020204030204" pitchFamily="34" charset="0"/>
                 <a:ea typeface="Calibri" panose="020F0502020204030204" pitchFamily="34" charset="0"/>
                 <a:cs typeface="Calibri" panose="020F0502020204030204" pitchFamily="34" charset="0"/>
@@ -9041,7 +8929,7 @@
               <a:t> </a:t>
             </a:r>
             <a:r>
-              <a:rPr lang="it-IT" sz="1000" dirty="0" err="1">
+              <a:rPr lang="it-IT" sz="1200" dirty="0" err="1">
                 <a:latin typeface="Calibri" panose="020F0502020204030204" pitchFamily="34" charset="0"/>
                 <a:ea typeface="Calibri" panose="020F0502020204030204" pitchFamily="34" charset="0"/>
                 <a:cs typeface="Calibri" panose="020F0502020204030204" pitchFamily="34" charset="0"/>
@@ -9049,7 +8937,7 @@
               <a:t>vectorization</a:t>
             </a:r>
             <a:r>
-              <a:rPr lang="it-IT" sz="1000" dirty="0">
+              <a:rPr lang="it-IT" sz="1200" dirty="0">
                 <a:latin typeface="Calibri" panose="020F0502020204030204" pitchFamily="34" charset="0"/>
                 <a:ea typeface="Calibri" panose="020F0502020204030204" pitchFamily="34" charset="0"/>
                 <a:cs typeface="Calibri" panose="020F0502020204030204" pitchFamily="34" charset="0"/>
@@ -9057,7 +8945,7 @@
               <a:t> via TF-IDF and deep semantic </a:t>
             </a:r>
             <a:r>
-              <a:rPr lang="it-IT" sz="1000" dirty="0" err="1">
+              <a:rPr lang="it-IT" sz="1200" dirty="0" err="1">
                 <a:latin typeface="Calibri" panose="020F0502020204030204" pitchFamily="34" charset="0"/>
                 <a:ea typeface="Calibri" panose="020F0502020204030204" pitchFamily="34" charset="0"/>
                 <a:cs typeface="Calibri" panose="020F0502020204030204" pitchFamily="34" charset="0"/>
@@ -9065,7 +8953,7 @@
               <a:t>embedding</a:t>
             </a:r>
             <a:r>
-              <a:rPr lang="it-IT" sz="1000" dirty="0">
+              <a:rPr lang="it-IT" sz="1200" dirty="0">
                 <a:latin typeface="Calibri" panose="020F0502020204030204" pitchFamily="34" charset="0"/>
                 <a:ea typeface="Calibri" panose="020F0502020204030204" pitchFamily="34" charset="0"/>
                 <a:cs typeface="Calibri" panose="020F0502020204030204" pitchFamily="34" charset="0"/>
@@ -9073,7 +8961,7 @@
               <a:t> (</a:t>
             </a:r>
             <a:r>
-              <a:rPr lang="it-IT" sz="1000" dirty="0" err="1">
+              <a:rPr lang="it-IT" sz="1200" dirty="0" err="1">
                 <a:latin typeface="Calibri" panose="020F0502020204030204" pitchFamily="34" charset="0"/>
                 <a:ea typeface="Calibri" panose="020F0502020204030204" pitchFamily="34" charset="0"/>
                 <a:cs typeface="Calibri" panose="020F0502020204030204" pitchFamily="34" charset="0"/>
@@ -9081,7 +8969,7 @@
               <a:t>frozen</a:t>
             </a:r>
             <a:r>
-              <a:rPr lang="it-IT" sz="1000" dirty="0">
+              <a:rPr lang="it-IT" sz="1200" dirty="0">
                 <a:latin typeface="Calibri" panose="020F0502020204030204" pitchFamily="34" charset="0"/>
                 <a:ea typeface="Calibri" panose="020F0502020204030204" pitchFamily="34" charset="0"/>
                 <a:cs typeface="Calibri" panose="020F0502020204030204" pitchFamily="34" charset="0"/>
@@ -9089,7 +8977,7 @@
               <a:t> </a:t>
             </a:r>
             <a:r>
-              <a:rPr lang="it-IT" sz="1000" dirty="0" err="1">
+              <a:rPr lang="it-IT" sz="1200" dirty="0" err="1">
                 <a:latin typeface="Calibri" panose="020F0502020204030204" pitchFamily="34" charset="0"/>
                 <a:ea typeface="Calibri" panose="020F0502020204030204" pitchFamily="34" charset="0"/>
                 <a:cs typeface="Calibri" panose="020F0502020204030204" pitchFamily="34" charset="0"/>
@@ -9097,7 +8985,7 @@
               <a:t>SentenceTransformer</a:t>
             </a:r>
             <a:r>
-              <a:rPr lang="it-IT" sz="1000" dirty="0">
+              <a:rPr lang="it-IT" sz="1200" dirty="0">
                 <a:latin typeface="Calibri" panose="020F0502020204030204" pitchFamily="34" charset="0"/>
                 <a:ea typeface="Calibri" panose="020F0502020204030204" pitchFamily="34" charset="0"/>
                 <a:cs typeface="Calibri" panose="020F0502020204030204" pitchFamily="34" charset="0"/>
@@ -9105,7 +8993,7 @@
               <a:t>), </a:t>
             </a:r>
             <a:r>
-              <a:rPr lang="it-IT" sz="1000" dirty="0" err="1">
+              <a:rPr lang="it-IT" sz="1200" dirty="0" err="1">
                 <a:latin typeface="Calibri" panose="020F0502020204030204" pitchFamily="34" charset="0"/>
                 <a:ea typeface="Calibri" panose="020F0502020204030204" pitchFamily="34" charset="0"/>
                 <a:cs typeface="Calibri" panose="020F0502020204030204" pitchFamily="34" charset="0"/>
@@ -9113,7 +9001,7 @@
               <a:t>followed</a:t>
             </a:r>
             <a:r>
-              <a:rPr lang="it-IT" sz="1000" dirty="0">
+              <a:rPr lang="it-IT" sz="1200" dirty="0">
                 <a:latin typeface="Calibri" panose="020F0502020204030204" pitchFamily="34" charset="0"/>
                 <a:ea typeface="Calibri" panose="020F0502020204030204" pitchFamily="34" charset="0"/>
                 <a:cs typeface="Calibri" panose="020F0502020204030204" pitchFamily="34" charset="0"/>
@@ -9121,7 +9009,7 @@
               <a:t> by PLS-DA </a:t>
             </a:r>
             <a:r>
-              <a:rPr lang="it-IT" sz="1000" dirty="0" err="1">
+              <a:rPr lang="it-IT" sz="1200" dirty="0" err="1">
                 <a:latin typeface="Calibri" panose="020F0502020204030204" pitchFamily="34" charset="0"/>
                 <a:ea typeface="Calibri" panose="020F0502020204030204" pitchFamily="34" charset="0"/>
                 <a:cs typeface="Calibri" panose="020F0502020204030204" pitchFamily="34" charset="0"/>
@@ -9129,7 +9017,7 @@
               <a:t>compression</a:t>
             </a:r>
             <a:r>
-              <a:rPr lang="it-IT" sz="1000" dirty="0">
+              <a:rPr lang="it-IT" sz="1200" dirty="0">
                 <a:latin typeface="Calibri" panose="020F0502020204030204" pitchFamily="34" charset="0"/>
                 <a:ea typeface="Calibri" panose="020F0502020204030204" pitchFamily="34" charset="0"/>
                 <a:cs typeface="Calibri" panose="020F0502020204030204" pitchFamily="34" charset="0"/>
@@ -9138,15 +9026,14 @@
             </a:r>
           </a:p>
           <a:p>
-            <a:pPr marL="342900" indent="-342900">
+            <a:pPr>
               <a:spcAft>
                 <a:spcPts val="500"/>
               </a:spcAft>
               <a:buSzPct val="100000"/>
-              <a:buChar char="•"/>
-            </a:pPr>
-            <a:r>
-              <a:rPr lang="en-US" sz="1000" dirty="0">
+            </a:pPr>
+            <a:r>
+              <a:rPr lang="en-US" sz="1200" dirty="0">
                 <a:latin typeface="Calibri" panose="020F0502020204030204" pitchFamily="34" charset="0"/>
                 <a:ea typeface="Calibri" panose="020F0502020204030204" pitchFamily="34" charset="0"/>
                 <a:cs typeface="Calibri" panose="020F0502020204030204" pitchFamily="34" charset="0"/>
@@ -9154,7 +9041,7 @@
               <a:t>JSON-like columns (platforms, </a:t>
             </a:r>
             <a:r>
-              <a:rPr lang="en-US" sz="1000" dirty="0" err="1">
+              <a:rPr lang="en-US" sz="1200" dirty="0" err="1">
                 <a:latin typeface="Calibri" panose="020F0502020204030204" pitchFamily="34" charset="0"/>
                 <a:ea typeface="Calibri" panose="020F0502020204030204" pitchFamily="34" charset="0"/>
                 <a:cs typeface="Calibri" panose="020F0502020204030204" pitchFamily="34" charset="0"/>
@@ -9162,29 +9049,28 @@
               <a:t>metacritic</a:t>
             </a:r>
             <a:r>
-              <a:rPr lang="en-US" sz="1000" dirty="0">
+              <a:rPr lang="en-US" sz="1200" dirty="0">
                 <a:latin typeface="Calibri" panose="020F0502020204030204" pitchFamily="34" charset="0"/>
                 <a:ea typeface="Calibri" panose="020F0502020204030204" pitchFamily="34" charset="0"/>
                 <a:cs typeface="Calibri" panose="020F0502020204030204" pitchFamily="34" charset="0"/>
               </a:rPr>
               <a:t>, achievements) were extracted and categories genres tags publishers developers normalized into token lists</a:t>
             </a:r>
-            <a:endParaRPr lang="it-IT" sz="1000" dirty="0">
+            <a:endParaRPr lang="it-IT" sz="1200" dirty="0">
               <a:latin typeface="Calibri" panose="020F0502020204030204" pitchFamily="34" charset="0"/>
               <a:ea typeface="Calibri" panose="020F0502020204030204" pitchFamily="34" charset="0"/>
               <a:cs typeface="Calibri" panose="020F0502020204030204" pitchFamily="34" charset="0"/>
             </a:endParaRPr>
           </a:p>
           <a:p>
-            <a:pPr marL="342900" indent="-342900">
+            <a:pPr>
               <a:spcAft>
                 <a:spcPts val="500"/>
               </a:spcAft>
               <a:buSzPct val="100000"/>
-              <a:buChar char="•"/>
-            </a:pPr>
-            <a:r>
-              <a:rPr lang="it-IT" sz="1000" dirty="0" err="1">
+            </a:pPr>
+            <a:r>
+              <a:rPr lang="it-IT" sz="1200" dirty="0" err="1">
                 <a:latin typeface="Calibri" panose="020F0502020204030204" pitchFamily="34" charset="0"/>
                 <a:ea typeface="Calibri" panose="020F0502020204030204" pitchFamily="34" charset="0"/>
                 <a:cs typeface="Calibri" panose="020F0502020204030204" pitchFamily="34" charset="0"/>
@@ -9192,7 +9078,7 @@
               <a:t>Continuous</a:t>
             </a:r>
             <a:r>
-              <a:rPr lang="it-IT" sz="1000" dirty="0">
+              <a:rPr lang="it-IT" sz="1200" dirty="0">
                 <a:latin typeface="Calibri" panose="020F0502020204030204" pitchFamily="34" charset="0"/>
                 <a:ea typeface="Calibri" panose="020F0502020204030204" pitchFamily="34" charset="0"/>
                 <a:cs typeface="Calibri" panose="020F0502020204030204" pitchFamily="34" charset="0"/>
@@ -9200,7 +9086,7 @@
               <a:t> </a:t>
             </a:r>
             <a:r>
-              <a:rPr lang="it-IT" sz="1000" dirty="0" err="1">
+              <a:rPr lang="it-IT" sz="1200" dirty="0" err="1">
                 <a:latin typeface="Calibri" panose="020F0502020204030204" pitchFamily="34" charset="0"/>
                 <a:ea typeface="Calibri" panose="020F0502020204030204" pitchFamily="34" charset="0"/>
                 <a:cs typeface="Calibri" panose="020F0502020204030204" pitchFamily="34" charset="0"/>
@@ -9208,7 +9094,7 @@
               <a:t>numeric</a:t>
             </a:r>
             <a:r>
-              <a:rPr lang="it-IT" sz="1000" dirty="0">
+              <a:rPr lang="it-IT" sz="1200" dirty="0">
                 <a:latin typeface="Calibri" panose="020F0502020204030204" pitchFamily="34" charset="0"/>
                 <a:ea typeface="Calibri" panose="020F0502020204030204" pitchFamily="34" charset="0"/>
                 <a:cs typeface="Calibri" panose="020F0502020204030204" pitchFamily="34" charset="0"/>
@@ -9216,7 +9102,7 @@
               <a:t> features </a:t>
             </a:r>
             <a:r>
-              <a:rPr lang="it-IT" sz="1000" dirty="0" err="1">
+              <a:rPr lang="it-IT" sz="1200" dirty="0" err="1">
                 <a:latin typeface="Calibri" panose="020F0502020204030204" pitchFamily="34" charset="0"/>
                 <a:ea typeface="Calibri" panose="020F0502020204030204" pitchFamily="34" charset="0"/>
                 <a:cs typeface="Calibri" panose="020F0502020204030204" pitchFamily="34" charset="0"/>
@@ -9224,7 +9110,7 @@
               <a:t>received</a:t>
             </a:r>
             <a:r>
-              <a:rPr lang="it-IT" sz="1000" dirty="0">
+              <a:rPr lang="it-IT" sz="1200" dirty="0">
                 <a:latin typeface="Calibri" panose="020F0502020204030204" pitchFamily="34" charset="0"/>
                 <a:ea typeface="Calibri" panose="020F0502020204030204" pitchFamily="34" charset="0"/>
                 <a:cs typeface="Calibri" panose="020F0502020204030204" pitchFamily="34" charset="0"/>
@@ -9232,7 +9118,7 @@
               <a:t> NaN </a:t>
             </a:r>
             <a:r>
-              <a:rPr lang="it-IT" sz="1000" dirty="0" err="1">
+              <a:rPr lang="it-IT" sz="1200" dirty="0" err="1">
                 <a:latin typeface="Calibri" panose="020F0502020204030204" pitchFamily="34" charset="0"/>
                 <a:ea typeface="Calibri" panose="020F0502020204030204" pitchFamily="34" charset="0"/>
                 <a:cs typeface="Calibri" panose="020F0502020204030204" pitchFamily="34" charset="0"/>
@@ -9240,7 +9126,7 @@
               <a:t>imputation</a:t>
             </a:r>
             <a:r>
-              <a:rPr lang="it-IT" sz="1000" dirty="0">
+              <a:rPr lang="it-IT" sz="1200" dirty="0">
                 <a:latin typeface="Calibri" panose="020F0502020204030204" pitchFamily="34" charset="0"/>
                 <a:ea typeface="Calibri" panose="020F0502020204030204" pitchFamily="34" charset="0"/>
                 <a:cs typeface="Calibri" panose="020F0502020204030204" pitchFamily="34" charset="0"/>
@@ -9248,7 +9134,7 @@
               <a:t>  </a:t>
             </a:r>
             <a:r>
-              <a:rPr lang="en-US" sz="1000" dirty="0">
+              <a:rPr lang="en-US" sz="1200" dirty="0">
                 <a:latin typeface="Calibri" panose="020F0502020204030204" pitchFamily="34" charset="0"/>
                 <a:ea typeface="Calibri" panose="020F0502020204030204" pitchFamily="34" charset="0"/>
                 <a:cs typeface="Calibri" panose="020F0502020204030204" pitchFamily="34" charset="0"/>
@@ -9256,7 +9142,7 @@
               <a:t>within an </a:t>
             </a:r>
             <a:r>
-              <a:rPr lang="en-US" sz="1000" dirty="0" err="1">
+              <a:rPr lang="en-US" sz="1200" dirty="0" err="1">
                 <a:latin typeface="Calibri" panose="020F0502020204030204" pitchFamily="34" charset="0"/>
                 <a:ea typeface="Calibri" panose="020F0502020204030204" pitchFamily="34" charset="0"/>
                 <a:cs typeface="Calibri" panose="020F0502020204030204" pitchFamily="34" charset="0"/>
@@ -9264,7 +9150,7 @@
               <a:t>imbpipeline</a:t>
             </a:r>
             <a:r>
-              <a:rPr lang="en-US" sz="1000" dirty="0">
+              <a:rPr lang="en-US" sz="1200" dirty="0">
                 <a:latin typeface="Calibri" panose="020F0502020204030204" pitchFamily="34" charset="0"/>
                 <a:ea typeface="Calibri" panose="020F0502020204030204" pitchFamily="34" charset="0"/>
                 <a:cs typeface="Calibri" panose="020F0502020204030204" pitchFamily="34" charset="0"/>
@@ -9272,14 +9158,14 @@
               <a:t>, avoiding data leakage</a:t>
             </a:r>
             <a:r>
-              <a:rPr lang="it-IT" sz="1000" dirty="0">
+              <a:rPr lang="it-IT" sz="1200" dirty="0">
                 <a:latin typeface="Calibri" panose="020F0502020204030204" pitchFamily="34" charset="0"/>
                 <a:ea typeface="Calibri" panose="020F0502020204030204" pitchFamily="34" charset="0"/>
                 <a:cs typeface="Calibri" panose="020F0502020204030204" pitchFamily="34" charset="0"/>
               </a:rPr>
               <a:t> </a:t>
             </a:r>
-            <a:endParaRPr lang="en-US" sz="1000" dirty="0">
+            <a:endParaRPr lang="en-US" sz="1300" dirty="0">
               <a:latin typeface="Calibri" panose="020F0502020204030204" pitchFamily="34" charset="0"/>
               <a:ea typeface="Calibri" panose="020F0502020204030204" pitchFamily="34" charset="0"/>
               <a:cs typeface="Calibri" panose="020F0502020204030204" pitchFamily="34" charset="0"/>
@@ -9295,8 +9181,8 @@
         </p:nvSpPr>
         <p:spPr>
           <a:xfrm>
-            <a:off x="3246120" y="1170432"/>
-            <a:ext cx="2651760" cy="3566160"/>
+            <a:off x="4572000" y="1170432"/>
+            <a:ext cx="4160520" cy="1464768"/>
           </a:xfrm>
           <a:prstGeom prst="roundRect">
             <a:avLst>
@@ -9324,7 +9210,7 @@
           <a:bodyPr/>
           <a:lstStyle/>
           <a:p>
-            <a:endParaRPr lang="it-IT"/>
+            <a:endParaRPr lang="it-IT" dirty="0"/>
           </a:p>
         </p:txBody>
       </p:sp>
@@ -9336,8 +9222,8 @@
         </p:nvSpPr>
         <p:spPr>
           <a:xfrm>
-            <a:off x="3246120" y="1170432"/>
-            <a:ext cx="2651760" cy="384048"/>
+            <a:off x="4572000" y="1170432"/>
+            <a:ext cx="4160520" cy="239660"/>
           </a:xfrm>
           <a:prstGeom prst="roundRect">
             <a:avLst>
@@ -9370,8 +9256,8 @@
         </p:nvSpPr>
         <p:spPr>
           <a:xfrm>
-            <a:off x="3246120" y="1417320"/>
-            <a:ext cx="2651760" cy="137160"/>
+            <a:off x="4572000" y="1395720"/>
+            <a:ext cx="4160520" cy="78451"/>
           </a:xfrm>
           <a:prstGeom prst="rect">
             <a:avLst/>
@@ -9402,8 +9288,8 @@
         </p:nvSpPr>
         <p:spPr>
           <a:xfrm>
-            <a:off x="3355848" y="1207008"/>
-            <a:ext cx="2432304" cy="310896"/>
+            <a:off x="4716000" y="1207008"/>
+            <a:ext cx="3672200" cy="194011"/>
           </a:xfrm>
           <a:prstGeom prst="rect">
             <a:avLst/>
@@ -9441,8 +9327,8 @@
         </p:nvSpPr>
         <p:spPr>
           <a:xfrm>
-            <a:off x="3383280" y="1627632"/>
-            <a:ext cx="2377440" cy="2926080"/>
+            <a:off x="4716000" y="1627633"/>
+            <a:ext cx="3586120" cy="944117"/>
           </a:xfrm>
           <a:prstGeom prst="rect">
             <a:avLst/>
@@ -9454,15 +9340,14 @@
           <a:bodyPr wrap="square" lIns="0" tIns="0" rIns="0" bIns="0" rtlCol="0" anchor="t"/>
           <a:lstStyle/>
           <a:p>
-            <a:pPr marL="342900" indent="-342900">
+            <a:pPr>
               <a:spcAft>
                 <a:spcPts val="500"/>
               </a:spcAft>
               <a:buSzPct val="100000"/>
-              <a:buChar char="•"/>
-            </a:pPr>
-            <a:r>
-              <a:rPr lang="en-US" sz="1000" dirty="0">
+            </a:pPr>
+            <a:r>
+              <a:rPr lang="en-US" sz="1200" dirty="0">
                 <a:solidFill>
                   <a:srgbClr val="1E293B"/>
                 </a:solidFill>
@@ -9474,15 +9359,14 @@
             </a:r>
           </a:p>
           <a:p>
-            <a:pPr marL="342900" indent="-342900">
+            <a:pPr>
               <a:spcAft>
                 <a:spcPts val="500"/>
               </a:spcAft>
               <a:buSzPct val="100000"/>
-              <a:buChar char="•"/>
-            </a:pPr>
-            <a:r>
-              <a:rPr lang="en-US" sz="1000" dirty="0">
+            </a:pPr>
+            <a:r>
+              <a:rPr lang="en-US" sz="1200" dirty="0">
                 <a:solidFill>
                   <a:srgbClr val="1E293B"/>
                 </a:solidFill>
@@ -9493,7 +9377,7 @@
               <a:t>An internal </a:t>
             </a:r>
             <a:r>
-              <a:rPr lang="en-US" sz="1000" dirty="0" err="1">
+              <a:rPr lang="en-US" sz="1200" dirty="0" err="1">
                 <a:solidFill>
                   <a:srgbClr val="1E293B"/>
                 </a:solidFill>
@@ -9504,7 +9388,7 @@
               <a:t>SelectFromModel</a:t>
             </a:r>
             <a:r>
-              <a:rPr lang="en-US" sz="1000" dirty="0">
+              <a:rPr lang="en-US" sz="1200" dirty="0">
                 <a:solidFill>
                   <a:srgbClr val="1E293B"/>
                 </a:solidFill>
@@ -9514,7 +9398,7 @@
               </a:rPr>
               <a:t> step pruned irrelevant features dynamically during Bayesian optimization.</a:t>
             </a:r>
-            <a:endParaRPr lang="en-US" sz="1000" dirty="0"/>
+            <a:endParaRPr lang="en-US" sz="1200" dirty="0"/>
           </a:p>
         </p:txBody>
       </p:sp>
@@ -9526,8 +9410,8 @@
         </p:nvSpPr>
         <p:spPr>
           <a:xfrm>
-            <a:off x="6080760" y="1170432"/>
-            <a:ext cx="2651760" cy="3566160"/>
+            <a:off x="4572000" y="2754988"/>
+            <a:ext cx="4147720" cy="1981605"/>
           </a:xfrm>
           <a:prstGeom prst="roundRect">
             <a:avLst>
@@ -9567,8 +9451,8 @@
         </p:nvSpPr>
         <p:spPr>
           <a:xfrm>
-            <a:off x="6080760" y="1170432"/>
-            <a:ext cx="2651760" cy="384048"/>
+            <a:off x="4572000" y="2782117"/>
+            <a:ext cx="4147720" cy="245882"/>
           </a:xfrm>
           <a:prstGeom prst="roundRect">
             <a:avLst>
@@ -9601,8 +9485,8 @@
         </p:nvSpPr>
         <p:spPr>
           <a:xfrm>
-            <a:off x="6080760" y="1417320"/>
-            <a:ext cx="2651760" cy="137160"/>
+            <a:off x="4572000" y="3001876"/>
+            <a:ext cx="4147720" cy="87815"/>
           </a:xfrm>
           <a:prstGeom prst="rect">
             <a:avLst/>
@@ -9633,8 +9517,8 @@
         </p:nvSpPr>
         <p:spPr>
           <a:xfrm>
-            <a:off x="6190488" y="1207008"/>
-            <a:ext cx="2432304" cy="310896"/>
+            <a:off x="4716000" y="2791564"/>
+            <a:ext cx="3695020" cy="236435"/>
           </a:xfrm>
           <a:prstGeom prst="rect">
             <a:avLst/>
@@ -9672,8 +9556,8 @@
         </p:nvSpPr>
         <p:spPr>
           <a:xfrm>
-            <a:off x="6217920" y="1627632"/>
-            <a:ext cx="2377440" cy="2926080"/>
+            <a:off x="4716000" y="3212189"/>
+            <a:ext cx="3617844" cy="1524404"/>
           </a:xfrm>
           <a:prstGeom prst="rect">
             <a:avLst/>
@@ -9685,15 +9569,14 @@
           <a:bodyPr wrap="square" lIns="0" tIns="0" rIns="0" bIns="0" rtlCol="0" anchor="t"/>
           <a:lstStyle/>
           <a:p>
-            <a:pPr marL="342900" indent="-342900">
+            <a:pPr>
               <a:spcAft>
                 <a:spcPts val="500"/>
               </a:spcAft>
               <a:buSzPct val="100000"/>
-              <a:buChar char="•"/>
-            </a:pPr>
-            <a:r>
-              <a:rPr lang="en-US" sz="1000" dirty="0">
+            </a:pPr>
+            <a:r>
+              <a:rPr lang="en-US" sz="1050" dirty="0">
                 <a:solidFill>
                   <a:srgbClr val="1E293B"/>
                 </a:solidFill>
@@ -9705,15 +9588,14 @@
             </a:r>
           </a:p>
           <a:p>
-            <a:pPr marL="342900" indent="-342900">
+            <a:pPr>
               <a:spcAft>
                 <a:spcPts val="500"/>
               </a:spcAft>
               <a:buSzPct val="100000"/>
-              <a:buChar char="•"/>
-            </a:pPr>
-            <a:r>
-              <a:rPr lang="en-US" sz="1000" dirty="0">
+            </a:pPr>
+            <a:r>
+              <a:rPr lang="en-US" sz="1050" dirty="0">
                 <a:solidFill>
                   <a:srgbClr val="1E293B"/>
                 </a:solidFill>
@@ -9789,7 +9671,7 @@
           <a:bodyPr/>
           <a:lstStyle/>
           <a:p>
-            <a:endParaRPr lang="it-IT"/>
+            <a:endParaRPr lang="it-IT" dirty="0"/>
           </a:p>
         </p:txBody>
       </p:sp>
@@ -9818,14 +9700,14 @@
               <a:buNone/>
             </a:pPr>
             <a:r>
-              <a:rPr lang="en-US" sz="750" b="1" kern="0" spc="150" dirty="0">
+              <a:rPr lang="en-US" sz="1200" b="1" kern="0" spc="150" dirty="0">
                 <a:solidFill>
                   <a:srgbClr val="FFFFFF"/>
                 </a:solidFill>
               </a:rPr>
               <a:t>PIPELINE</a:t>
             </a:r>
-            <a:endParaRPr lang="en-US" sz="750" dirty="0"/>
+            <a:endParaRPr lang="en-US" sz="1200" dirty="0"/>
           </a:p>
         </p:txBody>
       </p:sp>
@@ -9927,7 +9809,7 @@
               <a:buNone/>
             </a:pPr>
             <a:r>
-              <a:rPr lang="en-US" sz="900" b="1" dirty="0">
+              <a:rPr lang="en-US" sz="1050" b="1" dirty="0">
                 <a:solidFill>
                   <a:srgbClr val="FFFFFF"/>
                 </a:solidFill>
@@ -9937,14 +9819,14 @@
               </a:rPr>
               <a:t>Raw</a:t>
             </a:r>
-            <a:endParaRPr lang="en-US" sz="900" dirty="0"/>
+            <a:endParaRPr lang="en-US" sz="1050" dirty="0"/>
           </a:p>
           <a:p>
             <a:pPr marL="0" indent="0" algn="ctr">
               <a:buNone/>
             </a:pPr>
             <a:r>
-              <a:rPr lang="en-US" sz="900" b="1" dirty="0">
+              <a:rPr lang="en-US" sz="1050" b="1" dirty="0">
                 <a:solidFill>
                   <a:srgbClr val="FFFFFF"/>
                 </a:solidFill>
@@ -9954,7 +9836,7 @@
               </a:rPr>
               <a:t>Data</a:t>
             </a:r>
-            <a:endParaRPr lang="en-US" sz="900" dirty="0"/>
+            <a:endParaRPr lang="en-US" sz="1050" dirty="0"/>
           </a:p>
         </p:txBody>
       </p:sp>
@@ -10088,7 +9970,7 @@
               <a:buNone/>
             </a:pPr>
             <a:r>
-              <a:rPr lang="en-US" sz="900" b="1" dirty="0">
+              <a:rPr lang="en-US" sz="1050" b="1" dirty="0">
                 <a:solidFill>
                   <a:srgbClr val="FFFFFF"/>
                 </a:solidFill>
@@ -10098,7 +9980,7 @@
               </a:rPr>
               <a:t>Preprocessing and data cleaning</a:t>
             </a:r>
-            <a:endParaRPr lang="en-US" sz="900" dirty="0"/>
+            <a:endParaRPr lang="en-US" sz="1050" dirty="0"/>
           </a:p>
         </p:txBody>
       </p:sp>
@@ -10229,7 +10111,7 @@
               <a:buNone/>
             </a:pPr>
             <a:r>
-              <a:rPr lang="en-US" sz="900" b="1" dirty="0">
+              <a:rPr lang="en-US" sz="1050" b="1" dirty="0">
                 <a:solidFill>
                   <a:srgbClr val="FFFFFF"/>
                 </a:solidFill>
@@ -10239,14 +10121,14 @@
               </a:rPr>
               <a:t>Hyperparameter Tuning and Feature</a:t>
             </a:r>
-            <a:endParaRPr lang="en-US" sz="900" dirty="0"/>
+            <a:endParaRPr lang="en-US" sz="1050" dirty="0"/>
           </a:p>
           <a:p>
             <a:pPr marL="0" indent="0" algn="ctr">
               <a:buNone/>
             </a:pPr>
             <a:r>
-              <a:rPr lang="en-US" sz="900" b="1" dirty="0">
+              <a:rPr lang="en-US" sz="1050" b="1" dirty="0">
                 <a:solidFill>
                   <a:srgbClr val="FFFFFF"/>
                 </a:solidFill>
@@ -10256,7 +10138,7 @@
               </a:rPr>
               <a:t>Selection</a:t>
             </a:r>
-            <a:endParaRPr lang="en-US" sz="900" dirty="0"/>
+            <a:endParaRPr lang="en-US" sz="1050" dirty="0"/>
           </a:p>
         </p:txBody>
       </p:sp>
@@ -10387,7 +10269,7 @@
               <a:buNone/>
             </a:pPr>
             <a:r>
-              <a:rPr lang="en-US" sz="900" b="1" dirty="0">
+              <a:rPr lang="en-US" sz="1050" b="1" dirty="0">
                 <a:solidFill>
                   <a:srgbClr val="FFFFFF"/>
                 </a:solidFill>
@@ -10404,7 +10286,7 @@
               <a:buNone/>
             </a:pPr>
             <a:r>
-              <a:rPr lang="en-US" sz="900" b="1" dirty="0">
+              <a:rPr lang="en-US" sz="1050" b="1" dirty="0">
                 <a:solidFill>
                   <a:srgbClr val="FFFFFF"/>
                 </a:solidFill>
@@ -10414,7 +10296,7 @@
               </a:rPr>
               <a:t>Training and Weights Calibration using Differential Evolution</a:t>
             </a:r>
-            <a:endParaRPr lang="en-US" sz="900" dirty="0"/>
+            <a:endParaRPr lang="en-US" sz="1050" dirty="0"/>
           </a:p>
         </p:txBody>
       </p:sp>
@@ -10516,7 +10398,7 @@
           <a:bodyPr/>
           <a:lstStyle/>
           <a:p>
-            <a:endParaRPr lang="it-IT"/>
+            <a:endParaRPr lang="it-IT" dirty="0"/>
           </a:p>
         </p:txBody>
       </p:sp>
@@ -10545,7 +10427,7 @@
               <a:buNone/>
             </a:pPr>
             <a:r>
-              <a:rPr lang="en-US" sz="900" b="1" dirty="0">
+              <a:rPr lang="en-US" sz="1050" b="1" dirty="0">
                 <a:solidFill>
                   <a:srgbClr val="FFFFFF"/>
                 </a:solidFill>
@@ -10555,14 +10437,14 @@
               </a:rPr>
               <a:t>Validation</a:t>
             </a:r>
-            <a:endParaRPr lang="en-US" sz="900" dirty="0"/>
+            <a:endParaRPr lang="en-US" sz="1050" dirty="0"/>
           </a:p>
           <a:p>
             <a:pPr marL="0" indent="0" algn="ctr">
               <a:buNone/>
             </a:pPr>
             <a:r>
-              <a:rPr lang="en-US" sz="900" b="1" dirty="0">
+              <a:rPr lang="en-US" sz="1050" b="1" dirty="0">
                 <a:solidFill>
                   <a:srgbClr val="FFFFFF"/>
                 </a:solidFill>
@@ -10572,7 +10454,7 @@
               </a:rPr>
               <a:t>(held-out fold) and Evaluation</a:t>
             </a:r>
-            <a:endParaRPr lang="en-US" sz="900" dirty="0"/>
+            <a:endParaRPr lang="en-US" sz="1050" dirty="0"/>
           </a:p>
         </p:txBody>
       </p:sp>
@@ -10703,7 +10585,7 @@
               <a:buNone/>
             </a:pPr>
             <a:r>
-              <a:rPr lang="en-US" sz="900" b="1" dirty="0">
+              <a:rPr lang="en-US" sz="1050" b="1" dirty="0">
                 <a:solidFill>
                   <a:srgbClr val="FFFFFF"/>
                 </a:solidFill>
@@ -10713,14 +10595,14 @@
               </a:rPr>
               <a:t>Final</a:t>
             </a:r>
-            <a:endParaRPr lang="en-US" sz="900" dirty="0"/>
+            <a:endParaRPr lang="en-US" sz="1050" dirty="0"/>
           </a:p>
           <a:p>
             <a:pPr marL="0" indent="0" algn="ctr">
               <a:buNone/>
             </a:pPr>
             <a:r>
-              <a:rPr lang="en-US" sz="900" b="1" dirty="0">
+              <a:rPr lang="en-US" sz="1050" b="1" dirty="0">
                 <a:solidFill>
                   <a:srgbClr val="FFFFFF"/>
                 </a:solidFill>
@@ -10730,7 +10612,7 @@
               </a:rPr>
               <a:t>Training over entire dataset</a:t>
             </a:r>
-            <a:endParaRPr lang="en-US" sz="900" dirty="0"/>
+            <a:endParaRPr lang="en-US" sz="1050" dirty="0"/>
           </a:p>
         </p:txBody>
       </p:sp>
@@ -10771,7 +10653,7 @@
           <a:bodyPr/>
           <a:lstStyle/>
           <a:p>
-            <a:endParaRPr lang="it-IT"/>
+            <a:endParaRPr lang="it-IT" dirty="0"/>
           </a:p>
         </p:txBody>
       </p:sp>
@@ -10835,15 +10717,14 @@
           <a:bodyPr wrap="square" lIns="0" tIns="0" rIns="0" bIns="0" rtlCol="0" anchor="t"/>
           <a:lstStyle/>
           <a:p>
-            <a:pPr marL="342900" indent="-342900">
+            <a:pPr>
               <a:spcAft>
                 <a:spcPts val="500"/>
               </a:spcAft>
               <a:buSzPct val="100000"/>
-              <a:buChar char="•"/>
-            </a:pPr>
-            <a:r>
-              <a:rPr lang="en-US" sz="1000" dirty="0">
+            </a:pPr>
+            <a:r>
+              <a:rPr lang="en-US" sz="1200" dirty="0">
                 <a:solidFill>
                   <a:srgbClr val="1E293B"/>
                 </a:solidFill>
@@ -10853,18 +10734,17 @@
               </a:rPr>
               <a:t>All preprocessing fitted only on training folds to avoid data leakage</a:t>
             </a:r>
-            <a:endParaRPr lang="en-US" sz="1000" dirty="0"/>
-          </a:p>
-          <a:p>
-            <a:pPr marL="342900" indent="-342900">
+            <a:endParaRPr lang="en-US" sz="1200" dirty="0"/>
+          </a:p>
+          <a:p>
+            <a:pPr>
               <a:spcAft>
                 <a:spcPts val="500"/>
               </a:spcAft>
               <a:buSzPct val="100000"/>
-              <a:buChar char="•"/>
-            </a:pPr>
-            <a:r>
-              <a:rPr lang="en-US" sz="1000" dirty="0">
+            </a:pPr>
+            <a:r>
+              <a:rPr lang="en-US" sz="1200" dirty="0">
                 <a:solidFill>
                   <a:srgbClr val="1E293B"/>
                 </a:solidFill>
@@ -10876,15 +10756,14 @@
             </a:r>
           </a:p>
           <a:p>
-            <a:pPr marL="800100" lvl="1" indent="-342900">
+            <a:pPr>
               <a:spcAft>
                 <a:spcPts val="500"/>
               </a:spcAft>
               <a:buSzPct val="100000"/>
-              <a:buChar char="•"/>
-            </a:pPr>
-            <a:r>
-              <a:rPr lang="en-US" sz="1000" dirty="0">
+            </a:pPr>
+            <a:r>
+              <a:rPr lang="en-US" sz="1200" dirty="0">
                 <a:solidFill>
                   <a:srgbClr val="1E293B"/>
                 </a:solidFill>
@@ -10892,19 +10771,18 @@
                 <a:ea typeface="Calibri" pitchFamily="34" charset="-122"/>
                 <a:cs typeface="Calibri" pitchFamily="34" charset="-120"/>
               </a:rPr>
-              <a:t>hardware specification extraction</a:t>
-            </a:r>
-          </a:p>
-          <a:p>
-            <a:pPr marL="800100" lvl="1" indent="-342900">
+              <a:t>- hardware specification extraction</a:t>
+            </a:r>
+          </a:p>
+          <a:p>
+            <a:pPr>
               <a:spcAft>
                 <a:spcPts val="500"/>
               </a:spcAft>
               <a:buSzPct val="100000"/>
-              <a:buChar char="•"/>
-            </a:pPr>
-            <a:r>
-              <a:rPr lang="en-US" sz="1000" dirty="0">
+            </a:pPr>
+            <a:r>
+              <a:rPr lang="en-US" sz="1200" dirty="0">
                 <a:solidFill>
                   <a:srgbClr val="1E293B"/>
                 </a:solidFill>
@@ -10912,19 +10790,18 @@
                 <a:ea typeface="Calibri" pitchFamily="34" charset="-122"/>
                 <a:cs typeface="Calibri" pitchFamily="34" charset="-120"/>
               </a:rPr>
-              <a:t>Unicode/noise filtering</a:t>
-            </a:r>
-          </a:p>
-          <a:p>
-            <a:pPr marL="800100" lvl="1" indent="-342900">
+              <a:t>- Unicode/noise filtering</a:t>
+            </a:r>
+          </a:p>
+          <a:p>
+            <a:pPr>
               <a:spcAft>
                 <a:spcPts val="500"/>
               </a:spcAft>
               <a:buSzPct val="100000"/>
-              <a:buChar char="•"/>
-            </a:pPr>
-            <a:r>
-              <a:rPr lang="en-US" sz="1000" dirty="0">
+            </a:pPr>
+            <a:r>
+              <a:rPr lang="en-US" sz="1200" dirty="0">
                 <a:solidFill>
                   <a:srgbClr val="1E293B"/>
                 </a:solidFill>
@@ -10932,19 +10809,18 @@
                 <a:ea typeface="Calibri" pitchFamily="34" charset="-122"/>
                 <a:cs typeface="Calibri" pitchFamily="34" charset="-120"/>
               </a:rPr>
-              <a:t>continuous feature imputation</a:t>
-            </a:r>
-          </a:p>
-          <a:p>
-            <a:pPr marL="800100" lvl="1" indent="-342900">
+              <a:t>- continuous feature imputation</a:t>
+            </a:r>
+          </a:p>
+          <a:p>
+            <a:pPr>
               <a:spcAft>
                 <a:spcPts val="500"/>
               </a:spcAft>
               <a:buSzPct val="100000"/>
-              <a:buChar char="•"/>
-            </a:pPr>
-            <a:r>
-              <a:rPr lang="en-US" sz="1000" dirty="0">
+            </a:pPr>
+            <a:r>
+              <a:rPr lang="en-US" sz="1200" dirty="0">
                 <a:solidFill>
                   <a:srgbClr val="1E293B"/>
                 </a:solidFill>
@@ -10952,10 +10828,10 @@
                 <a:ea typeface="Calibri" pitchFamily="34" charset="-122"/>
                 <a:cs typeface="Calibri" pitchFamily="34" charset="-120"/>
               </a:rPr>
-              <a:t>text vectorization (TF-IDF + Frozen </a:t>
-            </a:r>
-            <a:r>
-              <a:rPr lang="en-US" sz="1000" dirty="0" err="1">
+              <a:t>- text vectorization (TF-IDF + Frozen </a:t>
+            </a:r>
+            <a:r>
+              <a:rPr lang="en-US" sz="1200" dirty="0" err="1">
                 <a:solidFill>
                   <a:srgbClr val="1E293B"/>
                 </a:solidFill>
@@ -10966,7 +10842,7 @@
               <a:t>SentenceTransformer</a:t>
             </a:r>
             <a:r>
-              <a:rPr lang="en-US" sz="1000" dirty="0">
+              <a:rPr lang="en-US" sz="1200" dirty="0">
                 <a:solidFill>
                   <a:srgbClr val="1E293B"/>
                 </a:solidFill>
@@ -10976,7 +10852,7 @@
               </a:rPr>
               <a:t>) followed by PLS-DA compression</a:t>
             </a:r>
-            <a:endParaRPr lang="en-US" sz="1000" dirty="0"/>
+            <a:endParaRPr lang="en-US" sz="1200" dirty="0"/>
           </a:p>
         </p:txBody>
       </p:sp>
@@ -11081,15 +10957,14 @@
           <a:bodyPr wrap="square" lIns="0" tIns="0" rIns="0" bIns="0" rtlCol="0" anchor="t"/>
           <a:lstStyle/>
           <a:p>
-            <a:pPr marL="342900" indent="-342900">
+            <a:pPr>
               <a:spcAft>
                 <a:spcPts val="500"/>
               </a:spcAft>
               <a:buSzPct val="100000"/>
-              <a:buChar char="•"/>
-            </a:pPr>
-            <a:r>
-              <a:rPr lang="en-US" sz="1000" dirty="0">
+            </a:pPr>
+            <a:r>
+              <a:rPr lang="en-US" sz="1200" dirty="0">
                 <a:solidFill>
                   <a:srgbClr val="1E293B"/>
                 </a:solidFill>
@@ -11100,7 +10975,7 @@
               <a:t>Dynamic Majority </a:t>
             </a:r>
             <a:r>
-              <a:rPr lang="en-US" sz="1000" dirty="0" err="1">
+              <a:rPr lang="en-US" sz="1200" dirty="0" err="1">
                 <a:solidFill>
                   <a:srgbClr val="1E293B"/>
                 </a:solidFill>
@@ -11111,7 +10986,7 @@
               <a:t>Undersampling</a:t>
             </a:r>
             <a:r>
-              <a:rPr lang="en-US" sz="1000" dirty="0">
+              <a:rPr lang="en-US" sz="1200" dirty="0">
                 <a:solidFill>
                   <a:srgbClr val="1E293B"/>
                 </a:solidFill>
@@ -11123,15 +10998,14 @@
             </a:r>
           </a:p>
           <a:p>
-            <a:pPr marL="342900" indent="-342900">
+            <a:pPr>
               <a:spcAft>
                 <a:spcPts val="500"/>
               </a:spcAft>
               <a:buSzPct val="100000"/>
-              <a:buChar char="•"/>
-            </a:pPr>
-            <a:r>
-              <a:rPr lang="en-US" sz="1000" dirty="0">
+            </a:pPr>
+            <a:r>
+              <a:rPr lang="en-US" sz="1200" dirty="0">
                 <a:solidFill>
                   <a:srgbClr val="1E293B"/>
                 </a:solidFill>
@@ -11143,46 +11017,45 @@
             </a:r>
           </a:p>
           <a:p>
-            <a:pPr marL="342900" indent="-342900">
+            <a:pPr>
               <a:spcAft>
                 <a:spcPts val="500"/>
               </a:spcAft>
               <a:buSzPct val="100000"/>
-              <a:buChar char="•"/>
-            </a:pPr>
-            <a:r>
-              <a:rPr lang="it-IT" sz="1000" dirty="0" err="1"/>
+            </a:pPr>
+            <a:r>
+              <a:rPr lang="it-IT" sz="1200" dirty="0" err="1"/>
               <a:t>Metric</a:t>
             </a:r>
             <a:r>
-              <a:rPr lang="it-IT" sz="1000" dirty="0"/>
+              <a:rPr lang="it-IT" sz="1200" dirty="0"/>
               <a:t> </a:t>
             </a:r>
             <a:r>
-              <a:rPr lang="it-IT" sz="1000" dirty="0" err="1"/>
+              <a:rPr lang="it-IT" sz="1200" dirty="0" err="1"/>
               <a:t>used</a:t>
             </a:r>
             <a:r>
-              <a:rPr lang="it-IT" sz="1000" dirty="0"/>
+              <a:rPr lang="it-IT" sz="1200" dirty="0"/>
               <a:t>: </a:t>
             </a:r>
             <a:r>
-              <a:rPr lang="it-IT" sz="1000" dirty="0" err="1"/>
+              <a:rPr lang="it-IT" sz="1200" dirty="0" err="1"/>
               <a:t>Quadratic</a:t>
             </a:r>
             <a:r>
-              <a:rPr lang="it-IT" sz="1000" dirty="0"/>
+              <a:rPr lang="it-IT" sz="1200" dirty="0"/>
               <a:t> </a:t>
             </a:r>
             <a:r>
-              <a:rPr lang="it-IT" sz="1000" dirty="0" err="1"/>
+              <a:rPr lang="it-IT" sz="1200" dirty="0" err="1"/>
               <a:t>Weighted</a:t>
             </a:r>
             <a:r>
-              <a:rPr lang="it-IT" sz="1000" dirty="0"/>
+              <a:rPr lang="it-IT" sz="1200" dirty="0"/>
               <a:t> Kappa (QWK) and Macro-F1 </a:t>
             </a:r>
-            <a:endParaRPr lang="en-US" sz="1000" dirty="0"/>
+            <a:endParaRPr lang="en-US" sz="1200" dirty="0"/>
           </a:p>
         </p:txBody>
       </p:sp>
@@ -11287,15 +11160,14 @@
           <a:bodyPr wrap="square" lIns="0" tIns="0" rIns="0" bIns="0" rtlCol="0" anchor="t"/>
           <a:lstStyle/>
           <a:p>
-            <a:pPr marL="342900" indent="-342900">
+            <a:pPr>
               <a:spcAft>
                 <a:spcPts val="500"/>
               </a:spcAft>
               <a:buSzPct val="100000"/>
-              <a:buChar char="•"/>
-            </a:pPr>
-            <a:r>
-              <a:rPr lang="en-US" sz="1000" dirty="0">
+            </a:pPr>
+            <a:r>
+              <a:rPr lang="en-US" sz="1100" dirty="0">
                 <a:solidFill>
                   <a:srgbClr val="1E293B"/>
                 </a:solidFill>
@@ -11307,15 +11179,14 @@
             </a:r>
           </a:p>
           <a:p>
-            <a:pPr marL="342900" indent="-342900">
+            <a:pPr>
               <a:spcAft>
                 <a:spcPts val="500"/>
               </a:spcAft>
               <a:buSzPct val="100000"/>
-              <a:buChar char="•"/>
-            </a:pPr>
-            <a:r>
-              <a:rPr lang="en-US" sz="1000" dirty="0">
+            </a:pPr>
+            <a:r>
+              <a:rPr lang="en-US" sz="1100" dirty="0">
                 <a:solidFill>
                   <a:srgbClr val="1E293B"/>
                 </a:solidFill>
@@ -11327,15 +11198,14 @@
             </a:r>
           </a:p>
           <a:p>
-            <a:pPr marL="342900" indent="-342900">
+            <a:pPr>
               <a:spcAft>
                 <a:spcPts val="500"/>
               </a:spcAft>
               <a:buSzPct val="100000"/>
-              <a:buChar char="•"/>
-            </a:pPr>
-            <a:r>
-              <a:rPr lang="en-US" sz="1000" dirty="0">
+            </a:pPr>
+            <a:r>
+              <a:rPr lang="en-US" sz="1100" dirty="0">
                 <a:solidFill>
                   <a:srgbClr val="1E293B"/>
                 </a:solidFill>
@@ -11345,7 +11215,7 @@
               </a:rPr>
               <a:t>Additional metrics reported for completeness: F1-score, accuracy, precision, and recall (Macro)</a:t>
             </a:r>
-            <a:endParaRPr lang="en-US" sz="1000" dirty="0"/>
+            <a:endParaRPr lang="en-US" sz="1100" dirty="0"/>
           </a:p>
         </p:txBody>
       </p:sp>
@@ -11441,7 +11311,7 @@
               <a:buNone/>
             </a:pPr>
             <a:r>
-              <a:rPr lang="en-US" sz="750" b="1" kern="0" spc="150" dirty="0">
+              <a:rPr lang="en-US" sz="1200" b="1" kern="0" spc="150" dirty="0">
                 <a:solidFill>
                   <a:srgbClr val="FFFFFF"/>
                 </a:solidFill>
@@ -11574,1068 +11444,6 @@
               <a:t>(e.g., F1-macro or RMSE per CV fold per model)</a:t>
             </a:r>
             <a:endParaRPr lang="en-US" sz="850" dirty="0"/>
-          </a:p>
-        </p:txBody>
-      </p:sp>
-      <p:sp>
-        <p:nvSpPr>
-          <p:cNvPr id="10" name="Text 8"/>
-          <p:cNvSpPr/>
-          <p:nvPr/>
-        </p:nvSpPr>
-        <p:spPr>
-          <a:xfrm>
-            <a:off x="4663440" y="1170432"/>
-            <a:ext cx="4069080" cy="274320"/>
-          </a:xfrm>
-          <a:prstGeom prst="rect">
-            <a:avLst/>
-          </a:prstGeom>
-          <a:noFill/>
-          <a:ln/>
-        </p:spPr>
-        <p:txBody>
-          <a:bodyPr wrap="square" lIns="0" tIns="0" rIns="0" bIns="0" rtlCol="0" anchor="ctr"/>
-          <a:lstStyle/>
-          <a:p>
-            <a:pPr marL="0" indent="0">
-              <a:buNone/>
-            </a:pPr>
-            <a:r>
-              <a:rPr lang="en-US" sz="1200" b="1" dirty="0">
-                <a:solidFill>
-                  <a:srgbClr val="1C2B4A"/>
-                </a:solidFill>
-                <a:latin typeface="Calibri" pitchFamily="34" charset="0"/>
-                <a:ea typeface="Calibri" pitchFamily="34" charset="-122"/>
-                <a:cs typeface="Calibri" pitchFamily="34" charset="-120"/>
-              </a:rPr>
-              <a:t>Key Decisions</a:t>
-            </a:r>
-            <a:endParaRPr lang="en-US" sz="1200" dirty="0"/>
-          </a:p>
-        </p:txBody>
-      </p:sp>
-      <p:sp>
-        <p:nvSpPr>
-          <p:cNvPr id="11" name="Shape 9"/>
-          <p:cNvSpPr/>
-          <p:nvPr/>
-        </p:nvSpPr>
-        <p:spPr>
-          <a:xfrm>
-            <a:off x="4663440" y="1508760"/>
-            <a:ext cx="4069080" cy="283464"/>
-          </a:xfrm>
-          <a:prstGeom prst="rect">
-            <a:avLst/>
-          </a:prstGeom>
-          <a:solidFill>
-            <a:srgbClr val="F8FAFC"/>
-          </a:solidFill>
-          <a:ln w="6350">
-            <a:solidFill>
-              <a:srgbClr val="CBD5E1"/>
-            </a:solidFill>
-            <a:prstDash val="solid"/>
-          </a:ln>
-        </p:spPr>
-        <p:txBody>
-          <a:bodyPr/>
-          <a:lstStyle/>
-          <a:p>
-            <a:endParaRPr lang="it-IT"/>
-          </a:p>
-        </p:txBody>
-      </p:sp>
-      <p:sp>
-        <p:nvSpPr>
-          <p:cNvPr id="12" name="Text 10"/>
-          <p:cNvSpPr/>
-          <p:nvPr/>
-        </p:nvSpPr>
-        <p:spPr>
-          <a:xfrm>
-            <a:off x="4736592" y="1554480"/>
-            <a:ext cx="1463040" cy="201168"/>
-          </a:xfrm>
-          <a:prstGeom prst="rect">
-            <a:avLst/>
-          </a:prstGeom>
-          <a:noFill/>
-          <a:ln/>
-        </p:spPr>
-        <p:txBody>
-          <a:bodyPr wrap="square" lIns="0" tIns="0" rIns="0" bIns="0" rtlCol="0" anchor="ctr"/>
-          <a:lstStyle/>
-          <a:p>
-            <a:pPr marL="0" indent="0">
-              <a:buNone/>
-            </a:pPr>
-            <a:r>
-              <a:rPr lang="en-US" sz="950" b="1" dirty="0">
-                <a:solidFill>
-                  <a:srgbClr val="1C2B4A"/>
-                </a:solidFill>
-                <a:latin typeface="Calibri" pitchFamily="34" charset="0"/>
-                <a:ea typeface="Calibri" pitchFamily="34" charset="-122"/>
-                <a:cs typeface="Calibri" pitchFamily="34" charset="-120"/>
-              </a:rPr>
-              <a:t>Candidate models</a:t>
-            </a:r>
-            <a:endParaRPr lang="en-US" sz="950" dirty="0"/>
-          </a:p>
-        </p:txBody>
-      </p:sp>
-      <p:sp>
-        <p:nvSpPr>
-          <p:cNvPr id="13" name="Text 11"/>
-          <p:cNvSpPr/>
-          <p:nvPr/>
-        </p:nvSpPr>
-        <p:spPr>
-          <a:xfrm>
-            <a:off x="6263640" y="1554480"/>
-            <a:ext cx="2377440" cy="201168"/>
-          </a:xfrm>
-          <a:prstGeom prst="rect">
-            <a:avLst/>
-          </a:prstGeom>
-          <a:noFill/>
-          <a:ln/>
-        </p:spPr>
-        <p:txBody>
-          <a:bodyPr wrap="square" lIns="0" tIns="0" rIns="0" bIns="0" rtlCol="0" anchor="ctr"/>
-          <a:lstStyle/>
-          <a:p>
-            <a:pPr marL="0" indent="0">
-              <a:buNone/>
-            </a:pPr>
-            <a:r>
-              <a:rPr lang="en-US" sz="950" i="1" dirty="0">
-                <a:solidFill>
-                  <a:srgbClr val="4A6587"/>
-                </a:solidFill>
-                <a:latin typeface="Calibri" pitchFamily="34" charset="0"/>
-                <a:ea typeface="Calibri" pitchFamily="34" charset="-122"/>
-                <a:cs typeface="Calibri" pitchFamily="34" charset="-120"/>
-              </a:rPr>
-              <a:t>Decision Trees, Random Forests, and </a:t>
-            </a:r>
-            <a:r>
-              <a:rPr lang="en-US" sz="950" i="1" dirty="0" err="1">
-                <a:solidFill>
-                  <a:srgbClr val="4A6587"/>
-                </a:solidFill>
-                <a:latin typeface="Calibri" pitchFamily="34" charset="0"/>
-                <a:ea typeface="Calibri" pitchFamily="34" charset="-122"/>
-                <a:cs typeface="Calibri" pitchFamily="34" charset="-120"/>
-              </a:rPr>
-              <a:t>XGBoost</a:t>
-            </a:r>
-            <a:endParaRPr lang="en-US" sz="950" dirty="0"/>
-          </a:p>
-        </p:txBody>
-      </p:sp>
-      <p:sp>
-        <p:nvSpPr>
-          <p:cNvPr id="14" name="Shape 12"/>
-          <p:cNvSpPr/>
-          <p:nvPr/>
-        </p:nvSpPr>
-        <p:spPr>
-          <a:xfrm>
-            <a:off x="4663440" y="1810512"/>
-            <a:ext cx="4069080" cy="283464"/>
-          </a:xfrm>
-          <a:prstGeom prst="rect">
-            <a:avLst/>
-          </a:prstGeom>
-          <a:solidFill>
-            <a:srgbClr val="FFFFFF"/>
-          </a:solidFill>
-          <a:ln w="6350">
-            <a:solidFill>
-              <a:srgbClr val="CBD5E1"/>
-            </a:solidFill>
-            <a:prstDash val="solid"/>
-          </a:ln>
-        </p:spPr>
-        <p:txBody>
-          <a:bodyPr/>
-          <a:lstStyle/>
-          <a:p>
-            <a:endParaRPr lang="it-IT"/>
-          </a:p>
-        </p:txBody>
-      </p:sp>
-      <p:sp>
-        <p:nvSpPr>
-          <p:cNvPr id="15" name="Text 13"/>
-          <p:cNvSpPr/>
-          <p:nvPr/>
-        </p:nvSpPr>
-        <p:spPr>
-          <a:xfrm>
-            <a:off x="4736592" y="1856232"/>
-            <a:ext cx="1463040" cy="201168"/>
-          </a:xfrm>
-          <a:prstGeom prst="rect">
-            <a:avLst/>
-          </a:prstGeom>
-          <a:noFill/>
-          <a:ln/>
-        </p:spPr>
-        <p:txBody>
-          <a:bodyPr wrap="square" lIns="0" tIns="0" rIns="0" bIns="0" rtlCol="0" anchor="ctr"/>
-          <a:lstStyle/>
-          <a:p>
-            <a:pPr marL="0" indent="0">
-              <a:buNone/>
-            </a:pPr>
-            <a:r>
-              <a:rPr lang="en-US" sz="950" b="1" dirty="0">
-                <a:solidFill>
-                  <a:srgbClr val="1C2B4A"/>
-                </a:solidFill>
-                <a:latin typeface="Calibri" pitchFamily="34" charset="0"/>
-                <a:ea typeface="Calibri" pitchFamily="34" charset="-122"/>
-                <a:cs typeface="Calibri" pitchFamily="34" charset="-120"/>
-              </a:rPr>
-              <a:t>CV strategy</a:t>
-            </a:r>
-            <a:endParaRPr lang="en-US" sz="950" dirty="0"/>
-          </a:p>
-        </p:txBody>
-      </p:sp>
-      <p:sp>
-        <p:nvSpPr>
-          <p:cNvPr id="16" name="Text 14"/>
-          <p:cNvSpPr/>
-          <p:nvPr/>
-        </p:nvSpPr>
-        <p:spPr>
-          <a:xfrm>
-            <a:off x="5824025" y="1869948"/>
-            <a:ext cx="2817055" cy="187452"/>
-          </a:xfrm>
-          <a:prstGeom prst="rect">
-            <a:avLst/>
-          </a:prstGeom>
-          <a:noFill/>
-          <a:ln/>
-        </p:spPr>
-        <p:txBody>
-          <a:bodyPr wrap="square" lIns="0" tIns="0" rIns="0" bIns="0" rtlCol="0" anchor="ctr"/>
-          <a:lstStyle/>
-          <a:p>
-            <a:pPr marL="0" indent="0">
-              <a:buNone/>
-            </a:pPr>
-            <a:r>
-              <a:rPr lang="en-US" sz="950" i="1" dirty="0">
-                <a:solidFill>
-                  <a:srgbClr val="4A6587"/>
-                </a:solidFill>
-                <a:latin typeface="Calibri" pitchFamily="34" charset="0"/>
-                <a:ea typeface="Calibri" pitchFamily="34" charset="-122"/>
-                <a:cs typeface="Calibri" pitchFamily="34" charset="-120"/>
-              </a:rPr>
-              <a:t>5x3 Nested Cross-Validation (5 Outer Folds, 3 Inner Folds)</a:t>
-            </a:r>
-            <a:endParaRPr lang="en-US" sz="950" dirty="0"/>
-          </a:p>
-        </p:txBody>
-      </p:sp>
-      <p:sp>
-        <p:nvSpPr>
-          <p:cNvPr id="17" name="Shape 15"/>
-          <p:cNvSpPr/>
-          <p:nvPr/>
-        </p:nvSpPr>
-        <p:spPr>
-          <a:xfrm>
-            <a:off x="4663440" y="2112264"/>
-            <a:ext cx="4069080" cy="283464"/>
-          </a:xfrm>
-          <a:prstGeom prst="rect">
-            <a:avLst/>
-          </a:prstGeom>
-          <a:solidFill>
-            <a:srgbClr val="F8FAFC"/>
-          </a:solidFill>
-          <a:ln w="6350">
-            <a:solidFill>
-              <a:srgbClr val="CBD5E1"/>
-            </a:solidFill>
-            <a:prstDash val="solid"/>
-          </a:ln>
-        </p:spPr>
-        <p:txBody>
-          <a:bodyPr/>
-          <a:lstStyle/>
-          <a:p>
-            <a:endParaRPr lang="it-IT"/>
-          </a:p>
-        </p:txBody>
-      </p:sp>
-      <p:sp>
-        <p:nvSpPr>
-          <p:cNvPr id="18" name="Text 16"/>
-          <p:cNvSpPr/>
-          <p:nvPr/>
-        </p:nvSpPr>
-        <p:spPr>
-          <a:xfrm>
-            <a:off x="4736592" y="2157984"/>
-            <a:ext cx="1463040" cy="201168"/>
-          </a:xfrm>
-          <a:prstGeom prst="rect">
-            <a:avLst/>
-          </a:prstGeom>
-          <a:noFill/>
-          <a:ln/>
-        </p:spPr>
-        <p:txBody>
-          <a:bodyPr wrap="square" lIns="0" tIns="0" rIns="0" bIns="0" rtlCol="0" anchor="ctr"/>
-          <a:lstStyle/>
-          <a:p>
-            <a:pPr marL="0" indent="0">
-              <a:buNone/>
-            </a:pPr>
-            <a:r>
-              <a:rPr lang="en-US" sz="950" b="1" dirty="0">
-                <a:solidFill>
-                  <a:srgbClr val="1C2B4A"/>
-                </a:solidFill>
-                <a:latin typeface="Calibri" pitchFamily="34" charset="0"/>
-                <a:ea typeface="Calibri" pitchFamily="34" charset="-122"/>
-                <a:cs typeface="Calibri" pitchFamily="34" charset="-120"/>
-              </a:rPr>
-              <a:t>Selection criterion</a:t>
-            </a:r>
-            <a:endParaRPr lang="en-US" sz="950" dirty="0"/>
-          </a:p>
-        </p:txBody>
-      </p:sp>
-      <p:sp>
-        <p:nvSpPr>
-          <p:cNvPr id="19" name="Text 17"/>
-          <p:cNvSpPr/>
-          <p:nvPr/>
-        </p:nvSpPr>
-        <p:spPr>
-          <a:xfrm>
-            <a:off x="6263640" y="2157984"/>
-            <a:ext cx="2377440" cy="201168"/>
-          </a:xfrm>
-          <a:prstGeom prst="rect">
-            <a:avLst/>
-          </a:prstGeom>
-          <a:noFill/>
-          <a:ln/>
-        </p:spPr>
-        <p:txBody>
-          <a:bodyPr wrap="square" lIns="0" tIns="0" rIns="0" bIns="0" rtlCol="0" anchor="ctr"/>
-          <a:lstStyle/>
-          <a:p>
-            <a:pPr marL="0" indent="0">
-              <a:buNone/>
-            </a:pPr>
-            <a:r>
-              <a:rPr lang="en-US" sz="950" i="1" dirty="0">
-                <a:solidFill>
-                  <a:srgbClr val="4A6587"/>
-                </a:solidFill>
-                <a:latin typeface="Calibri" pitchFamily="34" charset="0"/>
-                <a:ea typeface="Calibri" pitchFamily="34" charset="-122"/>
-                <a:cs typeface="Calibri" pitchFamily="34" charset="-120"/>
-              </a:rPr>
-              <a:t>Quadratic Weighted Kappa (QWK)</a:t>
-            </a:r>
-            <a:endParaRPr lang="en-US" sz="950" dirty="0"/>
-          </a:p>
-        </p:txBody>
-      </p:sp>
-      <p:sp>
-        <p:nvSpPr>
-          <p:cNvPr id="20" name="Shape 18"/>
-          <p:cNvSpPr/>
-          <p:nvPr/>
-        </p:nvSpPr>
-        <p:spPr>
-          <a:xfrm>
-            <a:off x="4663440" y="2414016"/>
-            <a:ext cx="4069080" cy="283464"/>
-          </a:xfrm>
-          <a:prstGeom prst="rect">
-            <a:avLst/>
-          </a:prstGeom>
-          <a:solidFill>
-            <a:srgbClr val="FFFFFF"/>
-          </a:solidFill>
-          <a:ln w="6350">
-            <a:solidFill>
-              <a:srgbClr val="CBD5E1"/>
-            </a:solidFill>
-            <a:prstDash val="solid"/>
-          </a:ln>
-        </p:spPr>
-        <p:txBody>
-          <a:bodyPr/>
-          <a:lstStyle/>
-          <a:p>
-            <a:endParaRPr lang="it-IT"/>
-          </a:p>
-        </p:txBody>
-      </p:sp>
-      <p:sp>
-        <p:nvSpPr>
-          <p:cNvPr id="21" name="Text 19"/>
-          <p:cNvSpPr/>
-          <p:nvPr/>
-        </p:nvSpPr>
-        <p:spPr>
-          <a:xfrm>
-            <a:off x="4736592" y="2459736"/>
-            <a:ext cx="1463040" cy="201168"/>
-          </a:xfrm>
-          <a:prstGeom prst="rect">
-            <a:avLst/>
-          </a:prstGeom>
-          <a:noFill/>
-          <a:ln/>
-        </p:spPr>
-        <p:txBody>
-          <a:bodyPr wrap="square" lIns="0" tIns="0" rIns="0" bIns="0" rtlCol="0" anchor="ctr"/>
-          <a:lstStyle/>
-          <a:p>
-            <a:pPr marL="0" indent="0">
-              <a:buNone/>
-            </a:pPr>
-            <a:r>
-              <a:rPr lang="en-US" sz="950" b="1" dirty="0">
-                <a:solidFill>
-                  <a:srgbClr val="1C2B4A"/>
-                </a:solidFill>
-                <a:latin typeface="Calibri" pitchFamily="34" charset="0"/>
-                <a:ea typeface="Calibri" pitchFamily="34" charset="-122"/>
-                <a:cs typeface="Calibri" pitchFamily="34" charset="-120"/>
-              </a:rPr>
-              <a:t>Chosen model</a:t>
-            </a:r>
-            <a:endParaRPr lang="en-US" sz="950" dirty="0"/>
-          </a:p>
-        </p:txBody>
-      </p:sp>
-      <p:sp>
-        <p:nvSpPr>
-          <p:cNvPr id="22" name="Text 20"/>
-          <p:cNvSpPr/>
-          <p:nvPr/>
-        </p:nvSpPr>
-        <p:spPr>
-          <a:xfrm>
-            <a:off x="5641145" y="2459736"/>
-            <a:ext cx="2999935" cy="201168"/>
-          </a:xfrm>
-          <a:prstGeom prst="rect">
-            <a:avLst/>
-          </a:prstGeom>
-          <a:noFill/>
-          <a:ln/>
-        </p:spPr>
-        <p:txBody>
-          <a:bodyPr wrap="square" lIns="0" tIns="0" rIns="0" bIns="0" rtlCol="0" anchor="ctr"/>
-          <a:lstStyle/>
-          <a:p>
-            <a:pPr marL="0" indent="0">
-              <a:buNone/>
-            </a:pPr>
-            <a:r>
-              <a:rPr lang="en-US" sz="950" i="1" dirty="0" err="1">
-                <a:solidFill>
-                  <a:srgbClr val="4A6587"/>
-                </a:solidFill>
-                <a:latin typeface="Calibri" pitchFamily="34" charset="0"/>
-                <a:ea typeface="Calibri" pitchFamily="34" charset="-122"/>
-                <a:cs typeface="Calibri" pitchFamily="34" charset="-120"/>
-              </a:rPr>
-              <a:t>XGBoost</a:t>
-            </a:r>
-            <a:r>
-              <a:rPr lang="en-US" sz="950" i="1" dirty="0">
-                <a:solidFill>
-                  <a:srgbClr val="4A6587"/>
-                </a:solidFill>
-                <a:latin typeface="Calibri" pitchFamily="34" charset="0"/>
-                <a:ea typeface="Calibri" pitchFamily="34" charset="-122"/>
-                <a:cs typeface="Calibri" pitchFamily="34" charset="-120"/>
-              </a:rPr>
-              <a:t>, as it achieved an optimal QWK of ~0.817 and demonstrated tight variance with high median performance</a:t>
-            </a:r>
-            <a:endParaRPr lang="en-US" sz="950" dirty="0"/>
-          </a:p>
-        </p:txBody>
-      </p:sp>
-      <p:sp>
-        <p:nvSpPr>
-          <p:cNvPr id="23" name="Shape 21"/>
-          <p:cNvSpPr/>
-          <p:nvPr/>
-        </p:nvSpPr>
-        <p:spPr>
-          <a:xfrm>
-            <a:off x="4663440" y="2715768"/>
-            <a:ext cx="4069080" cy="283464"/>
-          </a:xfrm>
-          <a:prstGeom prst="rect">
-            <a:avLst/>
-          </a:prstGeom>
-          <a:solidFill>
-            <a:srgbClr val="F8FAFC"/>
-          </a:solidFill>
-          <a:ln w="6350">
-            <a:solidFill>
-              <a:srgbClr val="CBD5E1"/>
-            </a:solidFill>
-            <a:prstDash val="solid"/>
-          </a:ln>
-        </p:spPr>
-        <p:txBody>
-          <a:bodyPr/>
-          <a:lstStyle/>
-          <a:p>
-            <a:endParaRPr lang="it-IT"/>
-          </a:p>
-        </p:txBody>
-      </p:sp>
-      <p:sp>
-        <p:nvSpPr>
-          <p:cNvPr id="24" name="Text 22"/>
-          <p:cNvSpPr/>
-          <p:nvPr/>
-        </p:nvSpPr>
-        <p:spPr>
-          <a:xfrm>
-            <a:off x="4736592" y="2761488"/>
-            <a:ext cx="1463040" cy="201168"/>
-          </a:xfrm>
-          <a:prstGeom prst="rect">
-            <a:avLst/>
-          </a:prstGeom>
-          <a:noFill/>
-          <a:ln/>
-        </p:spPr>
-        <p:txBody>
-          <a:bodyPr wrap="square" lIns="0" tIns="0" rIns="0" bIns="0" rtlCol="0" anchor="ctr"/>
-          <a:lstStyle/>
-          <a:p>
-            <a:pPr marL="0" indent="0">
-              <a:buNone/>
-            </a:pPr>
-            <a:r>
-              <a:rPr lang="en-US" sz="950" b="1" dirty="0">
-                <a:solidFill>
-                  <a:srgbClr val="1C2B4A"/>
-                </a:solidFill>
-                <a:latin typeface="Calibri" pitchFamily="34" charset="0"/>
-                <a:ea typeface="Calibri" pitchFamily="34" charset="-122"/>
-                <a:cs typeface="Calibri" pitchFamily="34" charset="-120"/>
-              </a:rPr>
-              <a:t>Search strategy</a:t>
-            </a:r>
-            <a:endParaRPr lang="en-US" sz="950" dirty="0"/>
-          </a:p>
-        </p:txBody>
-      </p:sp>
-      <p:sp>
-        <p:nvSpPr>
-          <p:cNvPr id="25" name="Text 23"/>
-          <p:cNvSpPr/>
-          <p:nvPr/>
-        </p:nvSpPr>
-        <p:spPr>
-          <a:xfrm>
-            <a:off x="5824025" y="2729836"/>
-            <a:ext cx="2817055" cy="246888"/>
-          </a:xfrm>
-          <a:prstGeom prst="rect">
-            <a:avLst/>
-          </a:prstGeom>
-          <a:noFill/>
-          <a:ln/>
-        </p:spPr>
-        <p:txBody>
-          <a:bodyPr wrap="square" lIns="0" tIns="0" rIns="0" bIns="0" rtlCol="0" anchor="ctr"/>
-          <a:lstStyle/>
-          <a:p>
-            <a:pPr marL="0" indent="0">
-              <a:buNone/>
-            </a:pPr>
-            <a:r>
-              <a:rPr lang="en-US" sz="950" i="1" dirty="0">
-                <a:solidFill>
-                  <a:srgbClr val="4A6587"/>
-                </a:solidFill>
-                <a:latin typeface="Calibri" pitchFamily="34" charset="0"/>
-                <a:ea typeface="Calibri" pitchFamily="34" charset="-122"/>
-                <a:cs typeface="Calibri" pitchFamily="34" charset="-120"/>
-              </a:rPr>
-              <a:t>Bayesian Optimization via </a:t>
-            </a:r>
-            <a:r>
-              <a:rPr lang="en-US" sz="950" i="1" dirty="0" err="1">
-                <a:solidFill>
-                  <a:srgbClr val="4A6587"/>
-                </a:solidFill>
-                <a:latin typeface="Calibri" pitchFamily="34" charset="0"/>
-                <a:ea typeface="Calibri" pitchFamily="34" charset="-122"/>
-                <a:cs typeface="Calibri" pitchFamily="34" charset="-120"/>
-              </a:rPr>
-              <a:t>Optuna</a:t>
-            </a:r>
-            <a:r>
-              <a:rPr lang="en-US" sz="950" i="1" dirty="0">
-                <a:solidFill>
-                  <a:srgbClr val="4A6587"/>
-                </a:solidFill>
-                <a:latin typeface="Calibri" pitchFamily="34" charset="0"/>
-                <a:ea typeface="Calibri" pitchFamily="34" charset="-122"/>
-                <a:cs typeface="Calibri" pitchFamily="34" charset="-120"/>
-              </a:rPr>
-              <a:t> coupled with a Cached Unified Grid Search</a:t>
-            </a:r>
-            <a:endParaRPr lang="en-US" sz="950" dirty="0"/>
-          </a:p>
-        </p:txBody>
-      </p:sp>
-      <p:sp>
-        <p:nvSpPr>
-          <p:cNvPr id="26" name="Shape 24"/>
-          <p:cNvSpPr/>
-          <p:nvPr/>
-        </p:nvSpPr>
-        <p:spPr>
-          <a:xfrm>
-            <a:off x="4663440" y="3017520"/>
-            <a:ext cx="4069080" cy="283464"/>
-          </a:xfrm>
-          <a:prstGeom prst="rect">
-            <a:avLst/>
-          </a:prstGeom>
-          <a:solidFill>
-            <a:srgbClr val="FFFFFF"/>
-          </a:solidFill>
-          <a:ln w="6350">
-            <a:solidFill>
-              <a:srgbClr val="CBD5E1"/>
-            </a:solidFill>
-            <a:prstDash val="solid"/>
-          </a:ln>
-        </p:spPr>
-        <p:txBody>
-          <a:bodyPr/>
-          <a:lstStyle/>
-          <a:p>
-            <a:endParaRPr lang="it-IT"/>
-          </a:p>
-        </p:txBody>
-      </p:sp>
-      <p:sp>
-        <p:nvSpPr>
-          <p:cNvPr id="27" name="Text 25"/>
-          <p:cNvSpPr/>
-          <p:nvPr/>
-        </p:nvSpPr>
-        <p:spPr>
-          <a:xfrm>
-            <a:off x="4736592" y="3063240"/>
-            <a:ext cx="1463040" cy="201168"/>
-          </a:xfrm>
-          <a:prstGeom prst="rect">
-            <a:avLst/>
-          </a:prstGeom>
-          <a:noFill/>
-          <a:ln/>
-        </p:spPr>
-        <p:txBody>
-          <a:bodyPr wrap="square" lIns="0" tIns="0" rIns="0" bIns="0" rtlCol="0" anchor="ctr"/>
-          <a:lstStyle/>
-          <a:p>
-            <a:pPr marL="0" indent="0">
-              <a:buNone/>
-            </a:pPr>
-            <a:r>
-              <a:rPr lang="en-US" sz="950" b="1" dirty="0">
-                <a:solidFill>
-                  <a:srgbClr val="1C2B4A"/>
-                </a:solidFill>
-                <a:latin typeface="Calibri" pitchFamily="34" charset="0"/>
-                <a:ea typeface="Calibri" pitchFamily="34" charset="-122"/>
-                <a:cs typeface="Calibri" pitchFamily="34" charset="-120"/>
-              </a:rPr>
-              <a:t>Search space</a:t>
-            </a:r>
-            <a:endParaRPr lang="en-US" sz="950" dirty="0"/>
-          </a:p>
-        </p:txBody>
-      </p:sp>
-      <p:sp>
-        <p:nvSpPr>
-          <p:cNvPr id="28" name="Text 26"/>
-          <p:cNvSpPr/>
-          <p:nvPr/>
-        </p:nvSpPr>
-        <p:spPr>
-          <a:xfrm>
-            <a:off x="5739618" y="3063240"/>
-            <a:ext cx="2901462" cy="201168"/>
-          </a:xfrm>
-          <a:prstGeom prst="rect">
-            <a:avLst/>
-          </a:prstGeom>
-          <a:noFill/>
-          <a:ln/>
-        </p:spPr>
-        <p:txBody>
-          <a:bodyPr wrap="square" lIns="0" tIns="0" rIns="0" bIns="0" rtlCol="0" anchor="ctr"/>
-          <a:lstStyle/>
-          <a:p>
-            <a:pPr marL="0" indent="0">
-              <a:buNone/>
-            </a:pPr>
-            <a:r>
-              <a:rPr lang="en-US" sz="950" i="1" dirty="0">
-                <a:solidFill>
-                  <a:srgbClr val="4A6587"/>
-                </a:solidFill>
-                <a:latin typeface="Calibri" pitchFamily="34" charset="0"/>
-                <a:ea typeface="Calibri" pitchFamily="34" charset="-122"/>
-                <a:cs typeface="Calibri" pitchFamily="34" charset="-120"/>
-              </a:rPr>
-              <a:t>Tree ensemble architecture (</a:t>
-            </a:r>
-            <a:r>
-              <a:rPr lang="en-US" sz="950" i="1" dirty="0" err="1">
-                <a:solidFill>
-                  <a:srgbClr val="4A6587"/>
-                </a:solidFill>
-                <a:latin typeface="Calibri" pitchFamily="34" charset="0"/>
-                <a:ea typeface="Calibri" pitchFamily="34" charset="-122"/>
-                <a:cs typeface="Calibri" pitchFamily="34" charset="-120"/>
-              </a:rPr>
-              <a:t>n_estimators</a:t>
-            </a:r>
-            <a:r>
-              <a:rPr lang="en-US" sz="950" i="1" dirty="0">
-                <a:solidFill>
-                  <a:srgbClr val="4A6587"/>
-                </a:solidFill>
-                <a:latin typeface="Calibri" pitchFamily="34" charset="0"/>
-                <a:ea typeface="Calibri" pitchFamily="34" charset="-122"/>
-                <a:cs typeface="Calibri" pitchFamily="34" charset="-120"/>
-              </a:rPr>
-              <a:t>, </a:t>
-            </a:r>
-            <a:r>
-              <a:rPr lang="en-US" sz="950" i="1" dirty="0" err="1">
-                <a:solidFill>
-                  <a:srgbClr val="4A6587"/>
-                </a:solidFill>
-                <a:latin typeface="Calibri" pitchFamily="34" charset="0"/>
-                <a:ea typeface="Calibri" pitchFamily="34" charset="-122"/>
-                <a:cs typeface="Calibri" pitchFamily="34" charset="-120"/>
-              </a:rPr>
-              <a:t>max_depth</a:t>
-            </a:r>
-            <a:r>
-              <a:rPr lang="en-US" sz="950" i="1" dirty="0">
-                <a:solidFill>
-                  <a:srgbClr val="4A6587"/>
-                </a:solidFill>
-                <a:latin typeface="Calibri" pitchFamily="34" charset="0"/>
-                <a:ea typeface="Calibri" pitchFamily="34" charset="-122"/>
-                <a:cs typeface="Calibri" pitchFamily="34" charset="-120"/>
-              </a:rPr>
-              <a:t>), learning dynamics, and regularization bounds</a:t>
-            </a:r>
-            <a:endParaRPr lang="en-US" sz="950" dirty="0"/>
-          </a:p>
-        </p:txBody>
-      </p:sp>
-      <p:sp>
-        <p:nvSpPr>
-          <p:cNvPr id="29" name="Shape 27"/>
-          <p:cNvSpPr/>
-          <p:nvPr/>
-        </p:nvSpPr>
-        <p:spPr>
-          <a:xfrm>
-            <a:off x="4663440" y="3319272"/>
-            <a:ext cx="4069080" cy="443484"/>
-          </a:xfrm>
-          <a:prstGeom prst="rect">
-            <a:avLst/>
-          </a:prstGeom>
-          <a:solidFill>
-            <a:srgbClr val="F8FAFC"/>
-          </a:solidFill>
-          <a:ln w="6350">
-            <a:solidFill>
-              <a:srgbClr val="CBD5E1"/>
-            </a:solidFill>
-            <a:prstDash val="solid"/>
-          </a:ln>
-        </p:spPr>
-        <p:txBody>
-          <a:bodyPr/>
-          <a:lstStyle/>
-          <a:p>
-            <a:endParaRPr lang="it-IT"/>
-          </a:p>
-        </p:txBody>
-      </p:sp>
-      <p:sp>
-        <p:nvSpPr>
-          <p:cNvPr id="30" name="Text 28"/>
-          <p:cNvSpPr/>
-          <p:nvPr/>
-        </p:nvSpPr>
-        <p:spPr>
-          <a:xfrm>
-            <a:off x="4736592" y="3364992"/>
-            <a:ext cx="1463040" cy="201168"/>
-          </a:xfrm>
-          <a:prstGeom prst="rect">
-            <a:avLst/>
-          </a:prstGeom>
-          <a:noFill/>
-          <a:ln/>
-        </p:spPr>
-        <p:txBody>
-          <a:bodyPr wrap="square" lIns="0" tIns="0" rIns="0" bIns="0" rtlCol="0" anchor="ctr"/>
-          <a:lstStyle/>
-          <a:p>
-            <a:pPr marL="0" indent="0">
-              <a:buNone/>
-            </a:pPr>
-            <a:r>
-              <a:rPr lang="en-US" sz="950" b="1" dirty="0">
-                <a:solidFill>
-                  <a:srgbClr val="1C2B4A"/>
-                </a:solidFill>
-                <a:latin typeface="Calibri" pitchFamily="34" charset="0"/>
-                <a:ea typeface="Calibri" pitchFamily="34" charset="-122"/>
-                <a:cs typeface="Calibri" pitchFamily="34" charset="-120"/>
-              </a:rPr>
-              <a:t>Best config</a:t>
-            </a:r>
-            <a:endParaRPr lang="en-US" sz="950" dirty="0"/>
-          </a:p>
-        </p:txBody>
-      </p:sp>
-      <p:sp>
-        <p:nvSpPr>
-          <p:cNvPr id="31" name="Text 29"/>
-          <p:cNvSpPr/>
-          <p:nvPr/>
-        </p:nvSpPr>
-        <p:spPr>
-          <a:xfrm>
-            <a:off x="5641145" y="3436561"/>
-            <a:ext cx="2999935" cy="201168"/>
-          </a:xfrm>
-          <a:prstGeom prst="rect">
-            <a:avLst/>
-          </a:prstGeom>
-          <a:noFill/>
-          <a:ln/>
-        </p:spPr>
-        <p:txBody>
-          <a:bodyPr wrap="square" lIns="0" tIns="0" rIns="0" bIns="0" rtlCol="0" anchor="ctr"/>
-          <a:lstStyle/>
-          <a:p>
-            <a:pPr marL="0" indent="0">
-              <a:buNone/>
-            </a:pPr>
-            <a:r>
-              <a:rPr lang="en-US" sz="950" i="1" dirty="0" err="1">
-                <a:solidFill>
-                  <a:srgbClr val="4A6587"/>
-                </a:solidFill>
-                <a:latin typeface="Calibri" pitchFamily="34" charset="0"/>
-                <a:ea typeface="Calibri" pitchFamily="34" charset="-122"/>
-                <a:cs typeface="Calibri" pitchFamily="34" charset="-120"/>
-              </a:rPr>
-              <a:t>n_estimators</a:t>
-            </a:r>
-            <a:r>
-              <a:rPr lang="en-US" sz="950" i="1" dirty="0">
-                <a:solidFill>
-                  <a:srgbClr val="4A6587"/>
-                </a:solidFill>
-                <a:latin typeface="Calibri" pitchFamily="34" charset="0"/>
-                <a:ea typeface="Calibri" pitchFamily="34" charset="-122"/>
-                <a:cs typeface="Calibri" pitchFamily="34" charset="-120"/>
-              </a:rPr>
-              <a:t>=397, </a:t>
-            </a:r>
-            <a:r>
-              <a:rPr lang="en-US" sz="950" i="1" dirty="0" err="1">
-                <a:solidFill>
-                  <a:srgbClr val="4A6587"/>
-                </a:solidFill>
-                <a:latin typeface="Calibri" pitchFamily="34" charset="0"/>
-                <a:ea typeface="Calibri" pitchFamily="34" charset="-122"/>
-                <a:cs typeface="Calibri" pitchFamily="34" charset="-120"/>
-              </a:rPr>
-              <a:t>max_depth</a:t>
-            </a:r>
-            <a:r>
-              <a:rPr lang="en-US" sz="950" i="1" dirty="0">
-                <a:solidFill>
-                  <a:srgbClr val="4A6587"/>
-                </a:solidFill>
-                <a:latin typeface="Calibri" pitchFamily="34" charset="0"/>
-                <a:ea typeface="Calibri" pitchFamily="34" charset="-122"/>
-                <a:cs typeface="Calibri" pitchFamily="34" charset="-120"/>
-              </a:rPr>
-              <a:t>=5, learning_rate≈0.107, </a:t>
-            </a:r>
-            <a:r>
-              <a:rPr lang="en-US" sz="950" i="1" dirty="0" err="1">
-                <a:solidFill>
-                  <a:srgbClr val="4A6587"/>
-                </a:solidFill>
-                <a:latin typeface="Calibri" pitchFamily="34" charset="0"/>
-                <a:ea typeface="Calibri" pitchFamily="34" charset="-122"/>
-                <a:cs typeface="Calibri" pitchFamily="34" charset="-120"/>
-              </a:rPr>
-              <a:t>min_child_weight</a:t>
-            </a:r>
-            <a:r>
-              <a:rPr lang="en-US" sz="950" i="1" dirty="0">
-                <a:solidFill>
-                  <a:srgbClr val="4A6587"/>
-                </a:solidFill>
-                <a:latin typeface="Calibri" pitchFamily="34" charset="0"/>
-                <a:ea typeface="Calibri" pitchFamily="34" charset="-122"/>
-                <a:cs typeface="Calibri" pitchFamily="34" charset="-120"/>
-              </a:rPr>
-              <a:t>=5, subsample≈0.965, reg_lambda≈0.825</a:t>
-            </a:r>
-            <a:endParaRPr lang="en-US" sz="950" dirty="0"/>
-          </a:p>
-        </p:txBody>
-      </p:sp>
-      <p:sp>
-        <p:nvSpPr>
-          <p:cNvPr id="32" name="Shape 30"/>
-          <p:cNvSpPr/>
-          <p:nvPr/>
-        </p:nvSpPr>
-        <p:spPr>
-          <a:xfrm>
-            <a:off x="4663440" y="3781044"/>
-            <a:ext cx="4069080" cy="539496"/>
-          </a:xfrm>
-          <a:prstGeom prst="rect">
-            <a:avLst/>
-          </a:prstGeom>
-          <a:solidFill>
-            <a:srgbClr val="FFFFFF"/>
-          </a:solidFill>
-          <a:ln w="6350">
-            <a:solidFill>
-              <a:srgbClr val="CBD5E1"/>
-            </a:solidFill>
-            <a:prstDash val="solid"/>
-          </a:ln>
-        </p:spPr>
-        <p:txBody>
-          <a:bodyPr/>
-          <a:lstStyle/>
-          <a:p>
-            <a:endParaRPr lang="it-IT"/>
-          </a:p>
-        </p:txBody>
-      </p:sp>
-      <p:sp>
-        <p:nvSpPr>
-          <p:cNvPr id="33" name="Text 31"/>
-          <p:cNvSpPr/>
-          <p:nvPr/>
-        </p:nvSpPr>
-        <p:spPr>
-          <a:xfrm>
-            <a:off x="4736592" y="3812696"/>
-            <a:ext cx="1463040" cy="201168"/>
-          </a:xfrm>
-          <a:prstGeom prst="rect">
-            <a:avLst/>
-          </a:prstGeom>
-          <a:noFill/>
-          <a:ln/>
-        </p:spPr>
-        <p:txBody>
-          <a:bodyPr wrap="square" lIns="0" tIns="0" rIns="0" bIns="0" rtlCol="0" anchor="ctr"/>
-          <a:lstStyle/>
-          <a:p>
-            <a:pPr marL="0" indent="0">
-              <a:buNone/>
-            </a:pPr>
-            <a:r>
-              <a:rPr lang="en-US" sz="950" b="1" dirty="0">
-                <a:solidFill>
-                  <a:srgbClr val="1C2B4A"/>
-                </a:solidFill>
-                <a:latin typeface="Calibri" pitchFamily="34" charset="0"/>
-                <a:ea typeface="Calibri" pitchFamily="34" charset="-122"/>
-                <a:cs typeface="Calibri" pitchFamily="34" charset="-120"/>
-              </a:rPr>
-              <a:t>Statistical test</a:t>
-            </a:r>
-            <a:endParaRPr lang="en-US" sz="950" dirty="0"/>
-          </a:p>
-        </p:txBody>
-      </p:sp>
-      <p:sp>
-        <p:nvSpPr>
-          <p:cNvPr id="34" name="Text 32"/>
-          <p:cNvSpPr/>
-          <p:nvPr/>
-        </p:nvSpPr>
-        <p:spPr>
-          <a:xfrm>
-            <a:off x="5690381" y="3968496"/>
-            <a:ext cx="2999935" cy="201168"/>
-          </a:xfrm>
-          <a:prstGeom prst="rect">
-            <a:avLst/>
-          </a:prstGeom>
-          <a:noFill/>
-          <a:ln/>
-        </p:spPr>
-        <p:txBody>
-          <a:bodyPr wrap="square" lIns="0" tIns="0" rIns="0" bIns="0" rtlCol="0" anchor="ctr"/>
-          <a:lstStyle/>
-          <a:p>
-            <a:pPr marL="0" indent="0">
-              <a:buNone/>
-            </a:pPr>
-            <a:r>
-              <a:rPr lang="en-US" sz="950" i="1" dirty="0">
-                <a:solidFill>
-                  <a:srgbClr val="4A6587"/>
-                </a:solidFill>
-                <a:latin typeface="Calibri" pitchFamily="34" charset="0"/>
-                <a:ea typeface="Calibri" pitchFamily="34" charset="-122"/>
-                <a:cs typeface="Calibri" pitchFamily="34" charset="-120"/>
-              </a:rPr>
-              <a:t>Friedman Test for global significance, followed by Wilcoxon Signed-Rank Test. Due to N=5 folds, absolute dominance yielded a minimum achievable p-value of 0.0625.</a:t>
-            </a:r>
-            <a:endParaRPr lang="en-US" sz="950" dirty="0"/>
           </a:p>
         </p:txBody>
       </p:sp>
@@ -12661,7 +11469,7 @@
         </p:blipFill>
         <p:spPr>
           <a:xfrm>
-            <a:off x="411480" y="1946617"/>
+            <a:off x="320040" y="1948771"/>
             <a:ext cx="4011024" cy="1968953"/>
           </a:xfrm>
           <a:prstGeom prst="rect">
@@ -12669,6 +11477,898 @@
           </a:prstGeom>
         </p:spPr>
       </p:pic>
+      <p:graphicFrame>
+        <p:nvGraphicFramePr>
+          <p:cNvPr id="8" name="Tabela 7">
+            <a:extLst>
+              <a:ext uri="{FF2B5EF4-FFF2-40B4-BE49-F238E27FC236}">
+                <a16:creationId xmlns:a16="http://schemas.microsoft.com/office/drawing/2014/main" id="{20EE45CE-E978-9A55-4267-0DB31581D403}"/>
+              </a:ext>
+            </a:extLst>
+          </p:cNvPr>
+          <p:cNvGraphicFramePr>
+            <a:graphicFrameLocks noGrp="1"/>
+          </p:cNvGraphicFramePr>
+          <p:nvPr>
+            <p:extLst>
+              <p:ext uri="{D42A27DB-BD31-4B8C-83A1-F6EECF244321}">
+                <p14:modId xmlns:p14="http://schemas.microsoft.com/office/powerpoint/2010/main" val="513684590"/>
+              </p:ext>
+            </p:extLst>
+          </p:nvPr>
+        </p:nvGraphicFramePr>
+        <p:xfrm>
+          <a:off x="4331064" y="1062538"/>
+          <a:ext cx="4401456" cy="3642360"/>
+        </p:xfrm>
+        <a:graphic>
+          <a:graphicData uri="http://schemas.openxmlformats.org/drawingml/2006/table">
+            <a:tbl>
+              <a:tblPr firstRow="1" bandRow="1">
+                <a:tableStyleId>{5C22544A-7EE6-4342-B048-85BDC9FD1C3A}</a:tableStyleId>
+              </a:tblPr>
+              <a:tblGrid>
+                <a:gridCol w="1135642">
+                  <a:extLst>
+                    <a:ext uri="{9D8B030D-6E8A-4147-A177-3AD203B41FA5}">
+                      <a16:colId xmlns:a16="http://schemas.microsoft.com/office/drawing/2014/main" val="1117595681"/>
+                    </a:ext>
+                  </a:extLst>
+                </a:gridCol>
+                <a:gridCol w="3265814">
+                  <a:extLst>
+                    <a:ext uri="{9D8B030D-6E8A-4147-A177-3AD203B41FA5}">
+                      <a16:colId xmlns:a16="http://schemas.microsoft.com/office/drawing/2014/main" val="663168137"/>
+                    </a:ext>
+                  </a:extLst>
+                </a:gridCol>
+              </a:tblGrid>
+              <a:tr h="370840">
+                <a:tc gridSpan="2">
+                  <a:txBody>
+                    <a:bodyPr/>
+                    <a:lstStyle/>
+                    <a:p>
+                      <a:r>
+                        <a:rPr lang="pt-BR" sz="1200" dirty="0"/>
+                        <a:t>Key </a:t>
+                      </a:r>
+                      <a:r>
+                        <a:rPr lang="pt-BR" sz="1200" dirty="0" err="1"/>
+                        <a:t>Decisions</a:t>
+                      </a:r>
+                      <a:endParaRPr lang="pt-BR" sz="1200" dirty="0"/>
+                    </a:p>
+                  </a:txBody>
+                  <a:tcPr/>
+                </a:tc>
+                <a:tc hMerge="1">
+                  <a:txBody>
+                    <a:bodyPr/>
+                    <a:lstStyle/>
+                    <a:p>
+                      <a:endParaRPr lang="pt-BR" dirty="0"/>
+                    </a:p>
+                  </a:txBody>
+                  <a:tcPr/>
+                </a:tc>
+                <a:extLst>
+                  <a:ext uri="{0D108BD9-81ED-4DB2-BD59-A6C34878D82A}">
+                    <a16:rowId xmlns:a16="http://schemas.microsoft.com/office/drawing/2014/main" val="1150422264"/>
+                  </a:ext>
+                </a:extLst>
+              </a:tr>
+              <a:tr h="370840">
+                <a:tc>
+                  <a:txBody>
+                    <a:bodyPr/>
+                    <a:lstStyle/>
+                    <a:p>
+                      <a:pPr marL="0" marR="0" lvl="0" indent="0" algn="l" defTabSz="914400" rtl="0" eaLnBrk="1" fontAlgn="auto" latinLnBrk="0" hangingPunct="1">
+                        <a:lnSpc>
+                          <a:spcPct val="100000"/>
+                        </a:lnSpc>
+                        <a:spcBef>
+                          <a:spcPts val="0"/>
+                        </a:spcBef>
+                        <a:spcAft>
+                          <a:spcPts val="0"/>
+                        </a:spcAft>
+                        <a:buClrTx/>
+                        <a:buSzTx/>
+                        <a:buFontTx/>
+                        <a:buNone/>
+                        <a:tabLst/>
+                        <a:defRPr/>
+                      </a:pPr>
+                      <a:r>
+                        <a:rPr lang="en-US" sz="1000" b="1" dirty="0">
+                          <a:solidFill>
+                            <a:srgbClr val="1C2B4A"/>
+                          </a:solidFill>
+                          <a:latin typeface="Calibri" pitchFamily="34" charset="0"/>
+                          <a:ea typeface="Calibri" pitchFamily="34" charset="-122"/>
+                          <a:cs typeface="Calibri" pitchFamily="34" charset="-120"/>
+                        </a:rPr>
+                        <a:t>Candidate models</a:t>
+                      </a:r>
+                      <a:endParaRPr lang="en-US" sz="1000" dirty="0"/>
+                    </a:p>
+                  </a:txBody>
+                  <a:tcPr/>
+                </a:tc>
+                <a:tc>
+                  <a:txBody>
+                    <a:bodyPr/>
+                    <a:lstStyle/>
+                    <a:p>
+                      <a:pPr marL="0" marR="0" lvl="0" indent="0" algn="l" defTabSz="914400" rtl="0" eaLnBrk="1" fontAlgn="auto" latinLnBrk="0" hangingPunct="1">
+                        <a:lnSpc>
+                          <a:spcPct val="100000"/>
+                        </a:lnSpc>
+                        <a:spcBef>
+                          <a:spcPts val="0"/>
+                        </a:spcBef>
+                        <a:spcAft>
+                          <a:spcPts val="0"/>
+                        </a:spcAft>
+                        <a:buClrTx/>
+                        <a:buSzTx/>
+                        <a:buFontTx/>
+                        <a:buNone/>
+                        <a:tabLst/>
+                        <a:defRPr/>
+                      </a:pPr>
+                      <a:r>
+                        <a:rPr lang="en-US" sz="1000" i="1" dirty="0">
+                          <a:solidFill>
+                            <a:srgbClr val="4A6587"/>
+                          </a:solidFill>
+                          <a:latin typeface="Calibri" pitchFamily="34" charset="0"/>
+                          <a:ea typeface="Calibri" pitchFamily="34" charset="-122"/>
+                          <a:cs typeface="Calibri" pitchFamily="34" charset="-120"/>
+                        </a:rPr>
+                        <a:t>Decision Trees, Random Forests, and </a:t>
+                      </a:r>
+                      <a:r>
+                        <a:rPr lang="en-US" sz="1000" i="1" dirty="0" err="1">
+                          <a:solidFill>
+                            <a:srgbClr val="4A6587"/>
+                          </a:solidFill>
+                          <a:latin typeface="Calibri" pitchFamily="34" charset="0"/>
+                          <a:ea typeface="Calibri" pitchFamily="34" charset="-122"/>
+                          <a:cs typeface="Calibri" pitchFamily="34" charset="-120"/>
+                        </a:rPr>
+                        <a:t>XGBoost</a:t>
+                      </a:r>
+                      <a:endParaRPr lang="en-US" sz="1000" dirty="0"/>
+                    </a:p>
+                  </a:txBody>
+                  <a:tcPr/>
+                </a:tc>
+                <a:extLst>
+                  <a:ext uri="{0D108BD9-81ED-4DB2-BD59-A6C34878D82A}">
+                    <a16:rowId xmlns:a16="http://schemas.microsoft.com/office/drawing/2014/main" val="618187936"/>
+                  </a:ext>
+                </a:extLst>
+              </a:tr>
+              <a:tr h="370840">
+                <a:tc>
+                  <a:txBody>
+                    <a:bodyPr/>
+                    <a:lstStyle/>
+                    <a:p>
+                      <a:pPr marL="0" marR="0" lvl="0" indent="0" algn="l" defTabSz="914400" rtl="0" eaLnBrk="1" fontAlgn="auto" latinLnBrk="0" hangingPunct="1">
+                        <a:lnSpc>
+                          <a:spcPct val="100000"/>
+                        </a:lnSpc>
+                        <a:spcBef>
+                          <a:spcPts val="0"/>
+                        </a:spcBef>
+                        <a:spcAft>
+                          <a:spcPts val="0"/>
+                        </a:spcAft>
+                        <a:buClrTx/>
+                        <a:buSzTx/>
+                        <a:buFontTx/>
+                        <a:buNone/>
+                        <a:tabLst/>
+                        <a:defRPr/>
+                      </a:pPr>
+                      <a:r>
+                        <a:rPr lang="en-US" sz="1000" b="1" dirty="0">
+                          <a:solidFill>
+                            <a:srgbClr val="1C2B4A"/>
+                          </a:solidFill>
+                          <a:latin typeface="Calibri" pitchFamily="34" charset="0"/>
+                          <a:ea typeface="Calibri" pitchFamily="34" charset="-122"/>
+                          <a:cs typeface="Calibri" pitchFamily="34" charset="-120"/>
+                        </a:rPr>
+                        <a:t>CV strategy</a:t>
+                      </a:r>
+                      <a:endParaRPr lang="en-US" sz="1000" dirty="0"/>
+                    </a:p>
+                  </a:txBody>
+                  <a:tcPr/>
+                </a:tc>
+                <a:tc>
+                  <a:txBody>
+                    <a:bodyPr/>
+                    <a:lstStyle/>
+                    <a:p>
+                      <a:pPr marL="0" marR="0" lvl="0" indent="0" algn="l" defTabSz="914400" rtl="0" eaLnBrk="1" fontAlgn="auto" latinLnBrk="0" hangingPunct="1">
+                        <a:lnSpc>
+                          <a:spcPct val="100000"/>
+                        </a:lnSpc>
+                        <a:spcBef>
+                          <a:spcPts val="0"/>
+                        </a:spcBef>
+                        <a:spcAft>
+                          <a:spcPts val="0"/>
+                        </a:spcAft>
+                        <a:buClrTx/>
+                        <a:buSzTx/>
+                        <a:buFontTx/>
+                        <a:buNone/>
+                        <a:tabLst/>
+                        <a:defRPr/>
+                      </a:pPr>
+                      <a:r>
+                        <a:rPr lang="en-US" sz="1000" i="1" dirty="0">
+                          <a:solidFill>
+                            <a:srgbClr val="4A6587"/>
+                          </a:solidFill>
+                          <a:latin typeface="Calibri" pitchFamily="34" charset="0"/>
+                          <a:ea typeface="Calibri" pitchFamily="34" charset="-122"/>
+                          <a:cs typeface="Calibri" pitchFamily="34" charset="-120"/>
+                        </a:rPr>
+                        <a:t>5x3 Nested Cross-Validation (5 Outer Folds, 3 Inner Folds)</a:t>
+                      </a:r>
+                      <a:endParaRPr lang="en-US" sz="1000" dirty="0"/>
+                    </a:p>
+                  </a:txBody>
+                  <a:tcPr/>
+                </a:tc>
+                <a:extLst>
+                  <a:ext uri="{0D108BD9-81ED-4DB2-BD59-A6C34878D82A}">
+                    <a16:rowId xmlns:a16="http://schemas.microsoft.com/office/drawing/2014/main" val="2480663719"/>
+                  </a:ext>
+                </a:extLst>
+              </a:tr>
+              <a:tr h="370840">
+                <a:tc>
+                  <a:txBody>
+                    <a:bodyPr/>
+                    <a:lstStyle/>
+                    <a:p>
+                      <a:pPr marL="0" marR="0" lvl="0" indent="0" algn="l" defTabSz="914400" rtl="0" eaLnBrk="1" fontAlgn="auto" latinLnBrk="0" hangingPunct="1">
+                        <a:lnSpc>
+                          <a:spcPct val="100000"/>
+                        </a:lnSpc>
+                        <a:spcBef>
+                          <a:spcPts val="0"/>
+                        </a:spcBef>
+                        <a:spcAft>
+                          <a:spcPts val="0"/>
+                        </a:spcAft>
+                        <a:buClrTx/>
+                        <a:buSzTx/>
+                        <a:buFontTx/>
+                        <a:buNone/>
+                        <a:tabLst/>
+                        <a:defRPr/>
+                      </a:pPr>
+                      <a:r>
+                        <a:rPr lang="en-US" sz="1000" b="1" dirty="0">
+                          <a:solidFill>
+                            <a:srgbClr val="1C2B4A"/>
+                          </a:solidFill>
+                          <a:latin typeface="Calibri" pitchFamily="34" charset="0"/>
+                          <a:ea typeface="Calibri" pitchFamily="34" charset="-122"/>
+                          <a:cs typeface="Calibri" pitchFamily="34" charset="-120"/>
+                        </a:rPr>
+                        <a:t>Selection criterion</a:t>
+                      </a:r>
+                      <a:endParaRPr lang="en-US" sz="1000" dirty="0"/>
+                    </a:p>
+                  </a:txBody>
+                  <a:tcPr/>
+                </a:tc>
+                <a:tc>
+                  <a:txBody>
+                    <a:bodyPr/>
+                    <a:lstStyle/>
+                    <a:p>
+                      <a:pPr marL="0" marR="0" lvl="0" indent="0" algn="l" defTabSz="914400" rtl="0" eaLnBrk="1" fontAlgn="auto" latinLnBrk="0" hangingPunct="1">
+                        <a:lnSpc>
+                          <a:spcPct val="100000"/>
+                        </a:lnSpc>
+                        <a:spcBef>
+                          <a:spcPts val="0"/>
+                        </a:spcBef>
+                        <a:spcAft>
+                          <a:spcPts val="0"/>
+                        </a:spcAft>
+                        <a:buClrTx/>
+                        <a:buSzTx/>
+                        <a:buFontTx/>
+                        <a:buNone/>
+                        <a:tabLst/>
+                        <a:defRPr/>
+                      </a:pPr>
+                      <a:r>
+                        <a:rPr lang="en-US" sz="1000" i="1" dirty="0">
+                          <a:solidFill>
+                            <a:srgbClr val="4A6587"/>
+                          </a:solidFill>
+                          <a:latin typeface="Calibri" pitchFamily="34" charset="0"/>
+                          <a:ea typeface="Calibri" pitchFamily="34" charset="-122"/>
+                          <a:cs typeface="Calibri" pitchFamily="34" charset="-120"/>
+                        </a:rPr>
+                        <a:t>Quadratic Weighted Kappa (QWK)</a:t>
+                      </a:r>
+                      <a:endParaRPr lang="en-US" sz="1000" dirty="0"/>
+                    </a:p>
+                  </a:txBody>
+                  <a:tcPr/>
+                </a:tc>
+                <a:extLst>
+                  <a:ext uri="{0D108BD9-81ED-4DB2-BD59-A6C34878D82A}">
+                    <a16:rowId xmlns:a16="http://schemas.microsoft.com/office/drawing/2014/main" val="3253167575"/>
+                  </a:ext>
+                </a:extLst>
+              </a:tr>
+              <a:tr h="370840">
+                <a:tc>
+                  <a:txBody>
+                    <a:bodyPr/>
+                    <a:lstStyle/>
+                    <a:p>
+                      <a:pPr marL="0" marR="0" lvl="0" indent="0" algn="l" defTabSz="914400" rtl="0" eaLnBrk="1" fontAlgn="auto" latinLnBrk="0" hangingPunct="1">
+                        <a:lnSpc>
+                          <a:spcPct val="100000"/>
+                        </a:lnSpc>
+                        <a:spcBef>
+                          <a:spcPts val="0"/>
+                        </a:spcBef>
+                        <a:spcAft>
+                          <a:spcPts val="0"/>
+                        </a:spcAft>
+                        <a:buClrTx/>
+                        <a:buSzTx/>
+                        <a:buFontTx/>
+                        <a:buNone/>
+                        <a:tabLst/>
+                        <a:defRPr/>
+                      </a:pPr>
+                      <a:r>
+                        <a:rPr lang="en-US" sz="1000" b="1" dirty="0">
+                          <a:solidFill>
+                            <a:srgbClr val="1C2B4A"/>
+                          </a:solidFill>
+                          <a:latin typeface="Calibri" pitchFamily="34" charset="0"/>
+                          <a:ea typeface="Calibri" pitchFamily="34" charset="-122"/>
+                          <a:cs typeface="Calibri" pitchFamily="34" charset="-120"/>
+                        </a:rPr>
+                        <a:t>Chosen model</a:t>
+                      </a:r>
+                      <a:endParaRPr lang="en-US" sz="1000" dirty="0"/>
+                    </a:p>
+                  </a:txBody>
+                  <a:tcPr/>
+                </a:tc>
+                <a:tc>
+                  <a:txBody>
+                    <a:bodyPr/>
+                    <a:lstStyle/>
+                    <a:p>
+                      <a:pPr marL="0" marR="0" lvl="0" indent="0" algn="l" defTabSz="914400" rtl="0" eaLnBrk="1" fontAlgn="auto" latinLnBrk="0" hangingPunct="1">
+                        <a:lnSpc>
+                          <a:spcPct val="100000"/>
+                        </a:lnSpc>
+                        <a:spcBef>
+                          <a:spcPts val="0"/>
+                        </a:spcBef>
+                        <a:spcAft>
+                          <a:spcPts val="0"/>
+                        </a:spcAft>
+                        <a:buClrTx/>
+                        <a:buSzTx/>
+                        <a:buFontTx/>
+                        <a:buNone/>
+                        <a:tabLst/>
+                        <a:defRPr/>
+                      </a:pPr>
+                      <a:r>
+                        <a:rPr lang="en-US" sz="1000" i="1" dirty="0" err="1">
+                          <a:solidFill>
+                            <a:srgbClr val="4A6587"/>
+                          </a:solidFill>
+                          <a:latin typeface="Calibri" pitchFamily="34" charset="0"/>
+                          <a:ea typeface="Calibri" pitchFamily="34" charset="-122"/>
+                          <a:cs typeface="Calibri" pitchFamily="34" charset="-120"/>
+                        </a:rPr>
+                        <a:t>XGBoost</a:t>
+                      </a:r>
+                      <a:r>
+                        <a:rPr lang="en-US" sz="1000" i="1" dirty="0">
+                          <a:solidFill>
+                            <a:srgbClr val="4A6587"/>
+                          </a:solidFill>
+                          <a:latin typeface="Calibri" pitchFamily="34" charset="0"/>
+                          <a:ea typeface="Calibri" pitchFamily="34" charset="-122"/>
+                          <a:cs typeface="Calibri" pitchFamily="34" charset="-120"/>
+                        </a:rPr>
+                        <a:t>, as it achieved an optimal QWK of ~0.817 and demonstrated tight variance with high median performance</a:t>
+                      </a:r>
+                      <a:endParaRPr lang="en-US" sz="1000" dirty="0"/>
+                    </a:p>
+                  </a:txBody>
+                  <a:tcPr/>
+                </a:tc>
+                <a:extLst>
+                  <a:ext uri="{0D108BD9-81ED-4DB2-BD59-A6C34878D82A}">
+                    <a16:rowId xmlns:a16="http://schemas.microsoft.com/office/drawing/2014/main" val="935103308"/>
+                  </a:ext>
+                </a:extLst>
+              </a:tr>
+              <a:tr h="370840">
+                <a:tc>
+                  <a:txBody>
+                    <a:bodyPr/>
+                    <a:lstStyle/>
+                    <a:p>
+                      <a:pPr marL="0" marR="0" lvl="0" indent="0" algn="l" defTabSz="914400" rtl="0" eaLnBrk="1" fontAlgn="auto" latinLnBrk="0" hangingPunct="1">
+                        <a:lnSpc>
+                          <a:spcPct val="100000"/>
+                        </a:lnSpc>
+                        <a:spcBef>
+                          <a:spcPts val="0"/>
+                        </a:spcBef>
+                        <a:spcAft>
+                          <a:spcPts val="0"/>
+                        </a:spcAft>
+                        <a:buClrTx/>
+                        <a:buSzTx/>
+                        <a:buFontTx/>
+                        <a:buNone/>
+                        <a:tabLst/>
+                        <a:defRPr/>
+                      </a:pPr>
+                      <a:r>
+                        <a:rPr lang="en-US" sz="1000" b="1" dirty="0">
+                          <a:solidFill>
+                            <a:srgbClr val="1C2B4A"/>
+                          </a:solidFill>
+                          <a:latin typeface="Calibri" pitchFamily="34" charset="0"/>
+                          <a:ea typeface="Calibri" pitchFamily="34" charset="-122"/>
+                          <a:cs typeface="Calibri" pitchFamily="34" charset="-120"/>
+                        </a:rPr>
+                        <a:t>Search strategy</a:t>
+                      </a:r>
+                      <a:endParaRPr lang="en-US" sz="1000" dirty="0"/>
+                    </a:p>
+                  </a:txBody>
+                  <a:tcPr/>
+                </a:tc>
+                <a:tc>
+                  <a:txBody>
+                    <a:bodyPr/>
+                    <a:lstStyle/>
+                    <a:p>
+                      <a:pPr marL="0" marR="0" lvl="0" indent="0" algn="l" defTabSz="914400" rtl="0" eaLnBrk="1" fontAlgn="auto" latinLnBrk="0" hangingPunct="1">
+                        <a:lnSpc>
+                          <a:spcPct val="100000"/>
+                        </a:lnSpc>
+                        <a:spcBef>
+                          <a:spcPts val="0"/>
+                        </a:spcBef>
+                        <a:spcAft>
+                          <a:spcPts val="0"/>
+                        </a:spcAft>
+                        <a:buClrTx/>
+                        <a:buSzTx/>
+                        <a:buFontTx/>
+                        <a:buNone/>
+                        <a:tabLst/>
+                        <a:defRPr/>
+                      </a:pPr>
+                      <a:r>
+                        <a:rPr lang="en-US" sz="1000" i="1" dirty="0">
+                          <a:solidFill>
+                            <a:srgbClr val="4A6587"/>
+                          </a:solidFill>
+                          <a:latin typeface="Calibri" pitchFamily="34" charset="0"/>
+                          <a:ea typeface="Calibri" pitchFamily="34" charset="-122"/>
+                          <a:cs typeface="Calibri" pitchFamily="34" charset="-120"/>
+                        </a:rPr>
+                        <a:t>Bayesian Optimization via </a:t>
+                      </a:r>
+                      <a:r>
+                        <a:rPr lang="en-US" sz="1000" i="1" dirty="0" err="1">
+                          <a:solidFill>
+                            <a:srgbClr val="4A6587"/>
+                          </a:solidFill>
+                          <a:latin typeface="Calibri" pitchFamily="34" charset="0"/>
+                          <a:ea typeface="Calibri" pitchFamily="34" charset="-122"/>
+                          <a:cs typeface="Calibri" pitchFamily="34" charset="-120"/>
+                        </a:rPr>
+                        <a:t>Optuna</a:t>
+                      </a:r>
+                      <a:r>
+                        <a:rPr lang="en-US" sz="1000" i="1" dirty="0">
+                          <a:solidFill>
+                            <a:srgbClr val="4A6587"/>
+                          </a:solidFill>
+                          <a:latin typeface="Calibri" pitchFamily="34" charset="0"/>
+                          <a:ea typeface="Calibri" pitchFamily="34" charset="-122"/>
+                          <a:cs typeface="Calibri" pitchFamily="34" charset="-120"/>
+                        </a:rPr>
+                        <a:t> coupled with a Cached Unified Grid Search</a:t>
+                      </a:r>
+                      <a:endParaRPr lang="en-US" sz="1000" dirty="0"/>
+                    </a:p>
+                  </a:txBody>
+                  <a:tcPr/>
+                </a:tc>
+                <a:extLst>
+                  <a:ext uri="{0D108BD9-81ED-4DB2-BD59-A6C34878D82A}">
+                    <a16:rowId xmlns:a16="http://schemas.microsoft.com/office/drawing/2014/main" val="1072967941"/>
+                  </a:ext>
+                </a:extLst>
+              </a:tr>
+              <a:tr h="370840">
+                <a:tc>
+                  <a:txBody>
+                    <a:bodyPr/>
+                    <a:lstStyle/>
+                    <a:p>
+                      <a:pPr marL="0" marR="0" lvl="0" indent="0" algn="l" defTabSz="914400" rtl="0" eaLnBrk="1" fontAlgn="auto" latinLnBrk="0" hangingPunct="1">
+                        <a:lnSpc>
+                          <a:spcPct val="100000"/>
+                        </a:lnSpc>
+                        <a:spcBef>
+                          <a:spcPts val="0"/>
+                        </a:spcBef>
+                        <a:spcAft>
+                          <a:spcPts val="0"/>
+                        </a:spcAft>
+                        <a:buClrTx/>
+                        <a:buSzTx/>
+                        <a:buFontTx/>
+                        <a:buNone/>
+                        <a:tabLst/>
+                        <a:defRPr/>
+                      </a:pPr>
+                      <a:r>
+                        <a:rPr lang="en-US" sz="1000" b="1" dirty="0">
+                          <a:solidFill>
+                            <a:srgbClr val="1C2B4A"/>
+                          </a:solidFill>
+                          <a:latin typeface="Calibri" pitchFamily="34" charset="0"/>
+                          <a:ea typeface="Calibri" pitchFamily="34" charset="-122"/>
+                          <a:cs typeface="Calibri" pitchFamily="34" charset="-120"/>
+                        </a:rPr>
+                        <a:t>Search space</a:t>
+                      </a:r>
+                      <a:endParaRPr lang="en-US" sz="1000" dirty="0"/>
+                    </a:p>
+                  </a:txBody>
+                  <a:tcPr/>
+                </a:tc>
+                <a:tc>
+                  <a:txBody>
+                    <a:bodyPr/>
+                    <a:lstStyle/>
+                    <a:p>
+                      <a:pPr marL="0" marR="0" lvl="0" indent="0" algn="l" defTabSz="914400" rtl="0" eaLnBrk="1" fontAlgn="auto" latinLnBrk="0" hangingPunct="1">
+                        <a:lnSpc>
+                          <a:spcPct val="100000"/>
+                        </a:lnSpc>
+                        <a:spcBef>
+                          <a:spcPts val="0"/>
+                        </a:spcBef>
+                        <a:spcAft>
+                          <a:spcPts val="0"/>
+                        </a:spcAft>
+                        <a:buClrTx/>
+                        <a:buSzTx/>
+                        <a:buFontTx/>
+                        <a:buNone/>
+                        <a:tabLst/>
+                        <a:defRPr/>
+                      </a:pPr>
+                      <a:r>
+                        <a:rPr lang="en-US" sz="1000" i="1" dirty="0">
+                          <a:solidFill>
+                            <a:srgbClr val="4A6587"/>
+                          </a:solidFill>
+                          <a:latin typeface="Calibri" pitchFamily="34" charset="0"/>
+                          <a:ea typeface="Calibri" pitchFamily="34" charset="-122"/>
+                          <a:cs typeface="Calibri" pitchFamily="34" charset="-120"/>
+                        </a:rPr>
+                        <a:t>Tree ensemble architecture (</a:t>
+                      </a:r>
+                      <a:r>
+                        <a:rPr lang="en-US" sz="1000" i="1" dirty="0" err="1">
+                          <a:solidFill>
+                            <a:srgbClr val="4A6587"/>
+                          </a:solidFill>
+                          <a:latin typeface="Calibri" pitchFamily="34" charset="0"/>
+                          <a:ea typeface="Calibri" pitchFamily="34" charset="-122"/>
+                          <a:cs typeface="Calibri" pitchFamily="34" charset="-120"/>
+                        </a:rPr>
+                        <a:t>n_estimators</a:t>
+                      </a:r>
+                      <a:r>
+                        <a:rPr lang="en-US" sz="1000" i="1" dirty="0">
+                          <a:solidFill>
+                            <a:srgbClr val="4A6587"/>
+                          </a:solidFill>
+                          <a:latin typeface="Calibri" pitchFamily="34" charset="0"/>
+                          <a:ea typeface="Calibri" pitchFamily="34" charset="-122"/>
+                          <a:cs typeface="Calibri" pitchFamily="34" charset="-120"/>
+                        </a:rPr>
+                        <a:t>, </a:t>
+                      </a:r>
+                      <a:r>
+                        <a:rPr lang="en-US" sz="1000" i="1" dirty="0" err="1">
+                          <a:solidFill>
+                            <a:srgbClr val="4A6587"/>
+                          </a:solidFill>
+                          <a:latin typeface="Calibri" pitchFamily="34" charset="0"/>
+                          <a:ea typeface="Calibri" pitchFamily="34" charset="-122"/>
+                          <a:cs typeface="Calibri" pitchFamily="34" charset="-120"/>
+                        </a:rPr>
+                        <a:t>max_depth</a:t>
+                      </a:r>
+                      <a:r>
+                        <a:rPr lang="en-US" sz="1000" i="1" dirty="0">
+                          <a:solidFill>
+                            <a:srgbClr val="4A6587"/>
+                          </a:solidFill>
+                          <a:latin typeface="Calibri" pitchFamily="34" charset="0"/>
+                          <a:ea typeface="Calibri" pitchFamily="34" charset="-122"/>
+                          <a:cs typeface="Calibri" pitchFamily="34" charset="-120"/>
+                        </a:rPr>
+                        <a:t>), learning dynamics, and regularization bounds</a:t>
+                      </a:r>
+                      <a:endParaRPr lang="en-US" sz="1000" dirty="0"/>
+                    </a:p>
+                  </a:txBody>
+                  <a:tcPr/>
+                </a:tc>
+                <a:extLst>
+                  <a:ext uri="{0D108BD9-81ED-4DB2-BD59-A6C34878D82A}">
+                    <a16:rowId xmlns:a16="http://schemas.microsoft.com/office/drawing/2014/main" val="1696017795"/>
+                  </a:ext>
+                </a:extLst>
+              </a:tr>
+              <a:tr h="370840">
+                <a:tc>
+                  <a:txBody>
+                    <a:bodyPr/>
+                    <a:lstStyle/>
+                    <a:p>
+                      <a:pPr marL="0" marR="0" lvl="0" indent="0" algn="l" defTabSz="914400" rtl="0" eaLnBrk="1" fontAlgn="auto" latinLnBrk="0" hangingPunct="1">
+                        <a:lnSpc>
+                          <a:spcPct val="100000"/>
+                        </a:lnSpc>
+                        <a:spcBef>
+                          <a:spcPts val="0"/>
+                        </a:spcBef>
+                        <a:spcAft>
+                          <a:spcPts val="0"/>
+                        </a:spcAft>
+                        <a:buClrTx/>
+                        <a:buSzTx/>
+                        <a:buFontTx/>
+                        <a:buNone/>
+                        <a:tabLst/>
+                        <a:defRPr/>
+                      </a:pPr>
+                      <a:r>
+                        <a:rPr lang="en-US" sz="1000" b="1" dirty="0">
+                          <a:solidFill>
+                            <a:srgbClr val="1C2B4A"/>
+                          </a:solidFill>
+                          <a:latin typeface="Calibri" pitchFamily="34" charset="0"/>
+                          <a:ea typeface="Calibri" pitchFamily="34" charset="-122"/>
+                          <a:cs typeface="Calibri" pitchFamily="34" charset="-120"/>
+                        </a:rPr>
+                        <a:t>Best config</a:t>
+                      </a:r>
+                      <a:endParaRPr lang="en-US" sz="1000" dirty="0"/>
+                    </a:p>
+                  </a:txBody>
+                  <a:tcPr/>
+                </a:tc>
+                <a:tc>
+                  <a:txBody>
+                    <a:bodyPr/>
+                    <a:lstStyle/>
+                    <a:p>
+                      <a:pPr marL="0" marR="0" lvl="0" indent="0" algn="l" defTabSz="914400" rtl="0" eaLnBrk="1" fontAlgn="auto" latinLnBrk="0" hangingPunct="1">
+                        <a:lnSpc>
+                          <a:spcPct val="100000"/>
+                        </a:lnSpc>
+                        <a:spcBef>
+                          <a:spcPts val="0"/>
+                        </a:spcBef>
+                        <a:spcAft>
+                          <a:spcPts val="0"/>
+                        </a:spcAft>
+                        <a:buClrTx/>
+                        <a:buSzTx/>
+                        <a:buFontTx/>
+                        <a:buNone/>
+                        <a:tabLst/>
+                        <a:defRPr/>
+                      </a:pPr>
+                      <a:r>
+                        <a:rPr lang="en-US" sz="1000" i="1" dirty="0" err="1">
+                          <a:solidFill>
+                            <a:srgbClr val="4A6587"/>
+                          </a:solidFill>
+                          <a:latin typeface="Calibri" pitchFamily="34" charset="0"/>
+                          <a:ea typeface="Calibri" pitchFamily="34" charset="-122"/>
+                          <a:cs typeface="Calibri" pitchFamily="34" charset="-120"/>
+                        </a:rPr>
+                        <a:t>n_estimators</a:t>
+                      </a:r>
+                      <a:r>
+                        <a:rPr lang="en-US" sz="1000" i="1" dirty="0">
+                          <a:solidFill>
+                            <a:srgbClr val="4A6587"/>
+                          </a:solidFill>
+                          <a:latin typeface="Calibri" pitchFamily="34" charset="0"/>
+                          <a:ea typeface="Calibri" pitchFamily="34" charset="-122"/>
+                          <a:cs typeface="Calibri" pitchFamily="34" charset="-120"/>
+                        </a:rPr>
+                        <a:t>=397, </a:t>
+                      </a:r>
+                      <a:r>
+                        <a:rPr lang="en-US" sz="1000" i="1" dirty="0" err="1">
+                          <a:solidFill>
+                            <a:srgbClr val="4A6587"/>
+                          </a:solidFill>
+                          <a:latin typeface="Calibri" pitchFamily="34" charset="0"/>
+                          <a:ea typeface="Calibri" pitchFamily="34" charset="-122"/>
+                          <a:cs typeface="Calibri" pitchFamily="34" charset="-120"/>
+                        </a:rPr>
+                        <a:t>max_depth</a:t>
+                      </a:r>
+                      <a:r>
+                        <a:rPr lang="en-US" sz="1000" i="1" dirty="0">
+                          <a:solidFill>
+                            <a:srgbClr val="4A6587"/>
+                          </a:solidFill>
+                          <a:latin typeface="Calibri" pitchFamily="34" charset="0"/>
+                          <a:ea typeface="Calibri" pitchFamily="34" charset="-122"/>
+                          <a:cs typeface="Calibri" pitchFamily="34" charset="-120"/>
+                        </a:rPr>
+                        <a:t>=5, learning_rate≈0.107, </a:t>
+                      </a:r>
+                      <a:r>
+                        <a:rPr lang="en-US" sz="1000" i="1" dirty="0" err="1">
+                          <a:solidFill>
+                            <a:srgbClr val="4A6587"/>
+                          </a:solidFill>
+                          <a:latin typeface="Calibri" pitchFamily="34" charset="0"/>
+                          <a:ea typeface="Calibri" pitchFamily="34" charset="-122"/>
+                          <a:cs typeface="Calibri" pitchFamily="34" charset="-120"/>
+                        </a:rPr>
+                        <a:t>min_child_weight</a:t>
+                      </a:r>
+                      <a:r>
+                        <a:rPr lang="en-US" sz="1000" i="1" dirty="0">
+                          <a:solidFill>
+                            <a:srgbClr val="4A6587"/>
+                          </a:solidFill>
+                          <a:latin typeface="Calibri" pitchFamily="34" charset="0"/>
+                          <a:ea typeface="Calibri" pitchFamily="34" charset="-122"/>
+                          <a:cs typeface="Calibri" pitchFamily="34" charset="-120"/>
+                        </a:rPr>
+                        <a:t>=5, subsample≈0.965, reg_lambda≈0.825</a:t>
+                      </a:r>
+                      <a:endParaRPr lang="en-US" sz="1000" dirty="0"/>
+                    </a:p>
+                  </a:txBody>
+                  <a:tcPr/>
+                </a:tc>
+                <a:extLst>
+                  <a:ext uri="{0D108BD9-81ED-4DB2-BD59-A6C34878D82A}">
+                    <a16:rowId xmlns:a16="http://schemas.microsoft.com/office/drawing/2014/main" val="1154922163"/>
+                  </a:ext>
+                </a:extLst>
+              </a:tr>
+              <a:tr h="370840">
+                <a:tc>
+                  <a:txBody>
+                    <a:bodyPr/>
+                    <a:lstStyle/>
+                    <a:p>
+                      <a:pPr marL="0" marR="0" lvl="0" indent="0" algn="l" defTabSz="914400" rtl="0" eaLnBrk="1" fontAlgn="auto" latinLnBrk="0" hangingPunct="1">
+                        <a:lnSpc>
+                          <a:spcPct val="100000"/>
+                        </a:lnSpc>
+                        <a:spcBef>
+                          <a:spcPts val="0"/>
+                        </a:spcBef>
+                        <a:spcAft>
+                          <a:spcPts val="0"/>
+                        </a:spcAft>
+                        <a:buClrTx/>
+                        <a:buSzTx/>
+                        <a:buFontTx/>
+                        <a:buNone/>
+                        <a:tabLst/>
+                        <a:defRPr/>
+                      </a:pPr>
+                      <a:r>
+                        <a:rPr lang="en-US" sz="1000" b="1" dirty="0">
+                          <a:solidFill>
+                            <a:srgbClr val="1C2B4A"/>
+                          </a:solidFill>
+                          <a:latin typeface="Calibri" pitchFamily="34" charset="0"/>
+                          <a:ea typeface="Calibri" pitchFamily="34" charset="-122"/>
+                          <a:cs typeface="Calibri" pitchFamily="34" charset="-120"/>
+                        </a:rPr>
+                        <a:t>Statistical test</a:t>
+                      </a:r>
+                      <a:endParaRPr lang="en-US" sz="1000" dirty="0"/>
+                    </a:p>
+                  </a:txBody>
+                  <a:tcPr/>
+                </a:tc>
+                <a:tc>
+                  <a:txBody>
+                    <a:bodyPr/>
+                    <a:lstStyle/>
+                    <a:p>
+                      <a:pPr marL="0" marR="0" lvl="0" indent="0" algn="l" defTabSz="914400" rtl="0" eaLnBrk="1" fontAlgn="auto" latinLnBrk="0" hangingPunct="1">
+                        <a:lnSpc>
+                          <a:spcPct val="100000"/>
+                        </a:lnSpc>
+                        <a:spcBef>
+                          <a:spcPts val="0"/>
+                        </a:spcBef>
+                        <a:spcAft>
+                          <a:spcPts val="0"/>
+                        </a:spcAft>
+                        <a:buClrTx/>
+                        <a:buSzTx/>
+                        <a:buFontTx/>
+                        <a:buNone/>
+                        <a:tabLst/>
+                        <a:defRPr/>
+                      </a:pPr>
+                      <a:r>
+                        <a:rPr lang="en-US" sz="1000" i="1" dirty="0">
+                          <a:solidFill>
+                            <a:srgbClr val="4A6587"/>
+                          </a:solidFill>
+                          <a:latin typeface="Calibri" pitchFamily="34" charset="0"/>
+                          <a:ea typeface="Calibri" pitchFamily="34" charset="-122"/>
+                          <a:cs typeface="Calibri" pitchFamily="34" charset="-120"/>
+                        </a:rPr>
+                        <a:t>Friedman Test for global significance, followed by Wilcoxon Signed-Rank Test. Due to N=5 folds, absolute dominance yielded a minimum achievable p-value of 0.0625.</a:t>
+                      </a:r>
+                      <a:endParaRPr lang="en-US" sz="1000" dirty="0"/>
+                    </a:p>
+                  </a:txBody>
+                  <a:tcPr/>
+                </a:tc>
+                <a:extLst>
+                  <a:ext uri="{0D108BD9-81ED-4DB2-BD59-A6C34878D82A}">
+                    <a16:rowId xmlns:a16="http://schemas.microsoft.com/office/drawing/2014/main" val="3719384042"/>
+                  </a:ext>
+                </a:extLst>
+              </a:tr>
+            </a:tbl>
+          </a:graphicData>
+        </a:graphic>
+      </p:graphicFrame>
     </p:spTree>
   </p:cSld>
   <p:clrMapOvr>
@@ -12761,14 +12461,14 @@
               <a:buNone/>
             </a:pPr>
             <a:r>
-              <a:rPr lang="en-US" sz="750" b="1" kern="0" spc="150" dirty="0">
+              <a:rPr lang="en-US" sz="1200" b="1" kern="0" spc="150" dirty="0">
                 <a:solidFill>
                   <a:srgbClr val="FFFFFF"/>
                 </a:solidFill>
               </a:rPr>
               <a:t>RESULTS</a:t>
             </a:r>
-            <a:endParaRPr lang="en-US" sz="750" dirty="0"/>
+            <a:endParaRPr lang="en-US" sz="1200" dirty="0"/>
           </a:p>
         </p:txBody>
       </p:sp>
@@ -13753,7 +13453,7 @@
         </p:nvSpPr>
         <p:spPr>
           <a:xfrm>
-            <a:off x="5809213" y="1018440"/>
+            <a:off x="5823281" y="1018440"/>
             <a:ext cx="2189295" cy="230832"/>
           </a:xfrm>
           <a:prstGeom prst="rect">
